--- a/09_meetings/FINLAND_Sales_Review_2026/ISZE_FINLAND_Sales_Review_FY2027_ModeA_only.pptx
+++ b/09_meetings/FINLAND_Sales_Review_2026/ISZE_FINLAND_Sales_Review_FY2027_ModeA_only.pptx
@@ -22,8 +22,6 @@
     <p:sldId id="270" r:id="rId21"/>
     <p:sldId id="271" r:id="rId22"/>
     <p:sldId id="272" r:id="rId23"/>
-    <p:sldId id="273" r:id="rId24"/>
-    <p:sldId id="274" r:id="rId25"/>
   </p:sldIdLst>
   <p:sldSz cx="12188952" cy="6858000" type="screen4x3"/>
   <p:notesSz cx="6858000" cy="9144000"/>
@@ -3453,7 +3451,7 @@
                 </a:solidFill>
                 <a:latin typeface="Calibri"/>
               </a:rPr>
-              <a:t>GPS</a:t>
+              <a:t>FLEET &amp; FY2027 TARGET</a:t>
             </a:r>
           </a:p>
         </p:txBody>
@@ -3488,7 +3486,7 @@
                 </a:solidFill>
                 <a:latin typeface="Calibri"/>
               </a:rPr>
-              <a:t>GPS Capture: 88.4%</a:t>
+              <a:t>The fleet is expected to decline in 2026</a:t>
             </a:r>
           </a:p>
         </p:txBody>
@@ -3571,16 +3569,118 @@
           </a:p>
         </p:txBody>
       </p:sp>
-      <p:sp>
-        <p:nvSpPr>
-          <p:cNvPr id="8" name="TextBox 7"/>
+      <p:pic>
+        <p:nvPicPr>
+          <p:cNvPr id="8" name="Picture 7" descr="uio.png"/>
+          <p:cNvPicPr>
+            <a:picLocks noChangeAspect="1"/>
+          </p:cNvPicPr>
+          <p:nvPr/>
+        </p:nvPicPr>
+        <p:blipFill>
+          <a:blip r:embed="rId3"/>
+          <a:stretch>
+            <a:fillRect/>
+          </a:stretch>
+        </p:blipFill>
+        <p:spPr>
+          <a:xfrm>
+            <a:off x="292608" y="2120980"/>
+            <a:ext cx="7178040" cy="3027520"/>
+          </a:xfrm>
+          <a:prstGeom prst="rect">
+            <a:avLst/>
+          </a:prstGeom>
+        </p:spPr>
+      </p:pic>
+      <p:sp>
+        <p:nvSpPr>
+          <p:cNvPr id="9" name="Rectangle 8"/>
+          <p:cNvSpPr/>
+          <p:nvPr/>
+        </p:nvSpPr>
+        <p:spPr>
+          <a:xfrm>
+            <a:off x="7726679" y="1188720"/>
+            <a:ext cx="22000" cy="4892040"/>
+          </a:xfrm>
+          <a:prstGeom prst="rect">
+            <a:avLst/>
+          </a:prstGeom>
+          <a:solidFill>
+            <a:srgbClr val="ECECEC"/>
+          </a:solidFill>
+          <a:ln>
+            <a:noFill/>
+          </a:ln>
+        </p:spPr>
+        <p:style>
+          <a:lnRef idx="1">
+            <a:schemeClr val="accent1"/>
+          </a:lnRef>
+          <a:fillRef idx="3">
+            <a:schemeClr val="accent1"/>
+          </a:fillRef>
+          <a:effectRef idx="2">
+            <a:schemeClr val="accent1"/>
+          </a:effectRef>
+          <a:fontRef idx="minor">
+            <a:schemeClr val="lt1"/>
+          </a:fontRef>
+        </p:style>
+        <p:txBody>
+          <a:bodyPr rtlCol="0" anchor="ctr"/>
+          <a:lstStyle/>
+          <a:p>
+            <a:pPr algn="ctr"/>
+          </a:p>
+        </p:txBody>
+      </p:sp>
+      <p:sp>
+        <p:nvSpPr>
+          <p:cNvPr id="10" name="TextBox 9"/>
           <p:cNvSpPr txBox="1"/>
           <p:nvPr/>
         </p:nvSpPr>
         <p:spPr>
           <a:xfrm>
-            <a:off x="292608" y="1234440"/>
-            <a:ext cx="10515600" cy="3200400"/>
+            <a:off x="7927847" y="1234440"/>
+            <a:ext cx="3886200" cy="320040"/>
+          </a:xfrm>
+          <a:prstGeom prst="rect">
+            <a:avLst/>
+          </a:prstGeom>
+          <a:noFill/>
+        </p:spPr>
+        <p:txBody>
+          <a:bodyPr wrap="square">
+            <a:spAutoFit/>
+          </a:bodyPr>
+          <a:lstStyle/>
+          <a:p>
+            <a:pPr algn="l"/>
+            <a:r>
+              <a:rPr sz="1200" b="1">
+                <a:solidFill>
+                  <a:srgbClr val="CC0E1E"/>
+                </a:solidFill>
+                <a:latin typeface="Calibri"/>
+              </a:rPr>
+              <a:t>WHAT THIS MEANS FOR FY2027</a:t>
+            </a:r>
+          </a:p>
+        </p:txBody>
+      </p:sp>
+      <p:sp>
+        <p:nvSpPr>
+          <p:cNvPr id="11" name="TextBox 10"/>
+          <p:cNvSpPr txBox="1"/>
+          <p:nvPr/>
+        </p:nvSpPr>
+        <p:spPr>
+          <a:xfrm>
+            <a:off x="7927847" y="1691640"/>
+            <a:ext cx="3794760" cy="4343400"/>
           </a:xfrm>
           <a:prstGeom prst="rect">
             <a:avLst/>
@@ -3602,7 +3702,7 @@
               </a:spcAft>
             </a:pPr>
             <a:r>
-              <a:rPr sz="1500" b="1">
+              <a:rPr sz="1250" b="1">
                 <a:solidFill>
                   <a:srgbClr val="CC0E1E"/>
                 </a:solidFill>
@@ -3611,13 +3711,13 @@
               <a:t>—  </a:t>
             </a:r>
             <a:r>
-              <a:rPr sz="1500">
+              <a:rPr sz="1250">
                 <a:solidFill>
                   <a:srgbClr val="1A1A1A"/>
                 </a:solidFill>
                 <a:latin typeface="Calibri"/>
               </a:rPr>
-              <a:t>GPS measures your actual parts purchases against the full potential of your fleet.</a:t>
+              <a:t>Fleet size (calendar year): 1,204 vehicles in 2025 → 1,196 working estimate for end-2026 (-0.7%).</a:t>
             </a:r>
           </a:p>
           <a:p>
@@ -3630,7 +3730,7 @@
               </a:spcAft>
             </a:pPr>
             <a:r>
-              <a:rPr sz="1500" b="1">
+              <a:rPr sz="1250" b="1">
                 <a:solidFill>
                   <a:srgbClr val="CC0E1E"/>
                 </a:solidFill>
@@ -3639,13 +3739,13 @@
               <a:t>—  </a:t>
             </a:r>
             <a:r>
-              <a:rPr sz="1500">
+              <a:rPr sz="1250">
                 <a:solidFill>
                   <a:srgbClr val="1A1A1A"/>
                 </a:solidFill>
                 <a:latin typeface="Calibri"/>
               </a:rPr>
-              <a:t>Finland today: 88.4% (FY2026 purchases against the CY2025 fleet potential).</a:t>
+              <a:t>The chart is calendar years 2019–2026 only. 2026 is a working year-end estimate, not a fiscal-year figure.</a:t>
             </a:r>
           </a:p>
           <a:p>
@@ -3658,7 +3758,7 @@
               </a:spcAft>
             </a:pPr>
             <a:r>
-              <a:rPr sz="1500" b="1">
+              <a:rPr sz="1250" b="1">
                 <a:solidFill>
                   <a:srgbClr val="CC0E1E"/>
                 </a:solidFill>
@@ -3667,13 +3767,13 @@
               <a:t>—  </a:t>
             </a:r>
             <a:r>
-              <a:rPr sz="1500">
+              <a:rPr sz="1250">
                 <a:solidFill>
                   <a:srgbClr val="1A1A1A"/>
                 </a:solidFill>
                 <a:latin typeface="Calibri"/>
               </a:rPr>
-              <a:t>Fleet potential: EUR 301K on 1,204 vehicles.</a:t>
+              <a:t>End-2026 mix: LCV / D-Max 1,196; CV — LD 0.</a:t>
             </a:r>
           </a:p>
           <a:p>
@@ -3686,7 +3786,7 @@
               </a:spcAft>
             </a:pPr>
             <a:r>
-              <a:rPr sz="1500" b="1">
+              <a:rPr sz="1250" b="1">
                 <a:solidFill>
                   <a:srgbClr val="CC0E1E"/>
                 </a:solidFill>
@@ -3695,13 +3795,41 @@
               <a:t>—  </a:t>
             </a:r>
             <a:r>
-              <a:rPr sz="1500">
+              <a:rPr sz="1250">
                 <a:solidFill>
                   <a:srgbClr val="1A1A1A"/>
                 </a:solidFill>
                 <a:latin typeface="Calibri"/>
               </a:rPr>
-              <a:t>Real, sustained headroom above 88.4% — the service-parts and SPA discussion are both direct levers on it.</a:t>
+              <a:t>The FY2027 extended target (ISZE→DB) applies a 5% price adjustment and 1.8% stretch — locked at EUR 365,728 from GPS Extended Target V3.1 (Dashboard column I).</a:t>
+            </a:r>
+          </a:p>
+          <a:p>
+            <a:pPr>
+              <a:lnSpc>
+                <a:spcPct val="125000"/>
+              </a:lnSpc>
+              <a:spcAft>
+                <a:spcPts val="1000"/>
+              </a:spcAft>
+            </a:pPr>
+            <a:r>
+              <a:rPr sz="1250" b="1">
+                <a:solidFill>
+                  <a:srgbClr val="CC0E1E"/>
+                </a:solidFill>
+                <a:latin typeface="Calibri"/>
+              </a:rPr>
+              <a:t>—  </a:t>
+            </a:r>
+            <a:r>
+              <a:rPr sz="1250">
+                <a:solidFill>
+                  <a:srgbClr val="1A1A1A"/>
+                </a:solidFill>
+                <a:latin typeface="Calibri"/>
+              </a:rPr>
+              <a:t>So the target is built from a slightly smaller fleet — not from an assumed growth story.</a:t>
             </a:r>
           </a:p>
         </p:txBody>
@@ -3829,7 +3957,7 @@
                 </a:solidFill>
                 <a:latin typeface="Calibri"/>
               </a:rPr>
-              <a:t>SERVICE-PARTS COVERAGE</a:t>
+              <a:t>FLEET &amp; FY2027 TARGET</a:t>
             </a:r>
           </a:p>
         </p:txBody>
@@ -3864,7 +3992,7 @@
                 </a:solidFill>
                 <a:latin typeface="Calibri"/>
               </a:rPr>
-              <a:t>Service-parts coverage: fuel filter is the clear gap</a:t>
+              <a:t>How the FY2027 extended target is built</a:t>
             </a:r>
           </a:p>
         </p:txBody>
@@ -3947,83 +4075,16 @@
           </a:p>
         </p:txBody>
       </p:sp>
-      <p:pic>
-        <p:nvPicPr>
-          <p:cNvPr id="8" name="Picture 7" descr="pms.png"/>
-          <p:cNvPicPr>
-            <a:picLocks noChangeAspect="1"/>
-          </p:cNvPicPr>
-          <p:nvPr/>
-        </p:nvPicPr>
-        <p:blipFill>
-          <a:blip r:embed="rId3"/>
-          <a:stretch>
-            <a:fillRect/>
-          </a:stretch>
-        </p:blipFill>
-        <p:spPr>
-          <a:xfrm>
-            <a:off x="292608" y="2050572"/>
-            <a:ext cx="7178040" cy="3168335"/>
-          </a:xfrm>
-          <a:prstGeom prst="rect">
-            <a:avLst/>
-          </a:prstGeom>
-        </p:spPr>
-      </p:pic>
-      <p:sp>
-        <p:nvSpPr>
-          <p:cNvPr id="9" name="Rectangle 8"/>
-          <p:cNvSpPr/>
-          <p:nvPr/>
-        </p:nvSpPr>
-        <p:spPr>
-          <a:xfrm>
-            <a:off x="7726679" y="1188720"/>
-            <a:ext cx="22000" cy="4892040"/>
-          </a:xfrm>
-          <a:prstGeom prst="rect">
-            <a:avLst/>
-          </a:prstGeom>
-          <a:solidFill>
-            <a:srgbClr val="ECECEC"/>
-          </a:solidFill>
-          <a:ln>
-            <a:noFill/>
-          </a:ln>
-        </p:spPr>
-        <p:style>
-          <a:lnRef idx="1">
-            <a:schemeClr val="accent1"/>
-          </a:lnRef>
-          <a:fillRef idx="3">
-            <a:schemeClr val="accent1"/>
-          </a:fillRef>
-          <a:effectRef idx="2">
-            <a:schemeClr val="accent1"/>
-          </a:effectRef>
-          <a:fontRef idx="minor">
-            <a:schemeClr val="lt1"/>
-          </a:fontRef>
-        </p:style>
-        <p:txBody>
-          <a:bodyPr rtlCol="0" anchor="ctr"/>
-          <a:lstStyle/>
-          <a:p>
-            <a:pPr algn="ctr"/>
-          </a:p>
-        </p:txBody>
-      </p:sp>
-      <p:sp>
-        <p:nvSpPr>
-          <p:cNvPr id="10" name="TextBox 9"/>
+      <p:sp>
+        <p:nvSpPr>
+          <p:cNvPr id="8" name="TextBox 7"/>
           <p:cNvSpPr txBox="1"/>
           <p:nvPr/>
         </p:nvSpPr>
         <p:spPr>
           <a:xfrm>
-            <a:off x="7927847" y="1234440"/>
-            <a:ext cx="3886200" cy="320040"/>
+            <a:off x="292608" y="1170432"/>
+            <a:ext cx="10515600" cy="274320"/>
           </a:xfrm>
           <a:prstGeom prst="rect">
             <a:avLst/>
@@ -4038,930 +4099,13 @@
           <a:p>
             <a:pPr algn="l"/>
             <a:r>
-              <a:rPr sz="1200" b="1">
+              <a:rPr sz="1300" b="1">
                 <a:solidFill>
                   <a:srgbClr val="CC0E1E"/>
                 </a:solidFill>
                 <a:latin typeface="Calibri"/>
               </a:rPr>
-              <a:t>TAKEAWAYS</a:t>
-            </a:r>
-          </a:p>
-        </p:txBody>
-      </p:sp>
-      <p:sp>
-        <p:nvSpPr>
-          <p:cNvPr id="11" name="TextBox 10"/>
-          <p:cNvSpPr txBox="1"/>
-          <p:nvPr/>
-        </p:nvSpPr>
-        <p:spPr>
-          <a:xfrm>
-            <a:off x="7927847" y="1691640"/>
-            <a:ext cx="3794760" cy="4343400"/>
-          </a:xfrm>
-          <a:prstGeom prst="rect">
-            <a:avLst/>
-          </a:prstGeom>
-          <a:noFill/>
-        </p:spPr>
-        <p:txBody>
-          <a:bodyPr wrap="square">
-            <a:spAutoFit/>
-          </a:bodyPr>
-          <a:lstStyle/>
-          <a:p>
-            <a:pPr>
-              <a:lnSpc>
-                <a:spcPct val="125000"/>
-              </a:lnSpc>
-              <a:spcAft>
-                <a:spcPts val="1000"/>
-              </a:spcAft>
-            </a:pPr>
-            <a:r>
-              <a:rPr sz="1250" b="1">
-                <a:solidFill>
-                  <a:srgbClr val="CC0E1E"/>
-                </a:solidFill>
-                <a:latin typeface="Calibri"/>
-              </a:rPr>
-              <a:t>—  </a:t>
-            </a:r>
-            <a:r>
-              <a:rPr sz="1250">
-                <a:solidFill>
-                  <a:srgbClr val="1A1A1A"/>
-                </a:solidFill>
-                <a:latin typeface="Calibri"/>
-              </a:rPr>
-              <a:t>Fuel filter 18.2% against 46.8% for the rest of the network.</a:t>
-            </a:r>
-          </a:p>
-          <a:p>
-            <a:pPr>
-              <a:lnSpc>
-                <a:spcPct val="125000"/>
-              </a:lnSpc>
-              <a:spcAft>
-                <a:spcPts val="1000"/>
-              </a:spcAft>
-            </a:pPr>
-            <a:r>
-              <a:rPr sz="1250" b="1">
-                <a:solidFill>
-                  <a:srgbClr val="CC0E1E"/>
-                </a:solidFill>
-                <a:latin typeface="Calibri"/>
-              </a:rPr>
-              <a:t>—  </a:t>
-            </a:r>
-            <a:r>
-              <a:rPr sz="1250">
-                <a:solidFill>
-                  <a:srgbClr val="1A1A1A"/>
-                </a:solidFill>
-                <a:latin typeface="Calibri"/>
-              </a:rPr>
-              <a:t>Brake rotor 42.5% against 54.6% for the rest of the network.</a:t>
-            </a:r>
-          </a:p>
-          <a:p>
-            <a:pPr>
-              <a:lnSpc>
-                <a:spcPct val="125000"/>
-              </a:lnSpc>
-              <a:spcAft>
-                <a:spcPts val="1000"/>
-              </a:spcAft>
-            </a:pPr>
-            <a:r>
-              <a:rPr sz="1250" b="1">
-                <a:solidFill>
-                  <a:srgbClr val="CC0E1E"/>
-                </a:solidFill>
-                <a:latin typeface="Calibri"/>
-              </a:rPr>
-              <a:t>—  </a:t>
-            </a:r>
-            <a:r>
-              <a:rPr sz="1250">
-                <a:solidFill>
-                  <a:srgbClr val="1A1A1A"/>
-                </a:solidFill>
-                <a:latin typeface="Calibri"/>
-              </a:rPr>
-              <a:t>Every market here is measured on the same fleet-and-interval model, so the comparison is like-for-like even where the underlying interval assumption is debatable.</a:t>
-            </a:r>
-          </a:p>
-          <a:p>
-            <a:pPr>
-              <a:lnSpc>
-                <a:spcPct val="125000"/>
-              </a:lnSpc>
-              <a:spcAft>
-                <a:spcPts val="1000"/>
-              </a:spcAft>
-            </a:pPr>
-            <a:r>
-              <a:rPr sz="1250" b="1">
-                <a:solidFill>
-                  <a:srgbClr val="CC0E1E"/>
-                </a:solidFill>
-                <a:latin typeface="Calibri"/>
-              </a:rPr>
-              <a:t>—  </a:t>
-            </a:r>
-            <a:r>
-              <a:rPr sz="1250">
-                <a:solidFill>
-                  <a:srgbClr val="1A1A1A"/>
-                </a:solidFill>
-                <a:latin typeface="Calibri"/>
-              </a:rPr>
-              <a:t>Worth agreeing which category we tackle first, and what the joint action is.</a:t>
-            </a:r>
-          </a:p>
-        </p:txBody>
-      </p:sp>
-    </p:spTree>
-  </p:cSld>
-  <p:clrMapOvr>
-    <a:masterClrMapping/>
-  </p:clrMapOvr>
-</p:sld>
-</file>
-
-<file path=ppt/slides/slide12.xml><?xml version="1.0" encoding="utf-8"?>
-<p:sld xmlns:a="http://schemas.openxmlformats.org/drawingml/2006/main" xmlns:p="http://schemas.openxmlformats.org/presentationml/2006/main" xmlns:r="http://schemas.openxmlformats.org/officeDocument/2006/relationships">
-  <p:cSld>
-    <p:bg>
-      <p:bgPr>
-        <a:solidFill>
-          <a:srgbClr val="FFFFFF"/>
-        </a:solidFill>
-        <a:effectLst/>
-      </p:bgPr>
-    </p:bg>
-    <p:spTree>
-      <p:nvGrpSpPr>
-        <p:cNvPr id="1" name=""/>
-        <p:cNvGrpSpPr/>
-        <p:nvPr/>
-      </p:nvGrpSpPr>
-      <p:grpSpPr/>
-      <p:pic>
-        <p:nvPicPr>
-          <p:cNvPr id="2" name="Picture 1" descr="isuzu_logo_red.png"/>
-          <p:cNvPicPr>
-            <a:picLocks noChangeAspect="1"/>
-          </p:cNvPicPr>
-          <p:nvPr/>
-        </p:nvPicPr>
-        <p:blipFill>
-          <a:blip r:embed="rId2"/>
-          <a:stretch>
-            <a:fillRect/>
-          </a:stretch>
-        </p:blipFill>
-        <p:spPr>
-          <a:xfrm>
-            <a:off x="256032" y="6263640"/>
-            <a:ext cx="1679787" cy="292608"/>
-          </a:xfrm>
-          <a:prstGeom prst="rect">
-            <a:avLst/>
-          </a:prstGeom>
-        </p:spPr>
-      </p:pic>
-      <p:sp>
-        <p:nvSpPr>
-          <p:cNvPr id="3" name="Rectangle 2"/>
-          <p:cNvSpPr/>
-          <p:nvPr/>
-        </p:nvSpPr>
-        <p:spPr>
-          <a:xfrm>
-            <a:off x="0" y="6766560"/>
-            <a:ext cx="12188952" cy="91440"/>
-          </a:xfrm>
-          <a:prstGeom prst="rect">
-            <a:avLst/>
-          </a:prstGeom>
-          <a:solidFill>
-            <a:srgbClr val="CC0E1E"/>
-          </a:solidFill>
-          <a:ln>
-            <a:noFill/>
-          </a:ln>
-        </p:spPr>
-        <p:style>
-          <a:lnRef idx="1">
-            <a:schemeClr val="accent1"/>
-          </a:lnRef>
-          <a:fillRef idx="3">
-            <a:schemeClr val="accent1"/>
-          </a:fillRef>
-          <a:effectRef idx="2">
-            <a:schemeClr val="accent1"/>
-          </a:effectRef>
-          <a:fontRef idx="minor">
-            <a:schemeClr val="lt1"/>
-          </a:fontRef>
-        </p:style>
-        <p:txBody>
-          <a:bodyPr rtlCol="0" anchor="ctr"/>
-          <a:lstStyle/>
-          <a:p>
-            <a:pPr algn="ctr"/>
-          </a:p>
-        </p:txBody>
-      </p:sp>
-      <p:sp>
-        <p:nvSpPr>
-          <p:cNvPr id="4" name="TextBox 3"/>
-          <p:cNvSpPr txBox="1"/>
-          <p:nvPr/>
-        </p:nvSpPr>
-        <p:spPr>
-          <a:xfrm>
-            <a:off x="292608" y="201168"/>
-            <a:ext cx="11430000" cy="274320"/>
-          </a:xfrm>
-          <a:prstGeom prst="rect">
-            <a:avLst/>
-          </a:prstGeom>
-          <a:noFill/>
-        </p:spPr>
-        <p:txBody>
-          <a:bodyPr wrap="square">
-            <a:spAutoFit/>
-          </a:bodyPr>
-          <a:lstStyle/>
-          <a:p>
-            <a:pPr algn="l"/>
-            <a:r>
-              <a:rPr sz="1100" b="1">
-                <a:solidFill>
-                  <a:srgbClr val="CC0E1E"/>
-                </a:solidFill>
-                <a:latin typeface="Calibri"/>
-              </a:rPr>
-              <a:t>FLEET &amp; FY2027 TARGET</a:t>
-            </a:r>
-          </a:p>
-        </p:txBody>
-      </p:sp>
-      <p:sp>
-        <p:nvSpPr>
-          <p:cNvPr id="5" name="TextBox 4"/>
-          <p:cNvSpPr txBox="1"/>
-          <p:nvPr/>
-        </p:nvSpPr>
-        <p:spPr>
-          <a:xfrm>
-            <a:off x="292608" y="475488"/>
-            <a:ext cx="11612880" cy="566928"/>
-          </a:xfrm>
-          <a:prstGeom prst="rect">
-            <a:avLst/>
-          </a:prstGeom>
-          <a:noFill/>
-        </p:spPr>
-        <p:txBody>
-          <a:bodyPr wrap="square">
-            <a:spAutoFit/>
-          </a:bodyPr>
-          <a:lstStyle/>
-          <a:p>
-            <a:pPr algn="l"/>
-            <a:r>
-              <a:rPr sz="2500" b="1">
-                <a:solidFill>
-                  <a:srgbClr val="1A1A1A"/>
-                </a:solidFill>
-                <a:latin typeface="Calibri"/>
-              </a:rPr>
-              <a:t>The fleet is expected to decline in 2026</a:t>
-            </a:r>
-          </a:p>
-        </p:txBody>
-      </p:sp>
-      <p:sp>
-        <p:nvSpPr>
-          <p:cNvPr id="6" name="Rectangle 5"/>
-          <p:cNvSpPr/>
-          <p:nvPr/>
-        </p:nvSpPr>
-        <p:spPr>
-          <a:xfrm>
-            <a:off x="292608" y="1005840"/>
-            <a:ext cx="11612880" cy="28000"/>
-          </a:xfrm>
-          <a:prstGeom prst="rect">
-            <a:avLst/>
-          </a:prstGeom>
-          <a:solidFill>
-            <a:srgbClr val="CC0E1E"/>
-          </a:solidFill>
-          <a:ln>
-            <a:noFill/>
-          </a:ln>
-        </p:spPr>
-        <p:style>
-          <a:lnRef idx="1">
-            <a:schemeClr val="accent1"/>
-          </a:lnRef>
-          <a:fillRef idx="3">
-            <a:schemeClr val="accent1"/>
-          </a:fillRef>
-          <a:effectRef idx="2">
-            <a:schemeClr val="accent1"/>
-          </a:effectRef>
-          <a:fontRef idx="minor">
-            <a:schemeClr val="lt1"/>
-          </a:fontRef>
-        </p:style>
-        <p:txBody>
-          <a:bodyPr rtlCol="0" anchor="ctr"/>
-          <a:lstStyle/>
-          <a:p>
-            <a:pPr algn="ctr"/>
-          </a:p>
-        </p:txBody>
-      </p:sp>
-      <p:sp>
-        <p:nvSpPr>
-          <p:cNvPr id="7" name="TextBox 6"/>
-          <p:cNvSpPr txBox="1"/>
-          <p:nvPr/>
-        </p:nvSpPr>
-        <p:spPr>
-          <a:xfrm>
-            <a:off x="11594592" y="6473952"/>
-            <a:ext cx="365760" cy="274320"/>
-          </a:xfrm>
-          <a:prstGeom prst="rect">
-            <a:avLst/>
-          </a:prstGeom>
-          <a:noFill/>
-        </p:spPr>
-        <p:txBody>
-          <a:bodyPr wrap="square">
-            <a:spAutoFit/>
-          </a:bodyPr>
-          <a:lstStyle/>
-          <a:p>
-            <a:pPr algn="r"/>
-            <a:r>
-              <a:rPr sz="1000" b="0">
-                <a:solidFill>
-                  <a:srgbClr val="5A5A5A"/>
-                </a:solidFill>
-                <a:latin typeface="Calibri"/>
-              </a:rPr>
-              <a:t>12</a:t>
-            </a:r>
-          </a:p>
-        </p:txBody>
-      </p:sp>
-      <p:pic>
-        <p:nvPicPr>
-          <p:cNvPr id="8" name="Picture 7" descr="uio.png"/>
-          <p:cNvPicPr>
-            <a:picLocks noChangeAspect="1"/>
-          </p:cNvPicPr>
-          <p:nvPr/>
-        </p:nvPicPr>
-        <p:blipFill>
-          <a:blip r:embed="rId3"/>
-          <a:stretch>
-            <a:fillRect/>
-          </a:stretch>
-        </p:blipFill>
-        <p:spPr>
-          <a:xfrm>
-            <a:off x="292608" y="2120980"/>
-            <a:ext cx="7178040" cy="3027520"/>
-          </a:xfrm>
-          <a:prstGeom prst="rect">
-            <a:avLst/>
-          </a:prstGeom>
-        </p:spPr>
-      </p:pic>
-      <p:sp>
-        <p:nvSpPr>
-          <p:cNvPr id="9" name="Rectangle 8"/>
-          <p:cNvSpPr/>
-          <p:nvPr/>
-        </p:nvSpPr>
-        <p:spPr>
-          <a:xfrm>
-            <a:off x="7726679" y="1188720"/>
-            <a:ext cx="22000" cy="4892040"/>
-          </a:xfrm>
-          <a:prstGeom prst="rect">
-            <a:avLst/>
-          </a:prstGeom>
-          <a:solidFill>
-            <a:srgbClr val="ECECEC"/>
-          </a:solidFill>
-          <a:ln>
-            <a:noFill/>
-          </a:ln>
-        </p:spPr>
-        <p:style>
-          <a:lnRef idx="1">
-            <a:schemeClr val="accent1"/>
-          </a:lnRef>
-          <a:fillRef idx="3">
-            <a:schemeClr val="accent1"/>
-          </a:fillRef>
-          <a:effectRef idx="2">
-            <a:schemeClr val="accent1"/>
-          </a:effectRef>
-          <a:fontRef idx="minor">
-            <a:schemeClr val="lt1"/>
-          </a:fontRef>
-        </p:style>
-        <p:txBody>
-          <a:bodyPr rtlCol="0" anchor="ctr"/>
-          <a:lstStyle/>
-          <a:p>
-            <a:pPr algn="ctr"/>
-          </a:p>
-        </p:txBody>
-      </p:sp>
-      <p:sp>
-        <p:nvSpPr>
-          <p:cNvPr id="10" name="TextBox 9"/>
-          <p:cNvSpPr txBox="1"/>
-          <p:nvPr/>
-        </p:nvSpPr>
-        <p:spPr>
-          <a:xfrm>
-            <a:off x="7927847" y="1234440"/>
-            <a:ext cx="3886200" cy="320040"/>
-          </a:xfrm>
-          <a:prstGeom prst="rect">
-            <a:avLst/>
-          </a:prstGeom>
-          <a:noFill/>
-        </p:spPr>
-        <p:txBody>
-          <a:bodyPr wrap="square">
-            <a:spAutoFit/>
-          </a:bodyPr>
-          <a:lstStyle/>
-          <a:p>
-            <a:pPr algn="l"/>
-            <a:r>
-              <a:rPr sz="1200" b="1">
-                <a:solidFill>
-                  <a:srgbClr val="CC0E1E"/>
-                </a:solidFill>
-                <a:latin typeface="Calibri"/>
-              </a:rPr>
-              <a:t>WHAT THIS MEANS FOR FY2027</a:t>
-            </a:r>
-          </a:p>
-        </p:txBody>
-      </p:sp>
-      <p:sp>
-        <p:nvSpPr>
-          <p:cNvPr id="11" name="TextBox 10"/>
-          <p:cNvSpPr txBox="1"/>
-          <p:nvPr/>
-        </p:nvSpPr>
-        <p:spPr>
-          <a:xfrm>
-            <a:off x="7927847" y="1691640"/>
-            <a:ext cx="3794760" cy="4343400"/>
-          </a:xfrm>
-          <a:prstGeom prst="rect">
-            <a:avLst/>
-          </a:prstGeom>
-          <a:noFill/>
-        </p:spPr>
-        <p:txBody>
-          <a:bodyPr wrap="square">
-            <a:spAutoFit/>
-          </a:bodyPr>
-          <a:lstStyle/>
-          <a:p>
-            <a:pPr>
-              <a:lnSpc>
-                <a:spcPct val="125000"/>
-              </a:lnSpc>
-              <a:spcAft>
-                <a:spcPts val="1000"/>
-              </a:spcAft>
-            </a:pPr>
-            <a:r>
-              <a:rPr sz="1250" b="1">
-                <a:solidFill>
-                  <a:srgbClr val="CC0E1E"/>
-                </a:solidFill>
-                <a:latin typeface="Calibri"/>
-              </a:rPr>
-              <a:t>—  </a:t>
-            </a:r>
-            <a:r>
-              <a:rPr sz="1250">
-                <a:solidFill>
-                  <a:srgbClr val="1A1A1A"/>
-                </a:solidFill>
-                <a:latin typeface="Calibri"/>
-              </a:rPr>
-              <a:t>Fleet size (calendar year): 1,204 vehicles in 2025 → 1,196 working estimate for end-2026 (-0.7%).</a:t>
-            </a:r>
-          </a:p>
-          <a:p>
-            <a:pPr>
-              <a:lnSpc>
-                <a:spcPct val="125000"/>
-              </a:lnSpc>
-              <a:spcAft>
-                <a:spcPts val="1000"/>
-              </a:spcAft>
-            </a:pPr>
-            <a:r>
-              <a:rPr sz="1250" b="1">
-                <a:solidFill>
-                  <a:srgbClr val="CC0E1E"/>
-                </a:solidFill>
-                <a:latin typeface="Calibri"/>
-              </a:rPr>
-              <a:t>—  </a:t>
-            </a:r>
-            <a:r>
-              <a:rPr sz="1250">
-                <a:solidFill>
-                  <a:srgbClr val="1A1A1A"/>
-                </a:solidFill>
-                <a:latin typeface="Calibri"/>
-              </a:rPr>
-              <a:t>The chart is calendar years 2019–2026 only. 2026 is a working year-end estimate, not a fiscal-year figure.</a:t>
-            </a:r>
-          </a:p>
-          <a:p>
-            <a:pPr>
-              <a:lnSpc>
-                <a:spcPct val="125000"/>
-              </a:lnSpc>
-              <a:spcAft>
-                <a:spcPts val="1000"/>
-              </a:spcAft>
-            </a:pPr>
-            <a:r>
-              <a:rPr sz="1250" b="1">
-                <a:solidFill>
-                  <a:srgbClr val="CC0E1E"/>
-                </a:solidFill>
-                <a:latin typeface="Calibri"/>
-              </a:rPr>
-              <a:t>—  </a:t>
-            </a:r>
-            <a:r>
-              <a:rPr sz="1250">
-                <a:solidFill>
-                  <a:srgbClr val="1A1A1A"/>
-                </a:solidFill>
-                <a:latin typeface="Calibri"/>
-              </a:rPr>
-              <a:t>End-2026 mix: LCV / D-Max 1,196; CV — LD 0.</a:t>
-            </a:r>
-          </a:p>
-          <a:p>
-            <a:pPr>
-              <a:lnSpc>
-                <a:spcPct val="125000"/>
-              </a:lnSpc>
-              <a:spcAft>
-                <a:spcPts val="1000"/>
-              </a:spcAft>
-            </a:pPr>
-            <a:r>
-              <a:rPr sz="1250" b="1">
-                <a:solidFill>
-                  <a:srgbClr val="CC0E1E"/>
-                </a:solidFill>
-                <a:latin typeface="Calibri"/>
-              </a:rPr>
-              <a:t>—  </a:t>
-            </a:r>
-            <a:r>
-              <a:rPr sz="1250">
-                <a:solidFill>
-                  <a:srgbClr val="1A1A1A"/>
-                </a:solidFill>
-                <a:latin typeface="Calibri"/>
-              </a:rPr>
-              <a:t>The FY2027 Sales-to-Dealer target starts from that fleet change, then applies a 5% price adjustment and 1.8% additional growth.</a:t>
-            </a:r>
-          </a:p>
-          <a:p>
-            <a:pPr>
-              <a:lnSpc>
-                <a:spcPct val="125000"/>
-              </a:lnSpc>
-              <a:spcAft>
-                <a:spcPts val="1000"/>
-              </a:spcAft>
-            </a:pPr>
-            <a:r>
-              <a:rPr sz="1250" b="1">
-                <a:solidFill>
-                  <a:srgbClr val="CC0E1E"/>
-                </a:solidFill>
-                <a:latin typeface="Calibri"/>
-              </a:rPr>
-              <a:t>—  </a:t>
-            </a:r>
-            <a:r>
-              <a:rPr sz="1250">
-                <a:solidFill>
-                  <a:srgbClr val="1A1A1A"/>
-                </a:solidFill>
-                <a:latin typeface="Calibri"/>
-              </a:rPr>
-              <a:t>So the target is built from a slightly smaller fleet — not from an assumed growth story.</a:t>
-            </a:r>
-          </a:p>
-        </p:txBody>
-      </p:sp>
-    </p:spTree>
-  </p:cSld>
-  <p:clrMapOvr>
-    <a:masterClrMapping/>
-  </p:clrMapOvr>
-</p:sld>
-</file>
-
-<file path=ppt/slides/slide13.xml><?xml version="1.0" encoding="utf-8"?>
-<p:sld xmlns:a="http://schemas.openxmlformats.org/drawingml/2006/main" xmlns:p="http://schemas.openxmlformats.org/presentationml/2006/main" xmlns:r="http://schemas.openxmlformats.org/officeDocument/2006/relationships">
-  <p:cSld>
-    <p:bg>
-      <p:bgPr>
-        <a:solidFill>
-          <a:srgbClr val="FFFFFF"/>
-        </a:solidFill>
-        <a:effectLst/>
-      </p:bgPr>
-    </p:bg>
-    <p:spTree>
-      <p:nvGrpSpPr>
-        <p:cNvPr id="1" name=""/>
-        <p:cNvGrpSpPr/>
-        <p:nvPr/>
-      </p:nvGrpSpPr>
-      <p:grpSpPr/>
-      <p:pic>
-        <p:nvPicPr>
-          <p:cNvPr id="2" name="Picture 1" descr="isuzu_logo_red.png"/>
-          <p:cNvPicPr>
-            <a:picLocks noChangeAspect="1"/>
-          </p:cNvPicPr>
-          <p:nvPr/>
-        </p:nvPicPr>
-        <p:blipFill>
-          <a:blip r:embed="rId2"/>
-          <a:stretch>
-            <a:fillRect/>
-          </a:stretch>
-        </p:blipFill>
-        <p:spPr>
-          <a:xfrm>
-            <a:off x="256032" y="6263640"/>
-            <a:ext cx="1679787" cy="292608"/>
-          </a:xfrm>
-          <a:prstGeom prst="rect">
-            <a:avLst/>
-          </a:prstGeom>
-        </p:spPr>
-      </p:pic>
-      <p:sp>
-        <p:nvSpPr>
-          <p:cNvPr id="3" name="Rectangle 2"/>
-          <p:cNvSpPr/>
-          <p:nvPr/>
-        </p:nvSpPr>
-        <p:spPr>
-          <a:xfrm>
-            <a:off x="0" y="6766560"/>
-            <a:ext cx="12188952" cy="91440"/>
-          </a:xfrm>
-          <a:prstGeom prst="rect">
-            <a:avLst/>
-          </a:prstGeom>
-          <a:solidFill>
-            <a:srgbClr val="CC0E1E"/>
-          </a:solidFill>
-          <a:ln>
-            <a:noFill/>
-          </a:ln>
-        </p:spPr>
-        <p:style>
-          <a:lnRef idx="1">
-            <a:schemeClr val="accent1"/>
-          </a:lnRef>
-          <a:fillRef idx="3">
-            <a:schemeClr val="accent1"/>
-          </a:fillRef>
-          <a:effectRef idx="2">
-            <a:schemeClr val="accent1"/>
-          </a:effectRef>
-          <a:fontRef idx="minor">
-            <a:schemeClr val="lt1"/>
-          </a:fontRef>
-        </p:style>
-        <p:txBody>
-          <a:bodyPr rtlCol="0" anchor="ctr"/>
-          <a:lstStyle/>
-          <a:p>
-            <a:pPr algn="ctr"/>
-          </a:p>
-        </p:txBody>
-      </p:sp>
-      <p:sp>
-        <p:nvSpPr>
-          <p:cNvPr id="4" name="TextBox 3"/>
-          <p:cNvSpPr txBox="1"/>
-          <p:nvPr/>
-        </p:nvSpPr>
-        <p:spPr>
-          <a:xfrm>
-            <a:off x="292608" y="201168"/>
-            <a:ext cx="11430000" cy="274320"/>
-          </a:xfrm>
-          <a:prstGeom prst="rect">
-            <a:avLst/>
-          </a:prstGeom>
-          <a:noFill/>
-        </p:spPr>
-        <p:txBody>
-          <a:bodyPr wrap="square">
-            <a:spAutoFit/>
-          </a:bodyPr>
-          <a:lstStyle/>
-          <a:p>
-            <a:pPr algn="l"/>
-            <a:r>
-              <a:rPr sz="1100" b="1">
-                <a:solidFill>
-                  <a:srgbClr val="CC0E1E"/>
-                </a:solidFill>
-                <a:latin typeface="Calibri"/>
-              </a:rPr>
-              <a:t>FLEET &amp; FY2027 TARGET</a:t>
-            </a:r>
-          </a:p>
-        </p:txBody>
-      </p:sp>
-      <p:sp>
-        <p:nvSpPr>
-          <p:cNvPr id="5" name="TextBox 4"/>
-          <p:cNvSpPr txBox="1"/>
-          <p:nvPr/>
-        </p:nvSpPr>
-        <p:spPr>
-          <a:xfrm>
-            <a:off x="292608" y="475488"/>
-            <a:ext cx="11612880" cy="566928"/>
-          </a:xfrm>
-          <a:prstGeom prst="rect">
-            <a:avLst/>
-          </a:prstGeom>
-          <a:noFill/>
-        </p:spPr>
-        <p:txBody>
-          <a:bodyPr wrap="square">
-            <a:spAutoFit/>
-          </a:bodyPr>
-          <a:lstStyle/>
-          <a:p>
-            <a:pPr algn="l"/>
-            <a:r>
-              <a:rPr sz="2500" b="1">
-                <a:solidFill>
-                  <a:srgbClr val="1A1A1A"/>
-                </a:solidFill>
-                <a:latin typeface="Calibri"/>
-              </a:rPr>
-              <a:t>How the FY2027 target is built</a:t>
-            </a:r>
-          </a:p>
-        </p:txBody>
-      </p:sp>
-      <p:sp>
-        <p:nvSpPr>
-          <p:cNvPr id="6" name="Rectangle 5"/>
-          <p:cNvSpPr/>
-          <p:nvPr/>
-        </p:nvSpPr>
-        <p:spPr>
-          <a:xfrm>
-            <a:off x="292608" y="1005840"/>
-            <a:ext cx="11612880" cy="28000"/>
-          </a:xfrm>
-          <a:prstGeom prst="rect">
-            <a:avLst/>
-          </a:prstGeom>
-          <a:solidFill>
-            <a:srgbClr val="CC0E1E"/>
-          </a:solidFill>
-          <a:ln>
-            <a:noFill/>
-          </a:ln>
-        </p:spPr>
-        <p:style>
-          <a:lnRef idx="1">
-            <a:schemeClr val="accent1"/>
-          </a:lnRef>
-          <a:fillRef idx="3">
-            <a:schemeClr val="accent1"/>
-          </a:fillRef>
-          <a:effectRef idx="2">
-            <a:schemeClr val="accent1"/>
-          </a:effectRef>
-          <a:fontRef idx="minor">
-            <a:schemeClr val="lt1"/>
-          </a:fontRef>
-        </p:style>
-        <p:txBody>
-          <a:bodyPr rtlCol="0" anchor="ctr"/>
-          <a:lstStyle/>
-          <a:p>
-            <a:pPr algn="ctr"/>
-          </a:p>
-        </p:txBody>
-      </p:sp>
-      <p:sp>
-        <p:nvSpPr>
-          <p:cNvPr id="7" name="TextBox 6"/>
-          <p:cNvSpPr txBox="1"/>
-          <p:nvPr/>
-        </p:nvSpPr>
-        <p:spPr>
-          <a:xfrm>
-            <a:off x="11594592" y="6473952"/>
-            <a:ext cx="365760" cy="274320"/>
-          </a:xfrm>
-          <a:prstGeom prst="rect">
-            <a:avLst/>
-          </a:prstGeom>
-          <a:noFill/>
-        </p:spPr>
-        <p:txBody>
-          <a:bodyPr wrap="square">
-            <a:spAutoFit/>
-          </a:bodyPr>
-          <a:lstStyle/>
-          <a:p>
-            <a:pPr algn="r"/>
-            <a:r>
-              <a:rPr sz="1000" b="0">
-                <a:solidFill>
-                  <a:srgbClr val="5A5A5A"/>
-                </a:solidFill>
-                <a:latin typeface="Calibri"/>
-              </a:rPr>
-              <a:t>13</a:t>
-            </a:r>
-          </a:p>
-        </p:txBody>
-      </p:sp>
-      <p:sp>
-        <p:nvSpPr>
-          <p:cNvPr id="8" name="TextBox 7"/>
-          <p:cNvSpPr txBox="1"/>
-          <p:nvPr/>
-        </p:nvSpPr>
-        <p:spPr>
-          <a:xfrm>
-            <a:off x="292608" y="1170432"/>
-            <a:ext cx="8595360" cy="274320"/>
-          </a:xfrm>
-          <a:prstGeom prst="rect">
-            <a:avLst/>
-          </a:prstGeom>
-          <a:noFill/>
-        </p:spPr>
-        <p:txBody>
-          <a:bodyPr wrap="square">
-            <a:spAutoFit/>
-          </a:bodyPr>
-          <a:lstStyle/>
-          <a:p>
-            <a:pPr algn="l"/>
-            <a:r>
-              <a:rPr sz="1300" b="1">
-                <a:solidFill>
-                  <a:srgbClr val="CC0E1E"/>
-                </a:solidFill>
-                <a:latin typeface="Calibri"/>
-              </a:rPr>
-              <a:t>Sales-to-Dealer amount bridge</a:t>
+              <a:t>ISZE → DB extended target (V3.1 Dashboard column I)</a:t>
             </a:r>
           </a:p>
         </p:txBody>
@@ -4976,7 +4120,7 @@
         </p:nvGraphicFramePr>
         <p:xfrm>
           <a:off x="292608" y="1508760"/>
-          <a:ext cx="8595360" cy="2148840"/>
+          <a:ext cx="8595360" cy="2331720"/>
         </p:xfrm>
         <a:graphic>
           <a:graphicData uri="http://schemas.openxmlformats.org/drawingml/2006/table">
@@ -4988,7 +4132,7 @@
                 <a:gridCol w="5669280"/>
                 <a:gridCol w="2926080"/>
               </a:tblGrid>
-              <a:tr h="429768">
+              <a:tr h="466344">
                 <a:tc>
                   <a:txBody>
                     <a:bodyPr/>
@@ -5036,7 +4180,7 @@
                   </a:tcPr>
                 </a:tc>
               </a:tr>
-              <a:tr h="429768">
+              <a:tr h="466344">
                 <a:tc>
                   <a:txBody>
                     <a:bodyPr/>
@@ -5050,7 +4194,7 @@
                           </a:solidFill>
                           <a:latin typeface="Calibri"/>
                         </a:rPr>
-                        <a:t>FY2026 Sales-to-Dealer (working estimate)</a:t>
+                        <a:t>Business Plan / actual FY27 base</a:t>
                       </a:r>
                     </a:p>
                   </a:txBody>
@@ -5073,7 +4217,7 @@
                           </a:solidFill>
                           <a:latin typeface="Calibri"/>
                         </a:rPr>
-                        <a:t>EUR 429,820</a:t>
+                        <a:t>EUR 360,300</a:t>
                       </a:r>
                     </a:p>
                   </a:txBody>
@@ -5084,7 +4228,7 @@
                   </a:tcPr>
                 </a:tc>
               </a:tr>
-              <a:tr h="429768">
+              <a:tr h="466344">
                 <a:tc>
                   <a:txBody>
                     <a:bodyPr/>
@@ -5098,7 +4242,7 @@
                           </a:solidFill>
                           <a:latin typeface="Calibri"/>
                         </a:rPr>
-                        <a:t>After fleet movement (-0.7%)</a:t>
+                        <a:t>Market potential (max spend FY27)</a:t>
                       </a:r>
                     </a:p>
                   </a:txBody>
@@ -5121,7 +4265,7 @@
                           </a:solidFill>
                           <a:latin typeface="Calibri"/>
                         </a:rPr>
-                        <a:t>EUR 426,964</a:t>
+                        <a:t>EUR 301,550</a:t>
                       </a:r>
                     </a:p>
                   </a:txBody>
@@ -5132,7 +4276,7 @@
                   </a:tcPr>
                 </a:tc>
               </a:tr>
-              <a:tr h="429768">
+              <a:tr h="466344">
                 <a:tc>
                   <a:txBody>
                     <a:bodyPr/>
@@ -5146,7 +4290,7 @@
                           </a:solidFill>
                           <a:latin typeface="Calibri"/>
                         </a:rPr>
-                        <a:t>After price adjustment (+5%)</a:t>
+                        <a:t>Stretch (+1.8% of max spend)</a:t>
                       </a:r>
                     </a:p>
                   </a:txBody>
@@ -5169,7 +4313,7 @@
                           </a:solidFill>
                           <a:latin typeface="Calibri"/>
                         </a:rPr>
-                        <a:t>EUR 448,313</a:t>
+                        <a:t>EUR 5,428</a:t>
                       </a:r>
                     </a:p>
                   </a:txBody>
@@ -5180,7 +4324,7 @@
                   </a:tcPr>
                 </a:tc>
               </a:tr>
-              <a:tr h="429768">
+              <a:tr h="466344">
                 <a:tc>
                   <a:txBody>
                     <a:bodyPr/>
@@ -5194,7 +4338,7 @@
                           </a:solidFill>
                           <a:latin typeface="Calibri"/>
                         </a:rPr>
-                        <a:t>FY2027 target after additional growth (+1.8%)</a:t>
+                        <a:t>FY2027 EXTENDED TARGET (locked)</a:t>
                       </a:r>
                     </a:p>
                   </a:txBody>
@@ -5217,7 +4361,7 @@
                           </a:solidFill>
                           <a:latin typeface="Calibri"/>
                         </a:rPr>
-                        <a:t>EUR 456,382</a:t>
+                        <a:t>EUR 365,728</a:t>
                       </a:r>
                     </a:p>
                   </a:txBody>
@@ -5240,8 +4384,8 @@
         </p:nvSpPr>
         <p:spPr>
           <a:xfrm>
-            <a:off x="292608" y="3977639"/>
-            <a:ext cx="11612880" cy="1188720"/>
+            <a:off x="292608" y="4069080"/>
+            <a:ext cx="11612880" cy="1280160"/>
           </a:xfrm>
           <a:prstGeom prst="rect">
             <a:avLst/>
@@ -5278,7 +4422,7 @@
                 </a:solidFill>
                 <a:latin typeface="Calibri"/>
               </a:rPr>
-              <a:t>The FY2027 target is +6.2% versus the FY2026 Sales-to-Dealer base.</a:t>
+              <a:t>Extended target = BP + stretch; stretch default is 1.8% (network rule from GPS Extended Target V3.1).</a:t>
             </a:r>
           </a:p>
           <a:p>
@@ -5306,7 +4450,7 @@
                 </a:solidFill>
                 <a:latin typeface="Calibri"/>
               </a:rPr>
-              <a:t>The FY2026 base is a working estimate (ISZE billing ÷ 0.65): the KPI Dashboard has no usable Sales-to-Dealer row for this market.</a:t>
+              <a:t>Figure locked from GPS Extended Target FY27 V3.1, Dashboard column I (FINLAND): EUR 365,728.</a:t>
             </a:r>
           </a:p>
         </p:txBody>
@@ -5319,7 +4463,7 @@
 </p:sld>
 </file>
 
-<file path=ppt/slides/slide14.xml><?xml version="1.0" encoding="utf-8"?>
+<file path=ppt/slides/slide12.xml><?xml version="1.0" encoding="utf-8"?>
 <p:sld xmlns:a="http://schemas.openxmlformats.org/drawingml/2006/main" xmlns:p="http://schemas.openxmlformats.org/presentationml/2006/main" xmlns:r="http://schemas.openxmlformats.org/officeDocument/2006/relationships">
   <p:cSld>
     <p:bg>
@@ -5547,7 +4691,7 @@
                 </a:solidFill>
                 <a:latin typeface="Calibri"/>
               </a:rPr>
-              <a:t>14</a:t>
+              <a:t>12</a:t>
             </a:r>
           </a:p>
         </p:txBody>
@@ -5681,7 +4825,7 @@
                 </a:solidFill>
                 <a:latin typeface="Calibri"/>
               </a:rPr>
-              <a:t>Your fleet</a:t>
+              <a:t>The FY2027 business plan</a:t>
             </a:r>
           </a:p>
         </p:txBody>
@@ -5732,166 +4876,9 @@
                 </a:solidFill>
                 <a:latin typeface="Calibri"/>
               </a:rPr>
-              <a:t>The working fleet movement used in the target is -0.7%.</a:t>
-            </a:r>
-          </a:p>
-        </p:txBody>
-      </p:sp>
-      <p:sp>
-        <p:nvSpPr>
-          <p:cNvPr id="12" name="Rounded Rectangle 11"/>
-          <p:cNvSpPr/>
-          <p:nvPr/>
-        </p:nvSpPr>
-        <p:spPr>
-          <a:xfrm>
-            <a:off x="5943600" y="1234440"/>
-            <a:ext cx="5943600" cy="2011680"/>
-          </a:xfrm>
-          <a:prstGeom prst="roundRect">
-            <a:avLst>
-              <a:gd name="adj" fmla="val 6000"/>
-            </a:avLst>
-          </a:prstGeom>
-          <a:solidFill>
-            <a:srgbClr val="ECECEC"/>
-          </a:solidFill>
-          <a:ln>
-            <a:noFill/>
-          </a:ln>
-          <a:effectLst/>
-        </p:spPr>
-        <p:style>
-          <a:lnRef idx="1">
-            <a:schemeClr val="accent1"/>
-          </a:lnRef>
-          <a:fillRef idx="3">
-            <a:schemeClr val="accent1"/>
-          </a:fillRef>
-          <a:effectRef idx="2">
-            <a:schemeClr val="accent1"/>
-          </a:effectRef>
-          <a:fontRef idx="minor">
-            <a:schemeClr val="lt1"/>
-          </a:fontRef>
-        </p:style>
-        <p:txBody>
-          <a:bodyPr rtlCol="0" anchor="ctr"/>
-          <a:lstStyle/>
-          <a:p>
-            <a:pPr algn="ctr"/>
-          </a:p>
-        </p:txBody>
-      </p:sp>
-      <p:sp>
-        <p:nvSpPr>
-          <p:cNvPr id="13" name="Oval 12"/>
-          <p:cNvSpPr/>
-          <p:nvPr/>
-        </p:nvSpPr>
-        <p:spPr>
-          <a:xfrm>
-            <a:off x="6144768" y="1435608"/>
-            <a:ext cx="457200" cy="457200"/>
-          </a:xfrm>
-          <a:prstGeom prst="ellipse">
-            <a:avLst/>
-          </a:prstGeom>
-          <a:solidFill>
-            <a:srgbClr val="CC0E1E"/>
-          </a:solidFill>
-          <a:ln>
-            <a:noFill/>
-          </a:ln>
-          <a:effectLst/>
-        </p:spPr>
-        <p:style>
-          <a:lnRef idx="1">
-            <a:schemeClr val="accent1"/>
-          </a:lnRef>
-          <a:fillRef idx="3">
-            <a:schemeClr val="accent1"/>
-          </a:fillRef>
-          <a:effectRef idx="2">
-            <a:schemeClr val="accent1"/>
-          </a:effectRef>
-          <a:fontRef idx="minor">
-            <a:schemeClr val="lt1"/>
-          </a:fontRef>
-        </p:style>
-        <p:txBody>
-          <a:bodyPr rtlCol="0" anchor="ctr" lIns="0" rIns="0" tIns="0" bIns="0"/>
-          <a:lstStyle/>
-          <a:p>
-            <a:pPr algn="ctr"/>
-            <a:r>
-              <a:rPr sz="1800" b="1">
-                <a:solidFill>
-                  <a:srgbClr val="FFFFFF"/>
-                </a:solidFill>
-                <a:latin typeface="Calibri"/>
-              </a:rPr>
-              <a:t>2</a:t>
-            </a:r>
-          </a:p>
-        </p:txBody>
-      </p:sp>
-      <p:sp>
-        <p:nvSpPr>
-          <p:cNvPr id="14" name="TextBox 13"/>
-          <p:cNvSpPr txBox="1"/>
-          <p:nvPr/>
-        </p:nvSpPr>
-        <p:spPr>
-          <a:xfrm>
-            <a:off x="6766560" y="1435608"/>
-            <a:ext cx="4937760" cy="411480"/>
-          </a:xfrm>
-          <a:prstGeom prst="rect">
-            <a:avLst/>
-          </a:prstGeom>
-          <a:noFill/>
-        </p:spPr>
-        <p:txBody>
-          <a:bodyPr wrap="square">
-            <a:spAutoFit/>
-          </a:bodyPr>
-          <a:lstStyle/>
-          <a:p>
-            <a:pPr algn="l"/>
-            <a:r>
-              <a:rPr sz="1500" b="1">
-                <a:solidFill>
-                  <a:srgbClr val="1A1A1A"/>
-                </a:solidFill>
-                <a:latin typeface="Calibri"/>
-              </a:rPr>
-              <a:t>The price move</a:t>
-            </a:r>
-          </a:p>
-        </p:txBody>
-      </p:sp>
-      <p:sp>
-        <p:nvSpPr>
-          <p:cNvPr id="15" name="TextBox 14"/>
-          <p:cNvSpPr txBox="1"/>
-          <p:nvPr/>
-        </p:nvSpPr>
-        <p:spPr>
-          <a:xfrm>
-            <a:off x="6236208" y="2011680"/>
-            <a:ext cx="5394960" cy="1097280"/>
-          </a:xfrm>
-          <a:prstGeom prst="rect">
-            <a:avLst/>
-          </a:prstGeom>
-          <a:noFill/>
-        </p:spPr>
-        <p:txBody>
-          <a:bodyPr wrap="square">
-            <a:spAutoFit/>
-          </a:bodyPr>
-          <a:lstStyle/>
+              <a:t>The target starts from the FY2027 Business Plan for this market, EUR 360,300.</a:t>
+            </a:r>
+          </a:p>
           <a:p>
             <a:pPr>
               <a:lnSpc>
@@ -5917,9 +4904,166 @@
                 </a:solidFill>
                 <a:latin typeface="Calibri"/>
               </a:rPr>
-              <a:t>ISZE is applying a 5% price adjustment for FY2027, consistent with every ISZE market this year.</a:t>
-            </a:r>
-          </a:p>
+              <a:t>Your fleet outlook (-0.7%) sets the market potential the stretch is measured against.</a:t>
+            </a:r>
+          </a:p>
+        </p:txBody>
+      </p:sp>
+      <p:sp>
+        <p:nvSpPr>
+          <p:cNvPr id="12" name="Rounded Rectangle 11"/>
+          <p:cNvSpPr/>
+          <p:nvPr/>
+        </p:nvSpPr>
+        <p:spPr>
+          <a:xfrm>
+            <a:off x="5943600" y="1234440"/>
+            <a:ext cx="5943600" cy="2011680"/>
+          </a:xfrm>
+          <a:prstGeom prst="roundRect">
+            <a:avLst>
+              <a:gd name="adj" fmla="val 6000"/>
+            </a:avLst>
+          </a:prstGeom>
+          <a:solidFill>
+            <a:srgbClr val="ECECEC"/>
+          </a:solidFill>
+          <a:ln>
+            <a:noFill/>
+          </a:ln>
+          <a:effectLst/>
+        </p:spPr>
+        <p:style>
+          <a:lnRef idx="1">
+            <a:schemeClr val="accent1"/>
+          </a:lnRef>
+          <a:fillRef idx="3">
+            <a:schemeClr val="accent1"/>
+          </a:fillRef>
+          <a:effectRef idx="2">
+            <a:schemeClr val="accent1"/>
+          </a:effectRef>
+          <a:fontRef idx="minor">
+            <a:schemeClr val="lt1"/>
+          </a:fontRef>
+        </p:style>
+        <p:txBody>
+          <a:bodyPr rtlCol="0" anchor="ctr"/>
+          <a:lstStyle/>
+          <a:p>
+            <a:pPr algn="ctr"/>
+          </a:p>
+        </p:txBody>
+      </p:sp>
+      <p:sp>
+        <p:nvSpPr>
+          <p:cNvPr id="13" name="Oval 12"/>
+          <p:cNvSpPr/>
+          <p:nvPr/>
+        </p:nvSpPr>
+        <p:spPr>
+          <a:xfrm>
+            <a:off x="6144768" y="1435608"/>
+            <a:ext cx="457200" cy="457200"/>
+          </a:xfrm>
+          <a:prstGeom prst="ellipse">
+            <a:avLst/>
+          </a:prstGeom>
+          <a:solidFill>
+            <a:srgbClr val="CC0E1E"/>
+          </a:solidFill>
+          <a:ln>
+            <a:noFill/>
+          </a:ln>
+          <a:effectLst/>
+        </p:spPr>
+        <p:style>
+          <a:lnRef idx="1">
+            <a:schemeClr val="accent1"/>
+          </a:lnRef>
+          <a:fillRef idx="3">
+            <a:schemeClr val="accent1"/>
+          </a:fillRef>
+          <a:effectRef idx="2">
+            <a:schemeClr val="accent1"/>
+          </a:effectRef>
+          <a:fontRef idx="minor">
+            <a:schemeClr val="lt1"/>
+          </a:fontRef>
+        </p:style>
+        <p:txBody>
+          <a:bodyPr rtlCol="0" anchor="ctr" lIns="0" rIns="0" tIns="0" bIns="0"/>
+          <a:lstStyle/>
+          <a:p>
+            <a:pPr algn="ctr"/>
+            <a:r>
+              <a:rPr sz="1800" b="1">
+                <a:solidFill>
+                  <a:srgbClr val="FFFFFF"/>
+                </a:solidFill>
+                <a:latin typeface="Calibri"/>
+              </a:rPr>
+              <a:t>2</a:t>
+            </a:r>
+          </a:p>
+        </p:txBody>
+      </p:sp>
+      <p:sp>
+        <p:nvSpPr>
+          <p:cNvPr id="14" name="TextBox 13"/>
+          <p:cNvSpPr txBox="1"/>
+          <p:nvPr/>
+        </p:nvSpPr>
+        <p:spPr>
+          <a:xfrm>
+            <a:off x="6766560" y="1435608"/>
+            <a:ext cx="4937760" cy="411480"/>
+          </a:xfrm>
+          <a:prstGeom prst="rect">
+            <a:avLst/>
+          </a:prstGeom>
+          <a:noFill/>
+        </p:spPr>
+        <p:txBody>
+          <a:bodyPr wrap="square">
+            <a:spAutoFit/>
+          </a:bodyPr>
+          <a:lstStyle/>
+          <a:p>
+            <a:pPr algn="l"/>
+            <a:r>
+              <a:rPr sz="1500" b="1">
+                <a:solidFill>
+                  <a:srgbClr val="1A1A1A"/>
+                </a:solidFill>
+                <a:latin typeface="Calibri"/>
+              </a:rPr>
+              <a:t>The price move</a:t>
+            </a:r>
+          </a:p>
+        </p:txBody>
+      </p:sp>
+      <p:sp>
+        <p:nvSpPr>
+          <p:cNvPr id="15" name="TextBox 14"/>
+          <p:cNvSpPr txBox="1"/>
+          <p:nvPr/>
+        </p:nvSpPr>
+        <p:spPr>
+          <a:xfrm>
+            <a:off x="6236208" y="2011680"/>
+            <a:ext cx="5394960" cy="1097280"/>
+          </a:xfrm>
+          <a:prstGeom prst="rect">
+            <a:avLst/>
+          </a:prstGeom>
+          <a:noFill/>
+        </p:spPr>
+        <p:txBody>
+          <a:bodyPr wrap="square">
+            <a:spAutoFit/>
+          </a:bodyPr>
+          <a:lstStyle/>
           <a:p>
             <a:pPr>
               <a:lnSpc>
@@ -5945,6 +5089,34 @@
                 </a:solidFill>
                 <a:latin typeface="Calibri"/>
               </a:rPr>
+              <a:t>ISZE is applying a 5% price adjustment for FY2027, consistent with every ISZE market this year.</a:t>
+            </a:r>
+          </a:p>
+          <a:p>
+            <a:pPr>
+              <a:lnSpc>
+                <a:spcPct val="115000"/>
+              </a:lnSpc>
+              <a:spcAft>
+                <a:spcPts val="1000"/>
+              </a:spcAft>
+            </a:pPr>
+            <a:r>
+              <a:rPr sz="1250" b="1">
+                <a:solidFill>
+                  <a:srgbClr val="CC0E1E"/>
+                </a:solidFill>
+                <a:latin typeface="Calibri"/>
+              </a:rPr>
+              <a:t>—  </a:t>
+            </a:r>
+            <a:r>
+              <a:rPr sz="1250">
+                <a:solidFill>
+                  <a:srgbClr val="1A1A1A"/>
+                </a:solidFill>
+                <a:latin typeface="Calibri"/>
+              </a:rPr>
               <a:t>It is built into the per-vehicle rate above, not added separately on top.</a:t>
             </a:r>
           </a:p>
@@ -5995,7 +5167,7 @@
         </p:nvGraphicFramePr>
         <p:xfrm>
           <a:off x="292608" y="3785615"/>
-          <a:ext cx="8595360" cy="1234440"/>
+          <a:ext cx="8595360" cy="1417320"/>
         </p:xfrm>
         <a:graphic>
           <a:graphicData uri="http://schemas.openxmlformats.org/drawingml/2006/table">
@@ -6007,7 +5179,7 @@
                 <a:gridCol w="5029200"/>
                 <a:gridCol w="3566160"/>
               </a:tblGrid>
-              <a:tr h="411480">
+              <a:tr h="354330">
                 <a:tc>
                   <a:txBody>
                     <a:bodyPr/>
@@ -6055,7 +5227,7 @@
                   </a:tcPr>
                 </a:tc>
               </a:tr>
-              <a:tr h="411480">
+              <a:tr h="354330">
                 <a:tc>
                   <a:txBody>
                     <a:bodyPr/>
@@ -6069,7 +5241,7 @@
                           </a:solidFill>
                           <a:latin typeface="Calibri"/>
                         </a:rPr>
-                        <a:t>FY2027 Sales-to-Dealer target</a:t>
+                        <a:t>FY2027 extended target (V3.1 col I)</a:t>
                       </a:r>
                     </a:p>
                   </a:txBody>
@@ -6092,7 +5264,7 @@
                           </a:solidFill>
                           <a:latin typeface="Calibri"/>
                         </a:rPr>
-                        <a:t>EUR 456,382</a:t>
+                        <a:t>EUR 365,728</a:t>
                       </a:r>
                     </a:p>
                   </a:txBody>
@@ -6103,7 +5275,55 @@
                   </a:tcPr>
                 </a:tc>
               </a:tr>
-              <a:tr h="411480">
+              <a:tr h="354330">
+                <a:tc>
+                  <a:txBody>
+                    <a:bodyPr/>
+                    <a:lstStyle/>
+                    <a:p>
+                      <a:pPr algn="l"/>
+                      <a:r>
+                        <a:rPr sz="1250" b="0">
+                          <a:solidFill>
+                            <a:srgbClr val="1A1A1A"/>
+                          </a:solidFill>
+                          <a:latin typeface="Calibri"/>
+                        </a:rPr>
+                        <a:t>vs BP FY27 (EUR 360,300)</a:t>
+                      </a:r>
+                    </a:p>
+                  </a:txBody>
+                  <a:tcPr anchor="ctr" marL="73152" marR="73152">
+                    <a:solidFill>
+                      <a:srgbClr val="ECECEC"/>
+                    </a:solidFill>
+                  </a:tcPr>
+                </a:tc>
+                <a:tc>
+                  <a:txBody>
+                    <a:bodyPr/>
+                    <a:lstStyle/>
+                    <a:p>
+                      <a:pPr algn="r"/>
+                      <a:r>
+                        <a:rPr sz="1250" b="0">
+                          <a:solidFill>
+                            <a:srgbClr val="1A1A1A"/>
+                          </a:solidFill>
+                          <a:latin typeface="Calibri"/>
+                        </a:rPr>
+                        <a:t>+1.5%</a:t>
+                      </a:r>
+                    </a:p>
+                  </a:txBody>
+                  <a:tcPr anchor="ctr" marL="73152" marR="73152">
+                    <a:solidFill>
+                      <a:srgbClr val="ECECEC"/>
+                    </a:solidFill>
+                  </a:tcPr>
+                </a:tc>
+              </a:tr>
+              <a:tr h="354330">
                 <a:tc>
                   <a:txBody>
                     <a:bodyPr/>
@@ -6117,7 +5337,7 @@
                           </a:solidFill>
                           <a:latin typeface="Calibri"/>
                         </a:rPr>
-                        <a:t>vs FY2026 Sales-to-Dealer (EUR 429,820)</a:t>
+                        <a:t>Stretch included</a:t>
                       </a:r>
                     </a:p>
                   </a:txBody>
@@ -6140,7 +5360,7 @@
                           </a:solidFill>
                           <a:latin typeface="Calibri"/>
                         </a:rPr>
-                        <a:t>+6.2%</a:t>
+                        <a:t>+1.8%</a:t>
                       </a:r>
                     </a:p>
                   </a:txBody>
@@ -6229,7 +5449,1802 @@
                 </a:solidFill>
                 <a:latin typeface="Calibri"/>
               </a:rPr>
-              <a:t>Until the incentive is confirmed, treat the FY2027 target as the working bridge (fleet × price × additional growth), not a locked commercial commitment.</a:t>
+              <a:t>Until the incentive is confirmed, treat the FY2027 extended target as the working figure (BP + stretch), not a locked commercial commitment.</a:t>
+            </a:r>
+          </a:p>
+        </p:txBody>
+      </p:sp>
+    </p:spTree>
+  </p:cSld>
+  <p:clrMapOvr>
+    <a:masterClrMapping/>
+  </p:clrMapOvr>
+</p:sld>
+</file>
+
+<file path=ppt/slides/slide13.xml><?xml version="1.0" encoding="utf-8"?>
+<p:sld xmlns:a="http://schemas.openxmlformats.org/drawingml/2006/main" xmlns:p="http://schemas.openxmlformats.org/presentationml/2006/main" xmlns:r="http://schemas.openxmlformats.org/officeDocument/2006/relationships">
+  <p:cSld>
+    <p:bg>
+      <p:bgPr>
+        <a:solidFill>
+          <a:srgbClr val="FFFFFF"/>
+        </a:solidFill>
+        <a:effectLst/>
+      </p:bgPr>
+    </p:bg>
+    <p:spTree>
+      <p:nvGrpSpPr>
+        <p:cNvPr id="1" name=""/>
+        <p:cNvGrpSpPr/>
+        <p:nvPr/>
+      </p:nvGrpSpPr>
+      <p:grpSpPr/>
+      <p:pic>
+        <p:nvPicPr>
+          <p:cNvPr id="2" name="Picture 1" descr="isuzu_logo_red.png"/>
+          <p:cNvPicPr>
+            <a:picLocks noChangeAspect="1"/>
+          </p:cNvPicPr>
+          <p:nvPr/>
+        </p:nvPicPr>
+        <p:blipFill>
+          <a:blip r:embed="rId2"/>
+          <a:stretch>
+            <a:fillRect/>
+          </a:stretch>
+        </p:blipFill>
+        <p:spPr>
+          <a:xfrm>
+            <a:off x="256032" y="6263640"/>
+            <a:ext cx="1679787" cy="292608"/>
+          </a:xfrm>
+          <a:prstGeom prst="rect">
+            <a:avLst/>
+          </a:prstGeom>
+        </p:spPr>
+      </p:pic>
+      <p:sp>
+        <p:nvSpPr>
+          <p:cNvPr id="3" name="Rectangle 2"/>
+          <p:cNvSpPr/>
+          <p:nvPr/>
+        </p:nvSpPr>
+        <p:spPr>
+          <a:xfrm>
+            <a:off x="0" y="6766560"/>
+            <a:ext cx="12188952" cy="91440"/>
+          </a:xfrm>
+          <a:prstGeom prst="rect">
+            <a:avLst/>
+          </a:prstGeom>
+          <a:solidFill>
+            <a:srgbClr val="CC0E1E"/>
+          </a:solidFill>
+          <a:ln>
+            <a:noFill/>
+          </a:ln>
+        </p:spPr>
+        <p:style>
+          <a:lnRef idx="1">
+            <a:schemeClr val="accent1"/>
+          </a:lnRef>
+          <a:fillRef idx="3">
+            <a:schemeClr val="accent1"/>
+          </a:fillRef>
+          <a:effectRef idx="2">
+            <a:schemeClr val="accent1"/>
+          </a:effectRef>
+          <a:fontRef idx="minor">
+            <a:schemeClr val="lt1"/>
+          </a:fontRef>
+        </p:style>
+        <p:txBody>
+          <a:bodyPr rtlCol="0" anchor="ctr"/>
+          <a:lstStyle/>
+          <a:p>
+            <a:pPr algn="ctr"/>
+          </a:p>
+        </p:txBody>
+      </p:sp>
+      <p:sp>
+        <p:nvSpPr>
+          <p:cNvPr id="4" name="TextBox 3"/>
+          <p:cNvSpPr txBox="1"/>
+          <p:nvPr/>
+        </p:nvSpPr>
+        <p:spPr>
+          <a:xfrm>
+            <a:off x="292608" y="201168"/>
+            <a:ext cx="11430000" cy="274320"/>
+          </a:xfrm>
+          <a:prstGeom prst="rect">
+            <a:avLst/>
+          </a:prstGeom>
+          <a:noFill/>
+        </p:spPr>
+        <p:txBody>
+          <a:bodyPr wrap="square">
+            <a:spAutoFit/>
+          </a:bodyPr>
+          <a:lstStyle/>
+          <a:p>
+            <a:pPr algn="l"/>
+            <a:r>
+              <a:rPr sz="1100" b="1">
+                <a:solidFill>
+                  <a:srgbClr val="CC0E1E"/>
+                </a:solidFill>
+                <a:latin typeface="Calibri"/>
+              </a:rPr>
+              <a:t>SPA</a:t>
+            </a:r>
+          </a:p>
+        </p:txBody>
+      </p:sp>
+      <p:sp>
+        <p:nvSpPr>
+          <p:cNvPr id="5" name="TextBox 4"/>
+          <p:cNvSpPr txBox="1"/>
+          <p:nvPr/>
+        </p:nvSpPr>
+        <p:spPr>
+          <a:xfrm>
+            <a:off x="292608" y="475488"/>
+            <a:ext cx="11612880" cy="566928"/>
+          </a:xfrm>
+          <a:prstGeom prst="rect">
+            <a:avLst/>
+          </a:prstGeom>
+          <a:noFill/>
+        </p:spPr>
+        <p:txBody>
+          <a:bodyPr wrap="square">
+            <a:spAutoFit/>
+          </a:bodyPr>
+          <a:lstStyle/>
+          <a:p>
+            <a:pPr algn="l"/>
+            <a:r>
+              <a:rPr sz="2500" b="1">
+                <a:solidFill>
+                  <a:srgbClr val="1A1A1A"/>
+                </a:solidFill>
+                <a:latin typeface="Calibri"/>
+              </a:rPr>
+              <a:t>SPA</a:t>
+            </a:r>
+          </a:p>
+        </p:txBody>
+      </p:sp>
+      <p:sp>
+        <p:nvSpPr>
+          <p:cNvPr id="6" name="Rectangle 5"/>
+          <p:cNvSpPr/>
+          <p:nvPr/>
+        </p:nvSpPr>
+        <p:spPr>
+          <a:xfrm>
+            <a:off x="292608" y="1005840"/>
+            <a:ext cx="11612880" cy="28000"/>
+          </a:xfrm>
+          <a:prstGeom prst="rect">
+            <a:avLst/>
+          </a:prstGeom>
+          <a:solidFill>
+            <a:srgbClr val="CC0E1E"/>
+          </a:solidFill>
+          <a:ln>
+            <a:noFill/>
+          </a:ln>
+        </p:spPr>
+        <p:style>
+          <a:lnRef idx="1">
+            <a:schemeClr val="accent1"/>
+          </a:lnRef>
+          <a:fillRef idx="3">
+            <a:schemeClr val="accent1"/>
+          </a:fillRef>
+          <a:effectRef idx="2">
+            <a:schemeClr val="accent1"/>
+          </a:effectRef>
+          <a:fontRef idx="minor">
+            <a:schemeClr val="lt1"/>
+          </a:fontRef>
+        </p:style>
+        <p:txBody>
+          <a:bodyPr rtlCol="0" anchor="ctr"/>
+          <a:lstStyle/>
+          <a:p>
+            <a:pPr algn="ctr"/>
+          </a:p>
+        </p:txBody>
+      </p:sp>
+      <p:sp>
+        <p:nvSpPr>
+          <p:cNvPr id="7" name="TextBox 6"/>
+          <p:cNvSpPr txBox="1"/>
+          <p:nvPr/>
+        </p:nvSpPr>
+        <p:spPr>
+          <a:xfrm>
+            <a:off x="11594592" y="6473952"/>
+            <a:ext cx="365760" cy="274320"/>
+          </a:xfrm>
+          <a:prstGeom prst="rect">
+            <a:avLst/>
+          </a:prstGeom>
+          <a:noFill/>
+        </p:spPr>
+        <p:txBody>
+          <a:bodyPr wrap="square">
+            <a:spAutoFit/>
+          </a:bodyPr>
+          <a:lstStyle/>
+          <a:p>
+            <a:pPr algn="r"/>
+            <a:r>
+              <a:rPr sz="1000" b="0">
+                <a:solidFill>
+                  <a:srgbClr val="5A5A5A"/>
+                </a:solidFill>
+                <a:latin typeface="Calibri"/>
+              </a:rPr>
+              <a:t>13</a:t>
+            </a:r>
+          </a:p>
+        </p:txBody>
+      </p:sp>
+      <p:sp>
+        <p:nvSpPr>
+          <p:cNvPr id="8" name="Rounded Rectangle 7"/>
+          <p:cNvSpPr/>
+          <p:nvPr/>
+        </p:nvSpPr>
+        <p:spPr>
+          <a:xfrm>
+            <a:off x="292608" y="1234440"/>
+            <a:ext cx="2798064" cy="3108960"/>
+          </a:xfrm>
+          <a:prstGeom prst="roundRect">
+            <a:avLst>
+              <a:gd name="adj" fmla="val 6000"/>
+            </a:avLst>
+          </a:prstGeom>
+          <a:solidFill>
+            <a:srgbClr val="ECECEC"/>
+          </a:solidFill>
+          <a:ln>
+            <a:noFill/>
+          </a:ln>
+          <a:effectLst/>
+        </p:spPr>
+        <p:style>
+          <a:lnRef idx="1">
+            <a:schemeClr val="accent1"/>
+          </a:lnRef>
+          <a:fillRef idx="3">
+            <a:schemeClr val="accent1"/>
+          </a:fillRef>
+          <a:effectRef idx="2">
+            <a:schemeClr val="accent1"/>
+          </a:effectRef>
+          <a:fontRef idx="minor">
+            <a:schemeClr val="lt1"/>
+          </a:fontRef>
+        </p:style>
+        <p:txBody>
+          <a:bodyPr rtlCol="0" anchor="ctr"/>
+          <a:lstStyle/>
+          <a:p>
+            <a:pPr algn="ctr"/>
+          </a:p>
+        </p:txBody>
+      </p:sp>
+      <p:sp>
+        <p:nvSpPr>
+          <p:cNvPr id="9" name="Oval 8"/>
+          <p:cNvSpPr/>
+          <p:nvPr/>
+        </p:nvSpPr>
+        <p:spPr>
+          <a:xfrm>
+            <a:off x="493776" y="1435608"/>
+            <a:ext cx="457200" cy="457200"/>
+          </a:xfrm>
+          <a:prstGeom prst="ellipse">
+            <a:avLst/>
+          </a:prstGeom>
+          <a:solidFill>
+            <a:srgbClr val="CC0E1E"/>
+          </a:solidFill>
+          <a:ln>
+            <a:noFill/>
+          </a:ln>
+          <a:effectLst/>
+        </p:spPr>
+        <p:style>
+          <a:lnRef idx="1">
+            <a:schemeClr val="accent1"/>
+          </a:lnRef>
+          <a:fillRef idx="3">
+            <a:schemeClr val="accent1"/>
+          </a:fillRef>
+          <a:effectRef idx="2">
+            <a:schemeClr val="accent1"/>
+          </a:effectRef>
+          <a:fontRef idx="minor">
+            <a:schemeClr val="lt1"/>
+          </a:fontRef>
+        </p:style>
+        <p:txBody>
+          <a:bodyPr rtlCol="0" anchor="ctr" lIns="0" rIns="0" tIns="0" bIns="0"/>
+          <a:lstStyle/>
+          <a:p>
+            <a:pPr algn="ctr"/>
+            <a:r>
+              <a:rPr sz="1800" b="1">
+                <a:solidFill>
+                  <a:srgbClr val="FFFFFF"/>
+                </a:solidFill>
+                <a:latin typeface="Calibri"/>
+              </a:rPr>
+              <a:t>1</a:t>
+            </a:r>
+          </a:p>
+        </p:txBody>
+      </p:sp>
+      <p:sp>
+        <p:nvSpPr>
+          <p:cNvPr id="10" name="TextBox 9"/>
+          <p:cNvSpPr txBox="1"/>
+          <p:nvPr/>
+        </p:nvSpPr>
+        <p:spPr>
+          <a:xfrm>
+            <a:off x="1115568" y="1435608"/>
+            <a:ext cx="1792224" cy="411480"/>
+          </a:xfrm>
+          <a:prstGeom prst="rect">
+            <a:avLst/>
+          </a:prstGeom>
+          <a:noFill/>
+        </p:spPr>
+        <p:txBody>
+          <a:bodyPr wrap="square">
+            <a:spAutoFit/>
+          </a:bodyPr>
+          <a:lstStyle/>
+          <a:p>
+            <a:pPr algn="l"/>
+            <a:r>
+              <a:rPr sz="1500" b="1">
+                <a:solidFill>
+                  <a:srgbClr val="1A1A1A"/>
+                </a:solidFill>
+                <a:latin typeface="Calibri"/>
+              </a:rPr>
+              <a:t>FINLAND proposal</a:t>
+            </a:r>
+          </a:p>
+        </p:txBody>
+      </p:sp>
+      <p:sp>
+        <p:nvSpPr>
+          <p:cNvPr id="11" name="TextBox 10"/>
+          <p:cNvSpPr txBox="1"/>
+          <p:nvPr/>
+        </p:nvSpPr>
+        <p:spPr>
+          <a:xfrm>
+            <a:off x="585216" y="2011680"/>
+            <a:ext cx="2249424" cy="2194560"/>
+          </a:xfrm>
+          <a:prstGeom prst="rect">
+            <a:avLst/>
+          </a:prstGeom>
+          <a:noFill/>
+        </p:spPr>
+        <p:txBody>
+          <a:bodyPr wrap="square">
+            <a:spAutoFit/>
+          </a:bodyPr>
+          <a:lstStyle/>
+          <a:p>
+            <a:pPr>
+              <a:lnSpc>
+                <a:spcPct val="115000"/>
+              </a:lnSpc>
+              <a:spcAft>
+                <a:spcPts val="1000"/>
+              </a:spcAft>
+            </a:pPr>
+            <a:r>
+              <a:rPr sz="1250" b="1">
+                <a:solidFill>
+                  <a:srgbClr val="CC0E1E"/>
+                </a:solidFill>
+                <a:latin typeface="Calibri"/>
+              </a:rPr>
+              <a:t>—  </a:t>
+            </a:r>
+            <a:r>
+              <a:rPr sz="1250">
+                <a:solidFill>
+                  <a:srgbClr val="1A1A1A"/>
+                </a:solidFill>
+                <a:latin typeface="Calibri"/>
+              </a:rPr>
+              <a:t>Nordic Automotive Trading submits a proposed parts list.</a:t>
+            </a:r>
+          </a:p>
+        </p:txBody>
+      </p:sp>
+      <p:sp>
+        <p:nvSpPr>
+          <p:cNvPr id="12" name="Rounded Rectangle 11"/>
+          <p:cNvSpPr/>
+          <p:nvPr/>
+        </p:nvSpPr>
+        <p:spPr>
+          <a:xfrm>
+            <a:off x="3227832" y="1234440"/>
+            <a:ext cx="2798064" cy="3108960"/>
+          </a:xfrm>
+          <a:prstGeom prst="roundRect">
+            <a:avLst>
+              <a:gd name="adj" fmla="val 6000"/>
+            </a:avLst>
+          </a:prstGeom>
+          <a:solidFill>
+            <a:srgbClr val="ECECEC"/>
+          </a:solidFill>
+          <a:ln>
+            <a:noFill/>
+          </a:ln>
+          <a:effectLst/>
+        </p:spPr>
+        <p:style>
+          <a:lnRef idx="1">
+            <a:schemeClr val="accent1"/>
+          </a:lnRef>
+          <a:fillRef idx="3">
+            <a:schemeClr val="accent1"/>
+          </a:fillRef>
+          <a:effectRef idx="2">
+            <a:schemeClr val="accent1"/>
+          </a:effectRef>
+          <a:fontRef idx="minor">
+            <a:schemeClr val="lt1"/>
+          </a:fontRef>
+        </p:style>
+        <p:txBody>
+          <a:bodyPr rtlCol="0" anchor="ctr"/>
+          <a:lstStyle/>
+          <a:p>
+            <a:pPr algn="ctr"/>
+          </a:p>
+        </p:txBody>
+      </p:sp>
+      <p:sp>
+        <p:nvSpPr>
+          <p:cNvPr id="13" name="Oval 12"/>
+          <p:cNvSpPr/>
+          <p:nvPr/>
+        </p:nvSpPr>
+        <p:spPr>
+          <a:xfrm>
+            <a:off x="3429000" y="1435608"/>
+            <a:ext cx="457200" cy="457200"/>
+          </a:xfrm>
+          <a:prstGeom prst="ellipse">
+            <a:avLst/>
+          </a:prstGeom>
+          <a:solidFill>
+            <a:srgbClr val="CC0E1E"/>
+          </a:solidFill>
+          <a:ln>
+            <a:noFill/>
+          </a:ln>
+          <a:effectLst/>
+        </p:spPr>
+        <p:style>
+          <a:lnRef idx="1">
+            <a:schemeClr val="accent1"/>
+          </a:lnRef>
+          <a:fillRef idx="3">
+            <a:schemeClr val="accent1"/>
+          </a:fillRef>
+          <a:effectRef idx="2">
+            <a:schemeClr val="accent1"/>
+          </a:effectRef>
+          <a:fontRef idx="minor">
+            <a:schemeClr val="lt1"/>
+          </a:fontRef>
+        </p:style>
+        <p:txBody>
+          <a:bodyPr rtlCol="0" anchor="ctr" lIns="0" rIns="0" tIns="0" bIns="0"/>
+          <a:lstStyle/>
+          <a:p>
+            <a:pPr algn="ctr"/>
+            <a:r>
+              <a:rPr sz="1800" b="1">
+                <a:solidFill>
+                  <a:srgbClr val="FFFFFF"/>
+                </a:solidFill>
+                <a:latin typeface="Calibri"/>
+              </a:rPr>
+              <a:t>2</a:t>
+            </a:r>
+          </a:p>
+        </p:txBody>
+      </p:sp>
+      <p:sp>
+        <p:nvSpPr>
+          <p:cNvPr id="14" name="TextBox 13"/>
+          <p:cNvSpPr txBox="1"/>
+          <p:nvPr/>
+        </p:nvSpPr>
+        <p:spPr>
+          <a:xfrm>
+            <a:off x="4050792" y="1435608"/>
+            <a:ext cx="1792224" cy="411480"/>
+          </a:xfrm>
+          <a:prstGeom prst="rect">
+            <a:avLst/>
+          </a:prstGeom>
+          <a:noFill/>
+        </p:spPr>
+        <p:txBody>
+          <a:bodyPr wrap="square">
+            <a:spAutoFit/>
+          </a:bodyPr>
+          <a:lstStyle/>
+          <a:p>
+            <a:pPr algn="l"/>
+            <a:r>
+              <a:rPr sz="1500" b="1">
+                <a:solidFill>
+                  <a:srgbClr val="1A1A1A"/>
+                </a:solidFill>
+                <a:latin typeface="Calibri"/>
+              </a:rPr>
+              <a:t>ISZE review</a:t>
+            </a:r>
+          </a:p>
+        </p:txBody>
+      </p:sp>
+      <p:sp>
+        <p:nvSpPr>
+          <p:cNvPr id="15" name="TextBox 14"/>
+          <p:cNvSpPr txBox="1"/>
+          <p:nvPr/>
+        </p:nvSpPr>
+        <p:spPr>
+          <a:xfrm>
+            <a:off x="3520440" y="2011680"/>
+            <a:ext cx="2249424" cy="2194560"/>
+          </a:xfrm>
+          <a:prstGeom prst="rect">
+            <a:avLst/>
+          </a:prstGeom>
+          <a:noFill/>
+        </p:spPr>
+        <p:txBody>
+          <a:bodyPr wrap="square">
+            <a:spAutoFit/>
+          </a:bodyPr>
+          <a:lstStyle/>
+          <a:p>
+            <a:pPr>
+              <a:lnSpc>
+                <a:spcPct val="115000"/>
+              </a:lnSpc>
+              <a:spcAft>
+                <a:spcPts val="1000"/>
+              </a:spcAft>
+            </a:pPr>
+            <a:r>
+              <a:rPr sz="1250" b="1">
+                <a:solidFill>
+                  <a:srgbClr val="CC0E1E"/>
+                </a:solidFill>
+                <a:latin typeface="Calibri"/>
+              </a:rPr>
+              <a:t>—  </a:t>
+            </a:r>
+            <a:r>
+              <a:rPr sz="1250">
+                <a:solidFill>
+                  <a:srgbClr val="1A1A1A"/>
+                </a:solidFill>
+                <a:latin typeface="Calibri"/>
+              </a:rPr>
+              <a:t>ISZE reviews the proposal against network data and fit.</a:t>
+            </a:r>
+          </a:p>
+        </p:txBody>
+      </p:sp>
+      <p:sp>
+        <p:nvSpPr>
+          <p:cNvPr id="16" name="Rounded Rectangle 15"/>
+          <p:cNvSpPr/>
+          <p:nvPr/>
+        </p:nvSpPr>
+        <p:spPr>
+          <a:xfrm>
+            <a:off x="6163056" y="1234440"/>
+            <a:ext cx="2798064" cy="3108960"/>
+          </a:xfrm>
+          <a:prstGeom prst="roundRect">
+            <a:avLst>
+              <a:gd name="adj" fmla="val 6000"/>
+            </a:avLst>
+          </a:prstGeom>
+          <a:solidFill>
+            <a:srgbClr val="ECECEC"/>
+          </a:solidFill>
+          <a:ln>
+            <a:noFill/>
+          </a:ln>
+          <a:effectLst/>
+        </p:spPr>
+        <p:style>
+          <a:lnRef idx="1">
+            <a:schemeClr val="accent1"/>
+          </a:lnRef>
+          <a:fillRef idx="3">
+            <a:schemeClr val="accent1"/>
+          </a:fillRef>
+          <a:effectRef idx="2">
+            <a:schemeClr val="accent1"/>
+          </a:effectRef>
+          <a:fontRef idx="minor">
+            <a:schemeClr val="lt1"/>
+          </a:fontRef>
+        </p:style>
+        <p:txBody>
+          <a:bodyPr rtlCol="0" anchor="ctr"/>
+          <a:lstStyle/>
+          <a:p>
+            <a:pPr algn="ctr"/>
+          </a:p>
+        </p:txBody>
+      </p:sp>
+      <p:sp>
+        <p:nvSpPr>
+          <p:cNvPr id="17" name="Oval 16"/>
+          <p:cNvSpPr/>
+          <p:nvPr/>
+        </p:nvSpPr>
+        <p:spPr>
+          <a:xfrm>
+            <a:off x="6364224" y="1435608"/>
+            <a:ext cx="457200" cy="457200"/>
+          </a:xfrm>
+          <a:prstGeom prst="ellipse">
+            <a:avLst/>
+          </a:prstGeom>
+          <a:solidFill>
+            <a:srgbClr val="CC0E1E"/>
+          </a:solidFill>
+          <a:ln>
+            <a:noFill/>
+          </a:ln>
+          <a:effectLst/>
+        </p:spPr>
+        <p:style>
+          <a:lnRef idx="1">
+            <a:schemeClr val="accent1"/>
+          </a:lnRef>
+          <a:fillRef idx="3">
+            <a:schemeClr val="accent1"/>
+          </a:fillRef>
+          <a:effectRef idx="2">
+            <a:schemeClr val="accent1"/>
+          </a:effectRef>
+          <a:fontRef idx="minor">
+            <a:schemeClr val="lt1"/>
+          </a:fontRef>
+        </p:style>
+        <p:txBody>
+          <a:bodyPr rtlCol="0" anchor="ctr" lIns="0" rIns="0" tIns="0" bIns="0"/>
+          <a:lstStyle/>
+          <a:p>
+            <a:pPr algn="ctr"/>
+            <a:r>
+              <a:rPr sz="1800" b="1">
+                <a:solidFill>
+                  <a:srgbClr val="FFFFFF"/>
+                </a:solidFill>
+                <a:latin typeface="Calibri"/>
+              </a:rPr>
+              <a:t>3</a:t>
+            </a:r>
+          </a:p>
+        </p:txBody>
+      </p:sp>
+      <p:sp>
+        <p:nvSpPr>
+          <p:cNvPr id="18" name="TextBox 17"/>
+          <p:cNvSpPr txBox="1"/>
+          <p:nvPr/>
+        </p:nvSpPr>
+        <p:spPr>
+          <a:xfrm>
+            <a:off x="6986016" y="1435608"/>
+            <a:ext cx="1792224" cy="411480"/>
+          </a:xfrm>
+          <a:prstGeom prst="rect">
+            <a:avLst/>
+          </a:prstGeom>
+          <a:noFill/>
+        </p:spPr>
+        <p:txBody>
+          <a:bodyPr wrap="square">
+            <a:spAutoFit/>
+          </a:bodyPr>
+          <a:lstStyle/>
+          <a:p>
+            <a:pPr algn="l"/>
+            <a:r>
+              <a:rPr sz="1500" b="1">
+                <a:solidFill>
+                  <a:srgbClr val="1A1A1A"/>
+                </a:solidFill>
+                <a:latin typeface="Calibri"/>
+              </a:rPr>
+              <a:t>Counter-proposal</a:t>
+            </a:r>
+          </a:p>
+        </p:txBody>
+      </p:sp>
+      <p:sp>
+        <p:nvSpPr>
+          <p:cNvPr id="19" name="TextBox 18"/>
+          <p:cNvSpPr txBox="1"/>
+          <p:nvPr/>
+        </p:nvSpPr>
+        <p:spPr>
+          <a:xfrm>
+            <a:off x="6455664" y="2011680"/>
+            <a:ext cx="2249424" cy="2194560"/>
+          </a:xfrm>
+          <a:prstGeom prst="rect">
+            <a:avLst/>
+          </a:prstGeom>
+          <a:noFill/>
+        </p:spPr>
+        <p:txBody>
+          <a:bodyPr wrap="square">
+            <a:spAutoFit/>
+          </a:bodyPr>
+          <a:lstStyle/>
+          <a:p>
+            <a:pPr>
+              <a:lnSpc>
+                <a:spcPct val="115000"/>
+              </a:lnSpc>
+              <a:spcAft>
+                <a:spcPts val="1000"/>
+              </a:spcAft>
+            </a:pPr>
+            <a:r>
+              <a:rPr sz="1250" b="1">
+                <a:solidFill>
+                  <a:srgbClr val="CC0E1E"/>
+                </a:solidFill>
+                <a:latin typeface="Calibri"/>
+              </a:rPr>
+              <a:t>—  </a:t>
+            </a:r>
+            <a:r>
+              <a:rPr sz="1250">
+                <a:solidFill>
+                  <a:srgbClr val="1A1A1A"/>
+                </a:solidFill>
+                <a:latin typeface="Calibri"/>
+              </a:rPr>
+              <a:t>ISZE returns a counter-proposal where needed.</a:t>
+            </a:r>
+          </a:p>
+        </p:txBody>
+      </p:sp>
+      <p:sp>
+        <p:nvSpPr>
+          <p:cNvPr id="20" name="Rounded Rectangle 19"/>
+          <p:cNvSpPr/>
+          <p:nvPr/>
+        </p:nvSpPr>
+        <p:spPr>
+          <a:xfrm>
+            <a:off x="9098280" y="1234440"/>
+            <a:ext cx="2798064" cy="3108960"/>
+          </a:xfrm>
+          <a:prstGeom prst="roundRect">
+            <a:avLst>
+              <a:gd name="adj" fmla="val 6000"/>
+            </a:avLst>
+          </a:prstGeom>
+          <a:solidFill>
+            <a:srgbClr val="ECECEC"/>
+          </a:solidFill>
+          <a:ln>
+            <a:noFill/>
+          </a:ln>
+          <a:effectLst/>
+        </p:spPr>
+        <p:style>
+          <a:lnRef idx="1">
+            <a:schemeClr val="accent1"/>
+          </a:lnRef>
+          <a:fillRef idx="3">
+            <a:schemeClr val="accent1"/>
+          </a:fillRef>
+          <a:effectRef idx="2">
+            <a:schemeClr val="accent1"/>
+          </a:effectRef>
+          <a:fontRef idx="minor">
+            <a:schemeClr val="lt1"/>
+          </a:fontRef>
+        </p:style>
+        <p:txBody>
+          <a:bodyPr rtlCol="0" anchor="ctr"/>
+          <a:lstStyle/>
+          <a:p>
+            <a:pPr algn="ctr"/>
+          </a:p>
+        </p:txBody>
+      </p:sp>
+      <p:sp>
+        <p:nvSpPr>
+          <p:cNvPr id="21" name="Oval 20"/>
+          <p:cNvSpPr/>
+          <p:nvPr/>
+        </p:nvSpPr>
+        <p:spPr>
+          <a:xfrm>
+            <a:off x="9299448" y="1435608"/>
+            <a:ext cx="457200" cy="457200"/>
+          </a:xfrm>
+          <a:prstGeom prst="ellipse">
+            <a:avLst/>
+          </a:prstGeom>
+          <a:solidFill>
+            <a:srgbClr val="CC0E1E"/>
+          </a:solidFill>
+          <a:ln>
+            <a:noFill/>
+          </a:ln>
+          <a:effectLst/>
+        </p:spPr>
+        <p:style>
+          <a:lnRef idx="1">
+            <a:schemeClr val="accent1"/>
+          </a:lnRef>
+          <a:fillRef idx="3">
+            <a:schemeClr val="accent1"/>
+          </a:fillRef>
+          <a:effectRef idx="2">
+            <a:schemeClr val="accent1"/>
+          </a:effectRef>
+          <a:fontRef idx="minor">
+            <a:schemeClr val="lt1"/>
+          </a:fontRef>
+        </p:style>
+        <p:txBody>
+          <a:bodyPr rtlCol="0" anchor="ctr" lIns="0" rIns="0" tIns="0" bIns="0"/>
+          <a:lstStyle/>
+          <a:p>
+            <a:pPr algn="ctr"/>
+            <a:r>
+              <a:rPr sz="1800" b="1">
+                <a:solidFill>
+                  <a:srgbClr val="FFFFFF"/>
+                </a:solidFill>
+                <a:latin typeface="Calibri"/>
+              </a:rPr>
+              <a:t>4</a:t>
+            </a:r>
+          </a:p>
+        </p:txBody>
+      </p:sp>
+      <p:sp>
+        <p:nvSpPr>
+          <p:cNvPr id="22" name="TextBox 21"/>
+          <p:cNvSpPr txBox="1"/>
+          <p:nvPr/>
+        </p:nvSpPr>
+        <p:spPr>
+          <a:xfrm>
+            <a:off x="9921240" y="1435608"/>
+            <a:ext cx="1792224" cy="411480"/>
+          </a:xfrm>
+          <a:prstGeom prst="rect">
+            <a:avLst/>
+          </a:prstGeom>
+          <a:noFill/>
+        </p:spPr>
+        <p:txBody>
+          <a:bodyPr wrap="square">
+            <a:spAutoFit/>
+          </a:bodyPr>
+          <a:lstStyle/>
+          <a:p>
+            <a:pPr algn="l"/>
+            <a:r>
+              <a:rPr sz="1500" b="1">
+                <a:solidFill>
+                  <a:srgbClr val="1A1A1A"/>
+                </a:solidFill>
+                <a:latin typeface="Calibri"/>
+              </a:rPr>
+              <a:t>Final approval</a:t>
+            </a:r>
+          </a:p>
+        </p:txBody>
+      </p:sp>
+      <p:sp>
+        <p:nvSpPr>
+          <p:cNvPr id="23" name="TextBox 22"/>
+          <p:cNvSpPr txBox="1"/>
+          <p:nvPr/>
+        </p:nvSpPr>
+        <p:spPr>
+          <a:xfrm>
+            <a:off x="9390888" y="2011680"/>
+            <a:ext cx="2249424" cy="2194560"/>
+          </a:xfrm>
+          <a:prstGeom prst="rect">
+            <a:avLst/>
+          </a:prstGeom>
+          <a:noFill/>
+        </p:spPr>
+        <p:txBody>
+          <a:bodyPr wrap="square">
+            <a:spAutoFit/>
+          </a:bodyPr>
+          <a:lstStyle/>
+          <a:p>
+            <a:pPr>
+              <a:lnSpc>
+                <a:spcPct val="115000"/>
+              </a:lnSpc>
+              <a:spcAft>
+                <a:spcPts val="1000"/>
+              </a:spcAft>
+            </a:pPr>
+            <a:r>
+              <a:rPr sz="1250" b="1">
+                <a:solidFill>
+                  <a:srgbClr val="CC0E1E"/>
+                </a:solidFill>
+                <a:latin typeface="Calibri"/>
+              </a:rPr>
+              <a:t>—  </a:t>
+            </a:r>
+            <a:r>
+              <a:rPr sz="1250">
+                <a:solidFill>
+                  <a:srgbClr val="1A1A1A"/>
+                </a:solidFill>
+                <a:latin typeface="Calibri"/>
+              </a:rPr>
+              <a:t>Signed off by ISZE management.</a:t>
+            </a:r>
+          </a:p>
+        </p:txBody>
+      </p:sp>
+      <p:sp>
+        <p:nvSpPr>
+          <p:cNvPr id="24" name="TextBox 23"/>
+          <p:cNvSpPr txBox="1"/>
+          <p:nvPr/>
+        </p:nvSpPr>
+        <p:spPr>
+          <a:xfrm>
+            <a:off x="292608" y="4572000"/>
+            <a:ext cx="8595360" cy="365760"/>
+          </a:xfrm>
+          <a:prstGeom prst="rect">
+            <a:avLst/>
+          </a:prstGeom>
+          <a:noFill/>
+        </p:spPr>
+        <p:txBody>
+          <a:bodyPr wrap="square">
+            <a:spAutoFit/>
+          </a:bodyPr>
+          <a:lstStyle/>
+          <a:p>
+            <a:pPr algn="l"/>
+            <a:r>
+              <a:rPr sz="1400" b="1">
+                <a:solidFill>
+                  <a:srgbClr val="CC0E1E"/>
+                </a:solidFill>
+                <a:latin typeface="Calibri"/>
+              </a:rPr>
+              <a:t>Purpose: higher turnover for both sides.</a:t>
+            </a:r>
+          </a:p>
+        </p:txBody>
+      </p:sp>
+    </p:spTree>
+  </p:cSld>
+  <p:clrMapOvr>
+    <a:masterClrMapping/>
+  </p:clrMapOvr>
+</p:sld>
+</file>
+
+<file path=ppt/slides/slide14.xml><?xml version="1.0" encoding="utf-8"?>
+<p:sld xmlns:a="http://schemas.openxmlformats.org/drawingml/2006/main" xmlns:p="http://schemas.openxmlformats.org/presentationml/2006/main" xmlns:r="http://schemas.openxmlformats.org/officeDocument/2006/relationships">
+  <p:cSld>
+    <p:bg>
+      <p:bgPr>
+        <a:solidFill>
+          <a:srgbClr val="FFFFFF"/>
+        </a:solidFill>
+        <a:effectLst/>
+      </p:bgPr>
+    </p:bg>
+    <p:spTree>
+      <p:nvGrpSpPr>
+        <p:cNvPr id="1" name=""/>
+        <p:cNvGrpSpPr/>
+        <p:nvPr/>
+      </p:nvGrpSpPr>
+      <p:grpSpPr/>
+      <p:pic>
+        <p:nvPicPr>
+          <p:cNvPr id="2" name="Picture 1" descr="isuzu_logo_red.png"/>
+          <p:cNvPicPr>
+            <a:picLocks noChangeAspect="1"/>
+          </p:cNvPicPr>
+          <p:nvPr/>
+        </p:nvPicPr>
+        <p:blipFill>
+          <a:blip r:embed="rId2"/>
+          <a:stretch>
+            <a:fillRect/>
+          </a:stretch>
+        </p:blipFill>
+        <p:spPr>
+          <a:xfrm>
+            <a:off x="256032" y="6263640"/>
+            <a:ext cx="1679787" cy="292608"/>
+          </a:xfrm>
+          <a:prstGeom prst="rect">
+            <a:avLst/>
+          </a:prstGeom>
+        </p:spPr>
+      </p:pic>
+      <p:sp>
+        <p:nvSpPr>
+          <p:cNvPr id="3" name="Rectangle 2"/>
+          <p:cNvSpPr/>
+          <p:nvPr/>
+        </p:nvSpPr>
+        <p:spPr>
+          <a:xfrm>
+            <a:off x="0" y="6766560"/>
+            <a:ext cx="12188952" cy="91440"/>
+          </a:xfrm>
+          <a:prstGeom prst="rect">
+            <a:avLst/>
+          </a:prstGeom>
+          <a:solidFill>
+            <a:srgbClr val="CC0E1E"/>
+          </a:solidFill>
+          <a:ln>
+            <a:noFill/>
+          </a:ln>
+        </p:spPr>
+        <p:style>
+          <a:lnRef idx="1">
+            <a:schemeClr val="accent1"/>
+          </a:lnRef>
+          <a:fillRef idx="3">
+            <a:schemeClr val="accent1"/>
+          </a:fillRef>
+          <a:effectRef idx="2">
+            <a:schemeClr val="accent1"/>
+          </a:effectRef>
+          <a:fontRef idx="minor">
+            <a:schemeClr val="lt1"/>
+          </a:fontRef>
+        </p:style>
+        <p:txBody>
+          <a:bodyPr rtlCol="0" anchor="ctr"/>
+          <a:lstStyle/>
+          <a:p>
+            <a:pPr algn="ctr"/>
+          </a:p>
+        </p:txBody>
+      </p:sp>
+      <p:sp>
+        <p:nvSpPr>
+          <p:cNvPr id="4" name="TextBox 3"/>
+          <p:cNvSpPr txBox="1"/>
+          <p:nvPr/>
+        </p:nvSpPr>
+        <p:spPr>
+          <a:xfrm>
+            <a:off x="292608" y="201168"/>
+            <a:ext cx="11430000" cy="274320"/>
+          </a:xfrm>
+          <a:prstGeom prst="rect">
+            <a:avLst/>
+          </a:prstGeom>
+          <a:noFill/>
+        </p:spPr>
+        <p:txBody>
+          <a:bodyPr wrap="square">
+            <a:spAutoFit/>
+          </a:bodyPr>
+          <a:lstStyle/>
+          <a:p>
+            <a:pPr algn="l"/>
+            <a:r>
+              <a:rPr sz="1100" b="1">
+                <a:solidFill>
+                  <a:srgbClr val="CC0E1E"/>
+                </a:solidFill>
+                <a:latin typeface="Calibri"/>
+              </a:rPr>
+              <a:t>R&amp;M</a:t>
+            </a:r>
+          </a:p>
+        </p:txBody>
+      </p:sp>
+      <p:sp>
+        <p:nvSpPr>
+          <p:cNvPr id="5" name="TextBox 4"/>
+          <p:cNvSpPr txBox="1"/>
+          <p:nvPr/>
+        </p:nvSpPr>
+        <p:spPr>
+          <a:xfrm>
+            <a:off x="292608" y="475488"/>
+            <a:ext cx="11612880" cy="566928"/>
+          </a:xfrm>
+          <a:prstGeom prst="rect">
+            <a:avLst/>
+          </a:prstGeom>
+          <a:noFill/>
+        </p:spPr>
+        <p:txBody>
+          <a:bodyPr wrap="square">
+            <a:spAutoFit/>
+          </a:bodyPr>
+          <a:lstStyle/>
+          <a:p>
+            <a:pPr algn="l"/>
+            <a:r>
+              <a:rPr sz="2500" b="1">
+                <a:solidFill>
+                  <a:srgbClr val="1A1A1A"/>
+                </a:solidFill>
+                <a:latin typeface="Calibri"/>
+              </a:rPr>
+              <a:t>R&amp;M — let's align on the market</a:t>
+            </a:r>
+          </a:p>
+        </p:txBody>
+      </p:sp>
+      <p:sp>
+        <p:nvSpPr>
+          <p:cNvPr id="6" name="Rectangle 5"/>
+          <p:cNvSpPr/>
+          <p:nvPr/>
+        </p:nvSpPr>
+        <p:spPr>
+          <a:xfrm>
+            <a:off x="292608" y="1005840"/>
+            <a:ext cx="11612880" cy="28000"/>
+          </a:xfrm>
+          <a:prstGeom prst="rect">
+            <a:avLst/>
+          </a:prstGeom>
+          <a:solidFill>
+            <a:srgbClr val="CC0E1E"/>
+          </a:solidFill>
+          <a:ln>
+            <a:noFill/>
+          </a:ln>
+        </p:spPr>
+        <p:style>
+          <a:lnRef idx="1">
+            <a:schemeClr val="accent1"/>
+          </a:lnRef>
+          <a:fillRef idx="3">
+            <a:schemeClr val="accent1"/>
+          </a:fillRef>
+          <a:effectRef idx="2">
+            <a:schemeClr val="accent1"/>
+          </a:effectRef>
+          <a:fontRef idx="minor">
+            <a:schemeClr val="lt1"/>
+          </a:fontRef>
+        </p:style>
+        <p:txBody>
+          <a:bodyPr rtlCol="0" anchor="ctr"/>
+          <a:lstStyle/>
+          <a:p>
+            <a:pPr algn="ctr"/>
+          </a:p>
+        </p:txBody>
+      </p:sp>
+      <p:sp>
+        <p:nvSpPr>
+          <p:cNvPr id="7" name="TextBox 6"/>
+          <p:cNvSpPr txBox="1"/>
+          <p:nvPr/>
+        </p:nvSpPr>
+        <p:spPr>
+          <a:xfrm>
+            <a:off x="11594592" y="6473952"/>
+            <a:ext cx="365760" cy="274320"/>
+          </a:xfrm>
+          <a:prstGeom prst="rect">
+            <a:avLst/>
+          </a:prstGeom>
+          <a:noFill/>
+        </p:spPr>
+        <p:txBody>
+          <a:bodyPr wrap="square">
+            <a:spAutoFit/>
+          </a:bodyPr>
+          <a:lstStyle/>
+          <a:p>
+            <a:pPr algn="r"/>
+            <a:r>
+              <a:rPr sz="1000" b="0">
+                <a:solidFill>
+                  <a:srgbClr val="5A5A5A"/>
+                </a:solidFill>
+                <a:latin typeface="Calibri"/>
+              </a:rPr>
+              <a:t>14</a:t>
+            </a:r>
+          </a:p>
+        </p:txBody>
+      </p:sp>
+      <p:sp>
+        <p:nvSpPr>
+          <p:cNvPr id="8" name="Rounded Rectangle 7"/>
+          <p:cNvSpPr/>
+          <p:nvPr/>
+        </p:nvSpPr>
+        <p:spPr>
+          <a:xfrm>
+            <a:off x="292608" y="1188720"/>
+            <a:ext cx="5486400" cy="4023360"/>
+          </a:xfrm>
+          <a:prstGeom prst="roundRect">
+            <a:avLst>
+              <a:gd name="adj" fmla="val 6000"/>
+            </a:avLst>
+          </a:prstGeom>
+          <a:solidFill>
+            <a:srgbClr val="ECECEC"/>
+          </a:solidFill>
+          <a:ln>
+            <a:noFill/>
+          </a:ln>
+          <a:effectLst/>
+        </p:spPr>
+        <p:style>
+          <a:lnRef idx="1">
+            <a:schemeClr val="accent1"/>
+          </a:lnRef>
+          <a:fillRef idx="3">
+            <a:schemeClr val="accent1"/>
+          </a:fillRef>
+          <a:effectRef idx="2">
+            <a:schemeClr val="accent1"/>
+          </a:effectRef>
+          <a:fontRef idx="minor">
+            <a:schemeClr val="lt1"/>
+          </a:fontRef>
+        </p:style>
+        <p:txBody>
+          <a:bodyPr rtlCol="0" anchor="ctr"/>
+          <a:lstStyle/>
+          <a:p>
+            <a:pPr algn="ctr"/>
+          </a:p>
+        </p:txBody>
+      </p:sp>
+      <p:sp>
+        <p:nvSpPr>
+          <p:cNvPr id="9" name="Oval 8"/>
+          <p:cNvSpPr/>
+          <p:nvPr/>
+        </p:nvSpPr>
+        <p:spPr>
+          <a:xfrm>
+            <a:off x="493776" y="1389888"/>
+            <a:ext cx="457200" cy="457200"/>
+          </a:xfrm>
+          <a:prstGeom prst="ellipse">
+            <a:avLst/>
+          </a:prstGeom>
+          <a:solidFill>
+            <a:srgbClr val="CC0E1E"/>
+          </a:solidFill>
+          <a:ln>
+            <a:noFill/>
+          </a:ln>
+          <a:effectLst/>
+        </p:spPr>
+        <p:style>
+          <a:lnRef idx="1">
+            <a:schemeClr val="accent1"/>
+          </a:lnRef>
+          <a:fillRef idx="3">
+            <a:schemeClr val="accent1"/>
+          </a:fillRef>
+          <a:effectRef idx="2">
+            <a:schemeClr val="accent1"/>
+          </a:effectRef>
+          <a:fontRef idx="minor">
+            <a:schemeClr val="lt1"/>
+          </a:fontRef>
+        </p:style>
+        <p:txBody>
+          <a:bodyPr rtlCol="0" anchor="ctr" lIns="0" rIns="0" tIns="0" bIns="0"/>
+          <a:lstStyle/>
+          <a:p>
+            <a:pPr algn="ctr"/>
+            <a:r>
+              <a:rPr sz="1800" b="1">
+                <a:solidFill>
+                  <a:srgbClr val="FFFFFF"/>
+                </a:solidFill>
+                <a:latin typeface="Calibri"/>
+              </a:rPr>
+              <a:t>M</a:t>
+            </a:r>
+          </a:p>
+        </p:txBody>
+      </p:sp>
+      <p:sp>
+        <p:nvSpPr>
+          <p:cNvPr id="10" name="TextBox 9"/>
+          <p:cNvSpPr txBox="1"/>
+          <p:nvPr/>
+        </p:nvSpPr>
+        <p:spPr>
+          <a:xfrm>
+            <a:off x="1115568" y="1389888"/>
+            <a:ext cx="4480560" cy="411480"/>
+          </a:xfrm>
+          <a:prstGeom prst="rect">
+            <a:avLst/>
+          </a:prstGeom>
+          <a:noFill/>
+        </p:spPr>
+        <p:txBody>
+          <a:bodyPr wrap="square">
+            <a:spAutoFit/>
+          </a:bodyPr>
+          <a:lstStyle/>
+          <a:p>
+            <a:pPr algn="l"/>
+            <a:r>
+              <a:rPr sz="1500" b="1">
+                <a:solidFill>
+                  <a:srgbClr val="1A1A1A"/>
+                </a:solidFill>
+                <a:latin typeface="Calibri"/>
+              </a:rPr>
+              <a:t>Market</a:t>
+            </a:r>
+          </a:p>
+        </p:txBody>
+      </p:sp>
+      <p:sp>
+        <p:nvSpPr>
+          <p:cNvPr id="11" name="TextBox 10"/>
+          <p:cNvSpPr txBox="1"/>
+          <p:nvPr/>
+        </p:nvSpPr>
+        <p:spPr>
+          <a:xfrm>
+            <a:off x="585216" y="1965960"/>
+            <a:ext cx="4937760" cy="3108960"/>
+          </a:xfrm>
+          <a:prstGeom prst="rect">
+            <a:avLst/>
+          </a:prstGeom>
+          <a:noFill/>
+        </p:spPr>
+        <p:txBody>
+          <a:bodyPr wrap="square">
+            <a:spAutoFit/>
+          </a:bodyPr>
+          <a:lstStyle/>
+          <a:p>
+            <a:pPr>
+              <a:lnSpc>
+                <a:spcPct val="115000"/>
+              </a:lnSpc>
+              <a:spcAft>
+                <a:spcPts val="1000"/>
+              </a:spcAft>
+            </a:pPr>
+            <a:r>
+              <a:rPr sz="1250" b="1">
+                <a:solidFill>
+                  <a:srgbClr val="CC0E1E"/>
+                </a:solidFill>
+                <a:latin typeface="Calibri"/>
+              </a:rPr>
+              <a:t>—  </a:t>
+            </a:r>
+            <a:r>
+              <a:rPr sz="1250">
+                <a:solidFill>
+                  <a:srgbClr val="1A1A1A"/>
+                </a:solidFill>
+                <a:latin typeface="Calibri"/>
+              </a:rPr>
+              <a:t>How is the market moving for you right now?</a:t>
+            </a:r>
+          </a:p>
+          <a:p>
+            <a:pPr>
+              <a:lnSpc>
+                <a:spcPct val="115000"/>
+              </a:lnSpc>
+              <a:spcAft>
+                <a:spcPts val="1000"/>
+              </a:spcAft>
+            </a:pPr>
+            <a:r>
+              <a:rPr sz="1250" b="1">
+                <a:solidFill>
+                  <a:srgbClr val="CC0E1E"/>
+                </a:solidFill>
+                <a:latin typeface="Calibri"/>
+              </a:rPr>
+              <a:t>—  </a:t>
+            </a:r>
+            <a:r>
+              <a:rPr sz="1250">
+                <a:solidFill>
+                  <a:srgbClr val="1A1A1A"/>
+                </a:solidFill>
+                <a:latin typeface="Calibri"/>
+              </a:rPr>
+              <a:t>How much of your volume is fleet business rather than retail?</a:t>
+            </a:r>
+          </a:p>
+          <a:p>
+            <a:pPr>
+              <a:lnSpc>
+                <a:spcPct val="115000"/>
+              </a:lnSpc>
+              <a:spcAft>
+                <a:spcPts val="1000"/>
+              </a:spcAft>
+            </a:pPr>
+            <a:r>
+              <a:rPr sz="1250" b="1">
+                <a:solidFill>
+                  <a:srgbClr val="CC0E1E"/>
+                </a:solidFill>
+                <a:latin typeface="Calibri"/>
+              </a:rPr>
+              <a:t>—  </a:t>
+            </a:r>
+            <a:r>
+              <a:rPr sz="1250">
+                <a:solidFill>
+                  <a:srgbClr val="1A1A1A"/>
+                </a:solidFill>
+                <a:latin typeface="Calibri"/>
+              </a:rPr>
+              <a:t>Where do you see the biggest hurdles this year?</a:t>
+            </a:r>
+          </a:p>
+          <a:p>
+            <a:pPr>
+              <a:lnSpc>
+                <a:spcPct val="115000"/>
+              </a:lnSpc>
+              <a:spcAft>
+                <a:spcPts val="1000"/>
+              </a:spcAft>
+            </a:pPr>
+            <a:r>
+              <a:rPr sz="1250" b="1">
+                <a:solidFill>
+                  <a:srgbClr val="CC0E1E"/>
+                </a:solidFill>
+                <a:latin typeface="Calibri"/>
+              </a:rPr>
+              <a:t>—  </a:t>
+            </a:r>
+            <a:r>
+              <a:rPr sz="1250">
+                <a:solidFill>
+                  <a:srgbClr val="1A1A1A"/>
+                </a:solidFill>
+                <a:latin typeface="Calibri"/>
+              </a:rPr>
+              <a:t>Where are your real strengths in this segment?</a:t>
+            </a:r>
+          </a:p>
+        </p:txBody>
+      </p:sp>
+      <p:sp>
+        <p:nvSpPr>
+          <p:cNvPr id="12" name="Rounded Rectangle 11"/>
+          <p:cNvSpPr/>
+          <p:nvPr/>
+        </p:nvSpPr>
+        <p:spPr>
+          <a:xfrm>
+            <a:off x="5943600" y="1188720"/>
+            <a:ext cx="5943600" cy="4023360"/>
+          </a:xfrm>
+          <a:prstGeom prst="roundRect">
+            <a:avLst>
+              <a:gd name="adj" fmla="val 6000"/>
+            </a:avLst>
+          </a:prstGeom>
+          <a:solidFill>
+            <a:srgbClr val="ECECEC"/>
+          </a:solidFill>
+          <a:ln>
+            <a:noFill/>
+          </a:ln>
+          <a:effectLst/>
+        </p:spPr>
+        <p:style>
+          <a:lnRef idx="1">
+            <a:schemeClr val="accent1"/>
+          </a:lnRef>
+          <a:fillRef idx="3">
+            <a:schemeClr val="accent1"/>
+          </a:fillRef>
+          <a:effectRef idx="2">
+            <a:schemeClr val="accent1"/>
+          </a:effectRef>
+          <a:fontRef idx="minor">
+            <a:schemeClr val="lt1"/>
+          </a:fontRef>
+        </p:style>
+        <p:txBody>
+          <a:bodyPr rtlCol="0" anchor="ctr"/>
+          <a:lstStyle/>
+          <a:p>
+            <a:pPr algn="ctr"/>
+          </a:p>
+        </p:txBody>
+      </p:sp>
+      <p:sp>
+        <p:nvSpPr>
+          <p:cNvPr id="13" name="Oval 12"/>
+          <p:cNvSpPr/>
+          <p:nvPr/>
+        </p:nvSpPr>
+        <p:spPr>
+          <a:xfrm>
+            <a:off x="6144768" y="1389888"/>
+            <a:ext cx="457200" cy="457200"/>
+          </a:xfrm>
+          <a:prstGeom prst="ellipse">
+            <a:avLst/>
+          </a:prstGeom>
+          <a:solidFill>
+            <a:srgbClr val="CC0E1E"/>
+          </a:solidFill>
+          <a:ln>
+            <a:noFill/>
+          </a:ln>
+          <a:effectLst/>
+        </p:spPr>
+        <p:style>
+          <a:lnRef idx="1">
+            <a:schemeClr val="accent1"/>
+          </a:lnRef>
+          <a:fillRef idx="3">
+            <a:schemeClr val="accent1"/>
+          </a:fillRef>
+          <a:effectRef idx="2">
+            <a:schemeClr val="accent1"/>
+          </a:effectRef>
+          <a:fontRef idx="minor">
+            <a:schemeClr val="lt1"/>
+          </a:fontRef>
+        </p:style>
+        <p:txBody>
+          <a:bodyPr rtlCol="0" anchor="ctr" lIns="0" rIns="0" tIns="0" bIns="0"/>
+          <a:lstStyle/>
+          <a:p>
+            <a:pPr algn="ctr"/>
+            <a:r>
+              <a:rPr sz="1800" b="1">
+                <a:solidFill>
+                  <a:srgbClr val="FFFFFF"/>
+                </a:solidFill>
+                <a:latin typeface="Calibri"/>
+              </a:rPr>
+              <a:t>S</a:t>
+            </a:r>
+          </a:p>
+        </p:txBody>
+      </p:sp>
+      <p:sp>
+        <p:nvSpPr>
+          <p:cNvPr id="14" name="TextBox 13"/>
+          <p:cNvSpPr txBox="1"/>
+          <p:nvPr/>
+        </p:nvSpPr>
+        <p:spPr>
+          <a:xfrm>
+            <a:off x="6766560" y="1389888"/>
+            <a:ext cx="4937760" cy="411480"/>
+          </a:xfrm>
+          <a:prstGeom prst="rect">
+            <a:avLst/>
+          </a:prstGeom>
+          <a:noFill/>
+        </p:spPr>
+        <p:txBody>
+          <a:bodyPr wrap="square">
+            <a:spAutoFit/>
+          </a:bodyPr>
+          <a:lstStyle/>
+          <a:p>
+            <a:pPr algn="l"/>
+            <a:r>
+              <a:rPr sz="1500" b="1">
+                <a:solidFill>
+                  <a:srgbClr val="1A1A1A"/>
+                </a:solidFill>
+                <a:latin typeface="Calibri"/>
+              </a:rPr>
+              <a:t>Servicing &amp; R&amp;M</a:t>
+            </a:r>
+          </a:p>
+        </p:txBody>
+      </p:sp>
+      <p:sp>
+        <p:nvSpPr>
+          <p:cNvPr id="15" name="TextBox 14"/>
+          <p:cNvSpPr txBox="1"/>
+          <p:nvPr/>
+        </p:nvSpPr>
+        <p:spPr>
+          <a:xfrm>
+            <a:off x="6236208" y="1965960"/>
+            <a:ext cx="5394960" cy="3108960"/>
+          </a:xfrm>
+          <a:prstGeom prst="rect">
+            <a:avLst/>
+          </a:prstGeom>
+          <a:noFill/>
+        </p:spPr>
+        <p:txBody>
+          <a:bodyPr wrap="square">
+            <a:spAutoFit/>
+          </a:bodyPr>
+          <a:lstStyle/>
+          <a:p>
+            <a:pPr>
+              <a:lnSpc>
+                <a:spcPct val="115000"/>
+              </a:lnSpc>
+              <a:spcAft>
+                <a:spcPts val="1000"/>
+              </a:spcAft>
+            </a:pPr>
+            <a:r>
+              <a:rPr sz="1250" b="1">
+                <a:solidFill>
+                  <a:srgbClr val="CC0E1E"/>
+                </a:solidFill>
+                <a:latin typeface="Calibri"/>
+              </a:rPr>
+              <a:t>—  </a:t>
+            </a:r>
+            <a:r>
+              <a:rPr sz="1250">
+                <a:solidFill>
+                  <a:srgbClr val="1A1A1A"/>
+                </a:solidFill>
+                <a:latin typeface="Calibri"/>
+              </a:rPr>
+              <a:t>Do you offer an R&amp;M or service-plan product today?</a:t>
+            </a:r>
+          </a:p>
+          <a:p>
+            <a:pPr>
+              <a:lnSpc>
+                <a:spcPct val="115000"/>
+              </a:lnSpc>
+              <a:spcAft>
+                <a:spcPts val="1000"/>
+              </a:spcAft>
+            </a:pPr>
+            <a:r>
+              <a:rPr sz="1250" b="1">
+                <a:solidFill>
+                  <a:srgbClr val="CC0E1E"/>
+                </a:solidFill>
+                <a:latin typeface="Calibri"/>
+              </a:rPr>
+              <a:t>—  </a:t>
+            </a:r>
+            <a:r>
+              <a:rPr sz="1250">
+                <a:solidFill>
+                  <a:srgbClr val="1A1A1A"/>
+                </a:solidFill>
+                <a:latin typeface="Calibri"/>
+              </a:rPr>
+              <a:t>What share of the parc do you retain for servicing after year three?</a:t>
+            </a:r>
+          </a:p>
+          <a:p>
+            <a:pPr>
+              <a:lnSpc>
+                <a:spcPct val="115000"/>
+              </a:lnSpc>
+              <a:spcAft>
+                <a:spcPts val="1000"/>
+              </a:spcAft>
+            </a:pPr>
+            <a:r>
+              <a:rPr sz="1250" b="1">
+                <a:solidFill>
+                  <a:srgbClr val="CC0E1E"/>
+                </a:solidFill>
+                <a:latin typeface="Calibri"/>
+              </a:rPr>
+              <a:t>—  </a:t>
+            </a:r>
+            <a:r>
+              <a:rPr sz="1250">
+                <a:solidFill>
+                  <a:srgbClr val="1A1A1A"/>
+                </a:solidFill>
+                <a:latin typeface="Calibri"/>
+              </a:rPr>
+              <a:t>Does R&amp;M business come bundled with fleet tenders — roughly what share?</a:t>
+            </a:r>
+          </a:p>
+          <a:p>
+            <a:pPr>
+              <a:lnSpc>
+                <a:spcPct val="115000"/>
+              </a:lnSpc>
+              <a:spcAft>
+                <a:spcPts val="1000"/>
+              </a:spcAft>
+            </a:pPr>
+            <a:r>
+              <a:rPr sz="1250" b="1">
+                <a:solidFill>
+                  <a:srgbClr val="CC0E1E"/>
+                </a:solidFill>
+                <a:latin typeface="Calibri"/>
+              </a:rPr>
+              <a:t>—  </a:t>
+            </a:r>
+            <a:r>
+              <a:rPr sz="1250">
+                <a:solidFill>
+                  <a:srgbClr val="1A1A1A"/>
+                </a:solidFill>
+                <a:latin typeface="Calibri"/>
+              </a:rPr>
+              <a:t>What would it take to bring more out-of-network servicing back?</a:t>
             </a:r>
           </a:p>
         </p:txBody>
@@ -6357,7 +7372,7 @@
                 </a:solidFill>
                 <a:latin typeface="Calibri"/>
               </a:rPr>
-              <a:t>SPA</a:t>
+              <a:t>ASK</a:t>
             </a:r>
           </a:p>
         </p:txBody>
@@ -6392,7 +7407,7 @@
                 </a:solidFill>
                 <a:latin typeface="Calibri"/>
               </a:rPr>
-              <a:t>SPA</a:t>
+              <a:t>Part-level Sales-to-Dealer Data</a:t>
             </a:r>
           </a:p>
         </p:txBody>
@@ -6484,7 +7499,7 @@
         <p:spPr>
           <a:xfrm>
             <a:off x="292608" y="1234440"/>
-            <a:ext cx="2798064" cy="3108960"/>
+            <a:ext cx="3611880" cy="2377440"/>
           </a:xfrm>
           <a:prstGeom prst="roundRect">
             <a:avLst>
@@ -6583,7 +7598,7 @@
         <p:spPr>
           <a:xfrm>
             <a:off x="1115568" y="1435608"/>
-            <a:ext cx="1792224" cy="411480"/>
+            <a:ext cx="2606040" cy="411480"/>
           </a:xfrm>
           <a:prstGeom prst="rect">
             <a:avLst/>
@@ -6604,7 +7619,7 @@
                 </a:solidFill>
                 <a:latin typeface="Calibri"/>
               </a:rPr>
-              <a:t>FINLAND proposal</a:t>
+              <a:t>The starting point</a:t>
             </a:r>
           </a:p>
         </p:txBody>
@@ -6618,7 +7633,7 @@
         <p:spPr>
           <a:xfrm>
             <a:off x="585216" y="2011680"/>
-            <a:ext cx="2249424" cy="2194560"/>
+            <a:ext cx="3063240" cy="1463040"/>
           </a:xfrm>
           <a:prstGeom prst="rect">
             <a:avLst/>
@@ -6655,7 +7670,7 @@
                 </a:solidFill>
                 <a:latin typeface="Calibri"/>
               </a:rPr>
-              <a:t>Nordic Automotive Trading submits a proposed parts list.</a:t>
+              <a:t>We have no Sales-to-Dealer figures from you for FY2026. The ask is monthly Sales-to-Dealer, at part-number level.</a:t>
             </a:r>
           </a:p>
         </p:txBody>
@@ -6668,8 +7683,8 @@
         </p:nvSpPr>
         <p:spPr>
           <a:xfrm>
-            <a:off x="3227832" y="1234440"/>
-            <a:ext cx="2798064" cy="3108960"/>
+            <a:off x="4087368" y="1234440"/>
+            <a:ext cx="3611880" cy="2377440"/>
           </a:xfrm>
           <a:prstGeom prst="roundRect">
             <a:avLst>
@@ -6714,7 +7729,7 @@
         </p:nvSpPr>
         <p:spPr>
           <a:xfrm>
-            <a:off x="3429000" y="1435608"/>
+            <a:off x="4288536" y="1435608"/>
             <a:ext cx="457200" cy="457200"/>
           </a:xfrm>
           <a:prstGeom prst="ellipse">
@@ -6767,8 +7782,8 @@
         </p:nvSpPr>
         <p:spPr>
           <a:xfrm>
-            <a:off x="4050792" y="1435608"/>
-            <a:ext cx="1792224" cy="411480"/>
+            <a:off x="4910328" y="1435608"/>
+            <a:ext cx="2606040" cy="411480"/>
           </a:xfrm>
           <a:prstGeom prst="rect">
             <a:avLst/>
@@ -6789,7 +7804,7 @@
                 </a:solidFill>
                 <a:latin typeface="Calibri"/>
               </a:rPr>
-              <a:t>ISZE review</a:t>
+              <a:t>Sharper insight</a:t>
             </a:r>
           </a:p>
         </p:txBody>
@@ -6802,8 +7817,8 @@
         </p:nvSpPr>
         <p:spPr>
           <a:xfrm>
-            <a:off x="3520440" y="2011680"/>
-            <a:ext cx="2249424" cy="2194560"/>
+            <a:off x="4379976" y="2011680"/>
+            <a:ext cx="3063240" cy="1463040"/>
           </a:xfrm>
           <a:prstGeom prst="rect">
             <a:avLst/>
@@ -6840,7 +7855,7 @@
                 </a:solidFill>
                 <a:latin typeface="Calibri"/>
               </a:rPr>
-              <a:t>ISZE reviews the proposal against network data and fit.</a:t>
+              <a:t>Part-by-part visibility separates a stock movement from a lost job — and tells us where the volume actually went.</a:t>
             </a:r>
           </a:p>
         </p:txBody>
@@ -6853,8 +7868,8 @@
         </p:nvSpPr>
         <p:spPr>
           <a:xfrm>
-            <a:off x="6163056" y="1234440"/>
-            <a:ext cx="2798064" cy="3108960"/>
+            <a:off x="7882127" y="1234440"/>
+            <a:ext cx="3611880" cy="2377440"/>
           </a:xfrm>
           <a:prstGeom prst="roundRect">
             <a:avLst>
@@ -6899,7 +7914,7 @@
         </p:nvSpPr>
         <p:spPr>
           <a:xfrm>
-            <a:off x="6364224" y="1435608"/>
+            <a:off x="8083295" y="1435608"/>
             <a:ext cx="457200" cy="457200"/>
           </a:xfrm>
           <a:prstGeom prst="ellipse">
@@ -6952,8 +7967,8 @@
         </p:nvSpPr>
         <p:spPr>
           <a:xfrm>
-            <a:off x="6986016" y="1435608"/>
-            <a:ext cx="1792224" cy="411480"/>
+            <a:off x="8705087" y="1435608"/>
+            <a:ext cx="2606040" cy="411480"/>
           </a:xfrm>
           <a:prstGeom prst="rect">
             <a:avLst/>
@@ -6974,7 +7989,7 @@
                 </a:solidFill>
                 <a:latin typeface="Calibri"/>
               </a:rPr>
-              <a:t>Counter-proposal</a:t>
+              <a:t>Shared benefit</a:t>
             </a:r>
           </a:p>
         </p:txBody>
@@ -6987,8 +8002,8 @@
         </p:nvSpPr>
         <p:spPr>
           <a:xfrm>
-            <a:off x="6455664" y="2011680"/>
-            <a:ext cx="2249424" cy="2194560"/>
+            <a:off x="8174735" y="2011680"/>
+            <a:ext cx="3063240" cy="1463040"/>
           </a:xfrm>
           <a:prstGeom prst="rect">
             <a:avLst/>
@@ -7025,120 +8040,21 @@
                 </a:solidFill>
                 <a:latin typeface="Calibri"/>
               </a:rPr>
-              <a:t>ISZE returns a counter-proposal where needed.</a:t>
-            </a:r>
-          </a:p>
-        </p:txBody>
-      </p:sp>
-      <p:sp>
-        <p:nvSpPr>
-          <p:cNvPr id="20" name="Rounded Rectangle 19"/>
-          <p:cNvSpPr/>
-          <p:nvPr/>
-        </p:nvSpPr>
-        <p:spPr>
-          <a:xfrm>
-            <a:off x="9098280" y="1234440"/>
-            <a:ext cx="2798064" cy="3108960"/>
-          </a:xfrm>
-          <a:prstGeom prst="roundRect">
-            <a:avLst>
-              <a:gd name="adj" fmla="val 6000"/>
-            </a:avLst>
-          </a:prstGeom>
-          <a:solidFill>
-            <a:srgbClr val="ECECEC"/>
-          </a:solidFill>
-          <a:ln>
-            <a:noFill/>
-          </a:ln>
-          <a:effectLst/>
-        </p:spPr>
-        <p:style>
-          <a:lnRef idx="1">
-            <a:schemeClr val="accent1"/>
-          </a:lnRef>
-          <a:fillRef idx="3">
-            <a:schemeClr val="accent1"/>
-          </a:fillRef>
-          <a:effectRef idx="2">
-            <a:schemeClr val="accent1"/>
-          </a:effectRef>
-          <a:fontRef idx="minor">
-            <a:schemeClr val="lt1"/>
-          </a:fontRef>
-        </p:style>
-        <p:txBody>
-          <a:bodyPr rtlCol="0" anchor="ctr"/>
-          <a:lstStyle/>
-          <a:p>
-            <a:pPr algn="ctr"/>
-          </a:p>
-        </p:txBody>
-      </p:sp>
-      <p:sp>
-        <p:nvSpPr>
-          <p:cNvPr id="21" name="Oval 20"/>
-          <p:cNvSpPr/>
-          <p:nvPr/>
-        </p:nvSpPr>
-        <p:spPr>
-          <a:xfrm>
-            <a:off x="9299448" y="1435608"/>
-            <a:ext cx="457200" cy="457200"/>
-          </a:xfrm>
-          <a:prstGeom prst="ellipse">
-            <a:avLst/>
-          </a:prstGeom>
-          <a:solidFill>
-            <a:srgbClr val="CC0E1E"/>
-          </a:solidFill>
-          <a:ln>
-            <a:noFill/>
-          </a:ln>
-          <a:effectLst/>
-        </p:spPr>
-        <p:style>
-          <a:lnRef idx="1">
-            <a:schemeClr val="accent1"/>
-          </a:lnRef>
-          <a:fillRef idx="3">
-            <a:schemeClr val="accent1"/>
-          </a:fillRef>
-          <a:effectRef idx="2">
-            <a:schemeClr val="accent1"/>
-          </a:effectRef>
-          <a:fontRef idx="minor">
-            <a:schemeClr val="lt1"/>
-          </a:fontRef>
-        </p:style>
-        <p:txBody>
-          <a:bodyPr rtlCol="0" anchor="ctr" lIns="0" rIns="0" tIns="0" bIns="0"/>
-          <a:lstStyle/>
-          <a:p>
-            <a:pPr algn="ctr"/>
-            <a:r>
-              <a:rPr sz="1800" b="1">
-                <a:solidFill>
-                  <a:srgbClr val="FFFFFF"/>
-                </a:solidFill>
-                <a:latin typeface="Calibri"/>
-              </a:rPr>
-              <a:t>4</a:t>
-            </a:r>
-          </a:p>
-        </p:txBody>
-      </p:sp>
-      <p:sp>
-        <p:nvSpPr>
-          <p:cNvPr id="22" name="TextBox 21"/>
+              <a:t>Better availability on your fast movers, a sharper target for us, and a factual basis for the SPA — same data, both sides gain.</a:t>
+            </a:r>
+          </a:p>
+        </p:txBody>
+      </p:sp>
+      <p:sp>
+        <p:nvSpPr>
+          <p:cNvPr id="20" name="TextBox 19"/>
           <p:cNvSpPr txBox="1"/>
           <p:nvPr/>
         </p:nvSpPr>
         <p:spPr>
           <a:xfrm>
-            <a:off x="9921240" y="1435608"/>
-            <a:ext cx="1792224" cy="411480"/>
+            <a:off x="292608" y="3886200"/>
+            <a:ext cx="8595360" cy="365760"/>
           </a:xfrm>
           <a:prstGeom prst="rect">
             <a:avLst/>
@@ -7153,99 +8069,13 @@
           <a:p>
             <a:pPr algn="l"/>
             <a:r>
-              <a:rPr sz="1500" b="1">
-                <a:solidFill>
-                  <a:srgbClr val="1A1A1A"/>
-                </a:solidFill>
-                <a:latin typeface="Calibri"/>
-              </a:rPr>
-              <a:t>Final approval</a:t>
-            </a:r>
-          </a:p>
-        </p:txBody>
-      </p:sp>
-      <p:sp>
-        <p:nvSpPr>
-          <p:cNvPr id="23" name="TextBox 22"/>
-          <p:cNvSpPr txBox="1"/>
-          <p:nvPr/>
-        </p:nvSpPr>
-        <p:spPr>
-          <a:xfrm>
-            <a:off x="9390888" y="2011680"/>
-            <a:ext cx="2249424" cy="2194560"/>
-          </a:xfrm>
-          <a:prstGeom prst="rect">
-            <a:avLst/>
-          </a:prstGeom>
-          <a:noFill/>
-        </p:spPr>
-        <p:txBody>
-          <a:bodyPr wrap="square">
-            <a:spAutoFit/>
-          </a:bodyPr>
-          <a:lstStyle/>
-          <a:p>
-            <a:pPr>
-              <a:lnSpc>
-                <a:spcPct val="115000"/>
-              </a:lnSpc>
-              <a:spcAft>
-                <a:spcPts val="1000"/>
-              </a:spcAft>
-            </a:pPr>
-            <a:r>
-              <a:rPr sz="1250" b="1">
+              <a:rPr sz="1400" b="1">
                 <a:solidFill>
                   <a:srgbClr val="CC0E1E"/>
                 </a:solidFill>
                 <a:latin typeface="Calibri"/>
               </a:rPr>
-              <a:t>—  </a:t>
-            </a:r>
-            <a:r>
-              <a:rPr sz="1250">
-                <a:solidFill>
-                  <a:srgbClr val="1A1A1A"/>
-                </a:solidFill>
-                <a:latin typeface="Calibri"/>
-              </a:rPr>
-              <a:t>Signed off by ISZE management.</a:t>
-            </a:r>
-          </a:p>
-        </p:txBody>
-      </p:sp>
-      <p:sp>
-        <p:nvSpPr>
-          <p:cNvPr id="24" name="TextBox 23"/>
-          <p:cNvSpPr txBox="1"/>
-          <p:nvPr/>
-        </p:nvSpPr>
-        <p:spPr>
-          <a:xfrm>
-            <a:off x="292608" y="4572000"/>
-            <a:ext cx="8595360" cy="365760"/>
-          </a:xfrm>
-          <a:prstGeom prst="rect">
-            <a:avLst/>
-          </a:prstGeom>
-          <a:noFill/>
-        </p:spPr>
-        <p:txBody>
-          <a:bodyPr wrap="square">
-            <a:spAutoFit/>
-          </a:bodyPr>
-          <a:lstStyle/>
-          <a:p>
-            <a:pPr algn="l"/>
-            <a:r>
-              <a:rPr sz="1400" b="1">
-                <a:solidFill>
-                  <a:srgbClr val="CC0E1E"/>
-                </a:solidFill>
-                <a:latin typeface="Calibri"/>
-              </a:rPr>
-              <a:t>Purpose: higher turnover for both sides.</a:t>
+              <a:t>Requested from 01/01/2025, part number level, monthly.</a:t>
             </a:r>
           </a:p>
         </p:txBody>
@@ -7373,7 +8203,7 @@
                 </a:solidFill>
                 <a:latin typeface="Calibri"/>
               </a:rPr>
-              <a:t>R&amp;M</a:t>
+              <a:t>SUMMARY</a:t>
             </a:r>
           </a:p>
         </p:txBody>
@@ -7408,7 +8238,7 @@
                 </a:solidFill>
                 <a:latin typeface="Calibri"/>
               </a:rPr>
-              <a:t>R&amp;M — let's align on the market</a:t>
+              <a:t>Next steps</a:t>
             </a:r>
           </a:p>
         </p:txBody>
@@ -7493,113 +8323,14 @@
       </p:sp>
       <p:sp>
         <p:nvSpPr>
-          <p:cNvPr id="8" name="Rounded Rectangle 7"/>
-          <p:cNvSpPr/>
-          <p:nvPr/>
-        </p:nvSpPr>
-        <p:spPr>
-          <a:xfrm>
-            <a:off x="292608" y="1188720"/>
-            <a:ext cx="5486400" cy="4023360"/>
-          </a:xfrm>
-          <a:prstGeom prst="roundRect">
-            <a:avLst>
-              <a:gd name="adj" fmla="val 6000"/>
-            </a:avLst>
-          </a:prstGeom>
-          <a:solidFill>
-            <a:srgbClr val="ECECEC"/>
-          </a:solidFill>
-          <a:ln>
-            <a:noFill/>
-          </a:ln>
-          <a:effectLst/>
-        </p:spPr>
-        <p:style>
-          <a:lnRef idx="1">
-            <a:schemeClr val="accent1"/>
-          </a:lnRef>
-          <a:fillRef idx="3">
-            <a:schemeClr val="accent1"/>
-          </a:fillRef>
-          <a:effectRef idx="2">
-            <a:schemeClr val="accent1"/>
-          </a:effectRef>
-          <a:fontRef idx="minor">
-            <a:schemeClr val="lt1"/>
-          </a:fontRef>
-        </p:style>
-        <p:txBody>
-          <a:bodyPr rtlCol="0" anchor="ctr"/>
-          <a:lstStyle/>
-          <a:p>
-            <a:pPr algn="ctr"/>
-          </a:p>
-        </p:txBody>
-      </p:sp>
-      <p:sp>
-        <p:nvSpPr>
-          <p:cNvPr id="9" name="Oval 8"/>
-          <p:cNvSpPr/>
-          <p:nvPr/>
-        </p:nvSpPr>
-        <p:spPr>
-          <a:xfrm>
-            <a:off x="493776" y="1389888"/>
-            <a:ext cx="457200" cy="457200"/>
-          </a:xfrm>
-          <a:prstGeom prst="ellipse">
-            <a:avLst/>
-          </a:prstGeom>
-          <a:solidFill>
-            <a:srgbClr val="CC0E1E"/>
-          </a:solidFill>
-          <a:ln>
-            <a:noFill/>
-          </a:ln>
-          <a:effectLst/>
-        </p:spPr>
-        <p:style>
-          <a:lnRef idx="1">
-            <a:schemeClr val="accent1"/>
-          </a:lnRef>
-          <a:fillRef idx="3">
-            <a:schemeClr val="accent1"/>
-          </a:fillRef>
-          <a:effectRef idx="2">
-            <a:schemeClr val="accent1"/>
-          </a:effectRef>
-          <a:fontRef idx="minor">
-            <a:schemeClr val="lt1"/>
-          </a:fontRef>
-        </p:style>
-        <p:txBody>
-          <a:bodyPr rtlCol="0" anchor="ctr" lIns="0" rIns="0" tIns="0" bIns="0"/>
-          <a:lstStyle/>
-          <a:p>
-            <a:pPr algn="ctr"/>
-            <a:r>
-              <a:rPr sz="1800" b="1">
-                <a:solidFill>
-                  <a:srgbClr val="FFFFFF"/>
-                </a:solidFill>
-                <a:latin typeface="Calibri"/>
-              </a:rPr>
-              <a:t>M</a:t>
-            </a:r>
-          </a:p>
-        </p:txBody>
-      </p:sp>
-      <p:sp>
-        <p:nvSpPr>
-          <p:cNvPr id="10" name="TextBox 9"/>
+          <p:cNvPr id="8" name="TextBox 7"/>
           <p:cNvSpPr txBox="1"/>
           <p:nvPr/>
         </p:nvSpPr>
         <p:spPr>
           <a:xfrm>
-            <a:off x="1115568" y="1389888"/>
-            <a:ext cx="4480560" cy="411480"/>
+            <a:off x="292608" y="1234440"/>
+            <a:ext cx="11612880" cy="4206240"/>
           </a:xfrm>
           <a:prstGeom prst="rect">
             <a:avLst/>
@@ -7612,51 +8343,16 @@
           </a:bodyPr>
           <a:lstStyle/>
           <a:p>
-            <a:pPr algn="l"/>
-            <a:r>
-              <a:rPr sz="1500" b="1">
-                <a:solidFill>
-                  <a:srgbClr val="1A1A1A"/>
-                </a:solidFill>
-                <a:latin typeface="Calibri"/>
-              </a:rPr>
-              <a:t>Market</a:t>
-            </a:r>
-          </a:p>
-        </p:txBody>
-      </p:sp>
-      <p:sp>
-        <p:nvSpPr>
-          <p:cNvPr id="11" name="TextBox 10"/>
-          <p:cNvSpPr txBox="1"/>
-          <p:nvPr/>
-        </p:nvSpPr>
-        <p:spPr>
-          <a:xfrm>
-            <a:off x="585216" y="1965960"/>
-            <a:ext cx="4937760" cy="3108960"/>
-          </a:xfrm>
-          <a:prstGeom prst="rect">
-            <a:avLst/>
-          </a:prstGeom>
-          <a:noFill/>
-        </p:spPr>
-        <p:txBody>
-          <a:bodyPr wrap="square">
-            <a:spAutoFit/>
-          </a:bodyPr>
-          <a:lstStyle/>
-          <a:p>
             <a:pPr>
               <a:lnSpc>
-                <a:spcPct val="115000"/>
+                <a:spcPct val="125000"/>
               </a:lnSpc>
               <a:spcAft>
                 <a:spcPts val="1000"/>
               </a:spcAft>
             </a:pPr>
             <a:r>
-              <a:rPr sz="1250" b="1">
+              <a:rPr sz="1500" b="1">
                 <a:solidFill>
                   <a:srgbClr val="CC0E1E"/>
                 </a:solidFill>
@@ -7665,26 +8361,26 @@
               <a:t>—  </a:t>
             </a:r>
             <a:r>
-              <a:rPr sz="1250">
+              <a:rPr sz="1500">
                 <a:solidFill>
                   <a:srgbClr val="1A1A1A"/>
                 </a:solidFill>
                 <a:latin typeface="Calibri"/>
               </a:rPr>
-              <a:t>How is the market moving for you right now?</a:t>
+              <a:t>Confirm FY2027 extended target: EUR 365,728 (V3.1 Dashboard column I, +1.8% stretch).</a:t>
             </a:r>
           </a:p>
           <a:p>
             <a:pPr>
               <a:lnSpc>
-                <a:spcPct val="115000"/>
+                <a:spcPct val="125000"/>
               </a:lnSpc>
               <a:spcAft>
                 <a:spcPts val="1000"/>
               </a:spcAft>
             </a:pPr>
             <a:r>
-              <a:rPr sz="1250" b="1">
+              <a:rPr sz="1500" b="1">
                 <a:solidFill>
                   <a:srgbClr val="CC0E1E"/>
                 </a:solidFill>
@@ -7693,26 +8389,26 @@
               <a:t>—  </a:t>
             </a:r>
             <a:r>
-              <a:rPr sz="1250">
+              <a:rPr sz="1500">
                 <a:solidFill>
                   <a:srgbClr val="1A1A1A"/>
                 </a:solidFill>
                 <a:latin typeface="Calibri"/>
               </a:rPr>
-              <a:t>How much of your volume is fleet business rather than retail?</a:t>
+              <a:t>Confirm the incentive alongside the price adjustment once approved on our side.</a:t>
             </a:r>
           </a:p>
           <a:p>
             <a:pPr>
               <a:lnSpc>
-                <a:spcPct val="115000"/>
+                <a:spcPct val="125000"/>
               </a:lnSpc>
               <a:spcAft>
                 <a:spcPts val="1000"/>
               </a:spcAft>
             </a:pPr>
             <a:r>
-              <a:rPr sz="1250" b="1">
+              <a:rPr sz="1500" b="1">
                 <a:solidFill>
                   <a:srgbClr val="CC0E1E"/>
                 </a:solidFill>
@@ -7721,26 +8417,26 @@
               <a:t>—  </a:t>
             </a:r>
             <a:r>
-              <a:rPr sz="1250">
+              <a:rPr sz="1500">
                 <a:solidFill>
                   <a:srgbClr val="1A1A1A"/>
                 </a:solidFill>
                 <a:latin typeface="Calibri"/>
               </a:rPr>
-              <a:t>Where do you see the biggest hurdles this year?</a:t>
+              <a:t>Exhaust / Transmission parts / Brake parts: agree which category we tackle first, and what the joint action is.</a:t>
             </a:r>
           </a:p>
           <a:p>
             <a:pPr>
               <a:lnSpc>
-                <a:spcPct val="115000"/>
+                <a:spcPct val="125000"/>
               </a:lnSpc>
               <a:spcAft>
                 <a:spcPts val="1000"/>
               </a:spcAft>
             </a:pPr>
             <a:r>
-              <a:rPr sz="1250" b="1">
+              <a:rPr sz="1500" b="1">
                 <a:solidFill>
                   <a:srgbClr val="CC0E1E"/>
                 </a:solidFill>
@@ -7749,183 +8445,26 @@
               <a:t>—  </a:t>
             </a:r>
             <a:r>
-              <a:rPr sz="1250">
+              <a:rPr sz="1500">
                 <a:solidFill>
                   <a:srgbClr val="1A1A1A"/>
                 </a:solidFill>
                 <a:latin typeface="Calibri"/>
               </a:rPr>
-              <a:t>Where are your real strengths in this segment?</a:t>
-            </a:r>
-          </a:p>
-        </p:txBody>
-      </p:sp>
-      <p:sp>
-        <p:nvSpPr>
-          <p:cNvPr id="12" name="Rounded Rectangle 11"/>
-          <p:cNvSpPr/>
-          <p:nvPr/>
-        </p:nvSpPr>
-        <p:spPr>
-          <a:xfrm>
-            <a:off x="5943600" y="1188720"/>
-            <a:ext cx="5943600" cy="4023360"/>
-          </a:xfrm>
-          <a:prstGeom prst="roundRect">
-            <a:avLst>
-              <a:gd name="adj" fmla="val 6000"/>
-            </a:avLst>
-          </a:prstGeom>
-          <a:solidFill>
-            <a:srgbClr val="ECECEC"/>
-          </a:solidFill>
-          <a:ln>
-            <a:noFill/>
-          </a:ln>
-          <a:effectLst/>
-        </p:spPr>
-        <p:style>
-          <a:lnRef idx="1">
-            <a:schemeClr val="accent1"/>
-          </a:lnRef>
-          <a:fillRef idx="3">
-            <a:schemeClr val="accent1"/>
-          </a:fillRef>
-          <a:effectRef idx="2">
-            <a:schemeClr val="accent1"/>
-          </a:effectRef>
-          <a:fontRef idx="minor">
-            <a:schemeClr val="lt1"/>
-          </a:fontRef>
-        </p:style>
-        <p:txBody>
-          <a:bodyPr rtlCol="0" anchor="ctr"/>
-          <a:lstStyle/>
-          <a:p>
-            <a:pPr algn="ctr"/>
-          </a:p>
-        </p:txBody>
-      </p:sp>
-      <p:sp>
-        <p:nvSpPr>
-          <p:cNvPr id="13" name="Oval 12"/>
-          <p:cNvSpPr/>
-          <p:nvPr/>
-        </p:nvSpPr>
-        <p:spPr>
-          <a:xfrm>
-            <a:off x="6144768" y="1389888"/>
-            <a:ext cx="457200" cy="457200"/>
-          </a:xfrm>
-          <a:prstGeom prst="ellipse">
-            <a:avLst/>
-          </a:prstGeom>
-          <a:solidFill>
-            <a:srgbClr val="CC0E1E"/>
-          </a:solidFill>
-          <a:ln>
-            <a:noFill/>
-          </a:ln>
-          <a:effectLst/>
-        </p:spPr>
-        <p:style>
-          <a:lnRef idx="1">
-            <a:schemeClr val="accent1"/>
-          </a:lnRef>
-          <a:fillRef idx="3">
-            <a:schemeClr val="accent1"/>
-          </a:fillRef>
-          <a:effectRef idx="2">
-            <a:schemeClr val="accent1"/>
-          </a:effectRef>
-          <a:fontRef idx="minor">
-            <a:schemeClr val="lt1"/>
-          </a:fontRef>
-        </p:style>
-        <p:txBody>
-          <a:bodyPr rtlCol="0" anchor="ctr" lIns="0" rIns="0" tIns="0" bIns="0"/>
-          <a:lstStyle/>
-          <a:p>
-            <a:pPr algn="ctr"/>
-            <a:r>
-              <a:rPr sz="1800" b="1">
-                <a:solidFill>
-                  <a:srgbClr val="FFFFFF"/>
-                </a:solidFill>
-                <a:latin typeface="Calibri"/>
-              </a:rPr>
-              <a:t>S</a:t>
-            </a:r>
-          </a:p>
-        </p:txBody>
-      </p:sp>
-      <p:sp>
-        <p:nvSpPr>
-          <p:cNvPr id="14" name="TextBox 13"/>
-          <p:cNvSpPr txBox="1"/>
-          <p:nvPr/>
-        </p:nvSpPr>
-        <p:spPr>
-          <a:xfrm>
-            <a:off x="6766560" y="1389888"/>
-            <a:ext cx="4937760" cy="411480"/>
-          </a:xfrm>
-          <a:prstGeom prst="rect">
-            <a:avLst/>
-          </a:prstGeom>
-          <a:noFill/>
-        </p:spPr>
-        <p:txBody>
-          <a:bodyPr wrap="square">
-            <a:spAutoFit/>
-          </a:bodyPr>
-          <a:lstStyle/>
-          <a:p>
-            <a:pPr algn="l"/>
-            <a:r>
-              <a:rPr sz="1500" b="1">
-                <a:solidFill>
-                  <a:srgbClr val="1A1A1A"/>
-                </a:solidFill>
-                <a:latin typeface="Calibri"/>
-              </a:rPr>
-              <a:t>Servicing &amp; R&amp;M</a:t>
-            </a:r>
-          </a:p>
-        </p:txBody>
-      </p:sp>
-      <p:sp>
-        <p:nvSpPr>
-          <p:cNvPr id="15" name="TextBox 14"/>
-          <p:cNvSpPr txBox="1"/>
-          <p:nvPr/>
-        </p:nvSpPr>
-        <p:spPr>
-          <a:xfrm>
-            <a:off x="6236208" y="1965960"/>
-            <a:ext cx="5394960" cy="3108960"/>
-          </a:xfrm>
-          <a:prstGeom prst="rect">
-            <a:avLst/>
-          </a:prstGeom>
-          <a:noFill/>
-        </p:spPr>
-        <p:txBody>
-          <a:bodyPr wrap="square">
-            <a:spAutoFit/>
-          </a:bodyPr>
-          <a:lstStyle/>
+              <a:t>Agree part-level Sales-to-Dealer data sharing, effective 01/01/2025.</a:t>
+            </a:r>
+          </a:p>
           <a:p>
             <a:pPr>
               <a:lnSpc>
-                <a:spcPct val="115000"/>
+                <a:spcPct val="125000"/>
               </a:lnSpc>
               <a:spcAft>
                 <a:spcPts val="1000"/>
               </a:spcAft>
             </a:pPr>
             <a:r>
-              <a:rPr sz="1250" b="1">
+              <a:rPr sz="1500" b="1">
                 <a:solidFill>
                   <a:srgbClr val="CC0E1E"/>
                 </a:solidFill>
@@ -7934,97 +8473,13 @@
               <a:t>—  </a:t>
             </a:r>
             <a:r>
-              <a:rPr sz="1250">
+              <a:rPr sz="1500">
                 <a:solidFill>
                   <a:srgbClr val="1A1A1A"/>
                 </a:solidFill>
                 <a:latin typeface="Calibri"/>
               </a:rPr>
-              <a:t>Do you offer an R&amp;M or service-plan product today?</a:t>
-            </a:r>
-          </a:p>
-          <a:p>
-            <a:pPr>
-              <a:lnSpc>
-                <a:spcPct val="115000"/>
-              </a:lnSpc>
-              <a:spcAft>
-                <a:spcPts val="1000"/>
-              </a:spcAft>
-            </a:pPr>
-            <a:r>
-              <a:rPr sz="1250" b="1">
-                <a:solidFill>
-                  <a:srgbClr val="CC0E1E"/>
-                </a:solidFill>
-                <a:latin typeface="Calibri"/>
-              </a:rPr>
-              <a:t>—  </a:t>
-            </a:r>
-            <a:r>
-              <a:rPr sz="1250">
-                <a:solidFill>
-                  <a:srgbClr val="1A1A1A"/>
-                </a:solidFill>
-                <a:latin typeface="Calibri"/>
-              </a:rPr>
-              <a:t>What share of the parc do you retain for servicing after year three?</a:t>
-            </a:r>
-          </a:p>
-          <a:p>
-            <a:pPr>
-              <a:lnSpc>
-                <a:spcPct val="115000"/>
-              </a:lnSpc>
-              <a:spcAft>
-                <a:spcPts val="1000"/>
-              </a:spcAft>
-            </a:pPr>
-            <a:r>
-              <a:rPr sz="1250" b="1">
-                <a:solidFill>
-                  <a:srgbClr val="CC0E1E"/>
-                </a:solidFill>
-                <a:latin typeface="Calibri"/>
-              </a:rPr>
-              <a:t>—  </a:t>
-            </a:r>
-            <a:r>
-              <a:rPr sz="1250">
-                <a:solidFill>
-                  <a:srgbClr val="1A1A1A"/>
-                </a:solidFill>
-                <a:latin typeface="Calibri"/>
-              </a:rPr>
-              <a:t>Does R&amp;M business come bundled with fleet tenders — roughly what share?</a:t>
-            </a:r>
-          </a:p>
-          <a:p>
-            <a:pPr>
-              <a:lnSpc>
-                <a:spcPct val="115000"/>
-              </a:lnSpc>
-              <a:spcAft>
-                <a:spcPts val="1000"/>
-              </a:spcAft>
-            </a:pPr>
-            <a:r>
-              <a:rPr sz="1250" b="1">
-                <a:solidFill>
-                  <a:srgbClr val="CC0E1E"/>
-                </a:solidFill>
-                <a:latin typeface="Calibri"/>
-              </a:rPr>
-              <a:t>—  </a:t>
-            </a:r>
-            <a:r>
-              <a:rPr sz="1250">
-                <a:solidFill>
-                  <a:srgbClr val="1A1A1A"/>
-                </a:solidFill>
-                <a:latin typeface="Calibri"/>
-              </a:rPr>
-              <a:t>What would it take to bring more out-of-network servicing back?</a:t>
+              <a:t>SPA: FINLAND proposal, ISZE review and counter-proposal cycle to follow.</a:t>
             </a:r>
           </a:p>
         </p:txBody>
@@ -8038,1241 +8493,6 @@
 </file>
 
 <file path=ppt/slides/slide17.xml><?xml version="1.0" encoding="utf-8"?>
-<p:sld xmlns:a="http://schemas.openxmlformats.org/drawingml/2006/main" xmlns:p="http://schemas.openxmlformats.org/presentationml/2006/main" xmlns:r="http://schemas.openxmlformats.org/officeDocument/2006/relationships">
-  <p:cSld>
-    <p:bg>
-      <p:bgPr>
-        <a:solidFill>
-          <a:srgbClr val="FFFFFF"/>
-        </a:solidFill>
-        <a:effectLst/>
-      </p:bgPr>
-    </p:bg>
-    <p:spTree>
-      <p:nvGrpSpPr>
-        <p:cNvPr id="1" name=""/>
-        <p:cNvGrpSpPr/>
-        <p:nvPr/>
-      </p:nvGrpSpPr>
-      <p:grpSpPr/>
-      <p:pic>
-        <p:nvPicPr>
-          <p:cNvPr id="2" name="Picture 1" descr="isuzu_logo_red.png"/>
-          <p:cNvPicPr>
-            <a:picLocks noChangeAspect="1"/>
-          </p:cNvPicPr>
-          <p:nvPr/>
-        </p:nvPicPr>
-        <p:blipFill>
-          <a:blip r:embed="rId2"/>
-          <a:stretch>
-            <a:fillRect/>
-          </a:stretch>
-        </p:blipFill>
-        <p:spPr>
-          <a:xfrm>
-            <a:off x="256032" y="6263640"/>
-            <a:ext cx="1679787" cy="292608"/>
-          </a:xfrm>
-          <a:prstGeom prst="rect">
-            <a:avLst/>
-          </a:prstGeom>
-        </p:spPr>
-      </p:pic>
-      <p:sp>
-        <p:nvSpPr>
-          <p:cNvPr id="3" name="Rectangle 2"/>
-          <p:cNvSpPr/>
-          <p:nvPr/>
-        </p:nvSpPr>
-        <p:spPr>
-          <a:xfrm>
-            <a:off x="0" y="6766560"/>
-            <a:ext cx="12188952" cy="91440"/>
-          </a:xfrm>
-          <a:prstGeom prst="rect">
-            <a:avLst/>
-          </a:prstGeom>
-          <a:solidFill>
-            <a:srgbClr val="CC0E1E"/>
-          </a:solidFill>
-          <a:ln>
-            <a:noFill/>
-          </a:ln>
-        </p:spPr>
-        <p:style>
-          <a:lnRef idx="1">
-            <a:schemeClr val="accent1"/>
-          </a:lnRef>
-          <a:fillRef idx="3">
-            <a:schemeClr val="accent1"/>
-          </a:fillRef>
-          <a:effectRef idx="2">
-            <a:schemeClr val="accent1"/>
-          </a:effectRef>
-          <a:fontRef idx="minor">
-            <a:schemeClr val="lt1"/>
-          </a:fontRef>
-        </p:style>
-        <p:txBody>
-          <a:bodyPr rtlCol="0" anchor="ctr"/>
-          <a:lstStyle/>
-          <a:p>
-            <a:pPr algn="ctr"/>
-          </a:p>
-        </p:txBody>
-      </p:sp>
-      <p:sp>
-        <p:nvSpPr>
-          <p:cNvPr id="4" name="TextBox 3"/>
-          <p:cNvSpPr txBox="1"/>
-          <p:nvPr/>
-        </p:nvSpPr>
-        <p:spPr>
-          <a:xfrm>
-            <a:off x="292608" y="201168"/>
-            <a:ext cx="11430000" cy="274320"/>
-          </a:xfrm>
-          <a:prstGeom prst="rect">
-            <a:avLst/>
-          </a:prstGeom>
-          <a:noFill/>
-        </p:spPr>
-        <p:txBody>
-          <a:bodyPr wrap="square">
-            <a:spAutoFit/>
-          </a:bodyPr>
-          <a:lstStyle/>
-          <a:p>
-            <a:pPr algn="l"/>
-            <a:r>
-              <a:rPr sz="1100" b="1">
-                <a:solidFill>
-                  <a:srgbClr val="CC0E1E"/>
-                </a:solidFill>
-                <a:latin typeface="Calibri"/>
-              </a:rPr>
-              <a:t>ASK</a:t>
-            </a:r>
-          </a:p>
-        </p:txBody>
-      </p:sp>
-      <p:sp>
-        <p:nvSpPr>
-          <p:cNvPr id="5" name="TextBox 4"/>
-          <p:cNvSpPr txBox="1"/>
-          <p:nvPr/>
-        </p:nvSpPr>
-        <p:spPr>
-          <a:xfrm>
-            <a:off x="292608" y="475488"/>
-            <a:ext cx="11612880" cy="566928"/>
-          </a:xfrm>
-          <a:prstGeom prst="rect">
-            <a:avLst/>
-          </a:prstGeom>
-          <a:noFill/>
-        </p:spPr>
-        <p:txBody>
-          <a:bodyPr wrap="square">
-            <a:spAutoFit/>
-          </a:bodyPr>
-          <a:lstStyle/>
-          <a:p>
-            <a:pPr algn="l"/>
-            <a:r>
-              <a:rPr sz="2500" b="1">
-                <a:solidFill>
-                  <a:srgbClr val="1A1A1A"/>
-                </a:solidFill>
-                <a:latin typeface="Calibri"/>
-              </a:rPr>
-              <a:t>Part-level Sales-to-Dealer Data</a:t>
-            </a:r>
-          </a:p>
-        </p:txBody>
-      </p:sp>
-      <p:sp>
-        <p:nvSpPr>
-          <p:cNvPr id="6" name="Rectangle 5"/>
-          <p:cNvSpPr/>
-          <p:nvPr/>
-        </p:nvSpPr>
-        <p:spPr>
-          <a:xfrm>
-            <a:off x="292608" y="1005840"/>
-            <a:ext cx="11612880" cy="28000"/>
-          </a:xfrm>
-          <a:prstGeom prst="rect">
-            <a:avLst/>
-          </a:prstGeom>
-          <a:solidFill>
-            <a:srgbClr val="CC0E1E"/>
-          </a:solidFill>
-          <a:ln>
-            <a:noFill/>
-          </a:ln>
-        </p:spPr>
-        <p:style>
-          <a:lnRef idx="1">
-            <a:schemeClr val="accent1"/>
-          </a:lnRef>
-          <a:fillRef idx="3">
-            <a:schemeClr val="accent1"/>
-          </a:fillRef>
-          <a:effectRef idx="2">
-            <a:schemeClr val="accent1"/>
-          </a:effectRef>
-          <a:fontRef idx="minor">
-            <a:schemeClr val="lt1"/>
-          </a:fontRef>
-        </p:style>
-        <p:txBody>
-          <a:bodyPr rtlCol="0" anchor="ctr"/>
-          <a:lstStyle/>
-          <a:p>
-            <a:pPr algn="ctr"/>
-          </a:p>
-        </p:txBody>
-      </p:sp>
-      <p:sp>
-        <p:nvSpPr>
-          <p:cNvPr id="7" name="TextBox 6"/>
-          <p:cNvSpPr txBox="1"/>
-          <p:nvPr/>
-        </p:nvSpPr>
-        <p:spPr>
-          <a:xfrm>
-            <a:off x="11594592" y="6473952"/>
-            <a:ext cx="365760" cy="274320"/>
-          </a:xfrm>
-          <a:prstGeom prst="rect">
-            <a:avLst/>
-          </a:prstGeom>
-          <a:noFill/>
-        </p:spPr>
-        <p:txBody>
-          <a:bodyPr wrap="square">
-            <a:spAutoFit/>
-          </a:bodyPr>
-          <a:lstStyle/>
-          <a:p>
-            <a:pPr algn="r"/>
-            <a:r>
-              <a:rPr sz="1000" b="0">
-                <a:solidFill>
-                  <a:srgbClr val="5A5A5A"/>
-                </a:solidFill>
-                <a:latin typeface="Calibri"/>
-              </a:rPr>
-              <a:t>17</a:t>
-            </a:r>
-          </a:p>
-        </p:txBody>
-      </p:sp>
-      <p:sp>
-        <p:nvSpPr>
-          <p:cNvPr id="8" name="Rounded Rectangle 7"/>
-          <p:cNvSpPr/>
-          <p:nvPr/>
-        </p:nvSpPr>
-        <p:spPr>
-          <a:xfrm>
-            <a:off x="292608" y="1234440"/>
-            <a:ext cx="3611880" cy="2377440"/>
-          </a:xfrm>
-          <a:prstGeom prst="roundRect">
-            <a:avLst>
-              <a:gd name="adj" fmla="val 6000"/>
-            </a:avLst>
-          </a:prstGeom>
-          <a:solidFill>
-            <a:srgbClr val="ECECEC"/>
-          </a:solidFill>
-          <a:ln>
-            <a:noFill/>
-          </a:ln>
-          <a:effectLst/>
-        </p:spPr>
-        <p:style>
-          <a:lnRef idx="1">
-            <a:schemeClr val="accent1"/>
-          </a:lnRef>
-          <a:fillRef idx="3">
-            <a:schemeClr val="accent1"/>
-          </a:fillRef>
-          <a:effectRef idx="2">
-            <a:schemeClr val="accent1"/>
-          </a:effectRef>
-          <a:fontRef idx="minor">
-            <a:schemeClr val="lt1"/>
-          </a:fontRef>
-        </p:style>
-        <p:txBody>
-          <a:bodyPr rtlCol="0" anchor="ctr"/>
-          <a:lstStyle/>
-          <a:p>
-            <a:pPr algn="ctr"/>
-          </a:p>
-        </p:txBody>
-      </p:sp>
-      <p:sp>
-        <p:nvSpPr>
-          <p:cNvPr id="9" name="Oval 8"/>
-          <p:cNvSpPr/>
-          <p:nvPr/>
-        </p:nvSpPr>
-        <p:spPr>
-          <a:xfrm>
-            <a:off x="493776" y="1435608"/>
-            <a:ext cx="457200" cy="457200"/>
-          </a:xfrm>
-          <a:prstGeom prst="ellipse">
-            <a:avLst/>
-          </a:prstGeom>
-          <a:solidFill>
-            <a:srgbClr val="CC0E1E"/>
-          </a:solidFill>
-          <a:ln>
-            <a:noFill/>
-          </a:ln>
-          <a:effectLst/>
-        </p:spPr>
-        <p:style>
-          <a:lnRef idx="1">
-            <a:schemeClr val="accent1"/>
-          </a:lnRef>
-          <a:fillRef idx="3">
-            <a:schemeClr val="accent1"/>
-          </a:fillRef>
-          <a:effectRef idx="2">
-            <a:schemeClr val="accent1"/>
-          </a:effectRef>
-          <a:fontRef idx="minor">
-            <a:schemeClr val="lt1"/>
-          </a:fontRef>
-        </p:style>
-        <p:txBody>
-          <a:bodyPr rtlCol="0" anchor="ctr" lIns="0" rIns="0" tIns="0" bIns="0"/>
-          <a:lstStyle/>
-          <a:p>
-            <a:pPr algn="ctr"/>
-            <a:r>
-              <a:rPr sz="1800" b="1">
-                <a:solidFill>
-                  <a:srgbClr val="FFFFFF"/>
-                </a:solidFill>
-                <a:latin typeface="Calibri"/>
-              </a:rPr>
-              <a:t>1</a:t>
-            </a:r>
-          </a:p>
-        </p:txBody>
-      </p:sp>
-      <p:sp>
-        <p:nvSpPr>
-          <p:cNvPr id="10" name="TextBox 9"/>
-          <p:cNvSpPr txBox="1"/>
-          <p:nvPr/>
-        </p:nvSpPr>
-        <p:spPr>
-          <a:xfrm>
-            <a:off x="1115568" y="1435608"/>
-            <a:ext cx="2606040" cy="411480"/>
-          </a:xfrm>
-          <a:prstGeom prst="rect">
-            <a:avLst/>
-          </a:prstGeom>
-          <a:noFill/>
-        </p:spPr>
-        <p:txBody>
-          <a:bodyPr wrap="square">
-            <a:spAutoFit/>
-          </a:bodyPr>
-          <a:lstStyle/>
-          <a:p>
-            <a:pPr algn="l"/>
-            <a:r>
-              <a:rPr sz="1500" b="1">
-                <a:solidFill>
-                  <a:srgbClr val="1A1A1A"/>
-                </a:solidFill>
-                <a:latin typeface="Calibri"/>
-              </a:rPr>
-              <a:t>The starting point</a:t>
-            </a:r>
-          </a:p>
-        </p:txBody>
-      </p:sp>
-      <p:sp>
-        <p:nvSpPr>
-          <p:cNvPr id="11" name="TextBox 10"/>
-          <p:cNvSpPr txBox="1"/>
-          <p:nvPr/>
-        </p:nvSpPr>
-        <p:spPr>
-          <a:xfrm>
-            <a:off x="585216" y="2011680"/>
-            <a:ext cx="3063240" cy="1463040"/>
-          </a:xfrm>
-          <a:prstGeom prst="rect">
-            <a:avLst/>
-          </a:prstGeom>
-          <a:noFill/>
-        </p:spPr>
-        <p:txBody>
-          <a:bodyPr wrap="square">
-            <a:spAutoFit/>
-          </a:bodyPr>
-          <a:lstStyle/>
-          <a:p>
-            <a:pPr>
-              <a:lnSpc>
-                <a:spcPct val="115000"/>
-              </a:lnSpc>
-              <a:spcAft>
-                <a:spcPts val="1000"/>
-              </a:spcAft>
-            </a:pPr>
-            <a:r>
-              <a:rPr sz="1250" b="1">
-                <a:solidFill>
-                  <a:srgbClr val="CC0E1E"/>
-                </a:solidFill>
-                <a:latin typeface="Calibri"/>
-              </a:rPr>
-              <a:t>—  </a:t>
-            </a:r>
-            <a:r>
-              <a:rPr sz="1250">
-                <a:solidFill>
-                  <a:srgbClr val="1A1A1A"/>
-                </a:solidFill>
-                <a:latin typeface="Calibri"/>
-              </a:rPr>
-              <a:t>We have no Sales-to-Dealer figures from you for FY2026. The ask is monthly Sales-to-Dealer, at part-number level.</a:t>
-            </a:r>
-          </a:p>
-        </p:txBody>
-      </p:sp>
-      <p:sp>
-        <p:nvSpPr>
-          <p:cNvPr id="12" name="Rounded Rectangle 11"/>
-          <p:cNvSpPr/>
-          <p:nvPr/>
-        </p:nvSpPr>
-        <p:spPr>
-          <a:xfrm>
-            <a:off x="4087368" y="1234440"/>
-            <a:ext cx="3611880" cy="2377440"/>
-          </a:xfrm>
-          <a:prstGeom prst="roundRect">
-            <a:avLst>
-              <a:gd name="adj" fmla="val 6000"/>
-            </a:avLst>
-          </a:prstGeom>
-          <a:solidFill>
-            <a:srgbClr val="ECECEC"/>
-          </a:solidFill>
-          <a:ln>
-            <a:noFill/>
-          </a:ln>
-          <a:effectLst/>
-        </p:spPr>
-        <p:style>
-          <a:lnRef idx="1">
-            <a:schemeClr val="accent1"/>
-          </a:lnRef>
-          <a:fillRef idx="3">
-            <a:schemeClr val="accent1"/>
-          </a:fillRef>
-          <a:effectRef idx="2">
-            <a:schemeClr val="accent1"/>
-          </a:effectRef>
-          <a:fontRef idx="minor">
-            <a:schemeClr val="lt1"/>
-          </a:fontRef>
-        </p:style>
-        <p:txBody>
-          <a:bodyPr rtlCol="0" anchor="ctr"/>
-          <a:lstStyle/>
-          <a:p>
-            <a:pPr algn="ctr"/>
-          </a:p>
-        </p:txBody>
-      </p:sp>
-      <p:sp>
-        <p:nvSpPr>
-          <p:cNvPr id="13" name="Oval 12"/>
-          <p:cNvSpPr/>
-          <p:nvPr/>
-        </p:nvSpPr>
-        <p:spPr>
-          <a:xfrm>
-            <a:off x="4288536" y="1435608"/>
-            <a:ext cx="457200" cy="457200"/>
-          </a:xfrm>
-          <a:prstGeom prst="ellipse">
-            <a:avLst/>
-          </a:prstGeom>
-          <a:solidFill>
-            <a:srgbClr val="CC0E1E"/>
-          </a:solidFill>
-          <a:ln>
-            <a:noFill/>
-          </a:ln>
-          <a:effectLst/>
-        </p:spPr>
-        <p:style>
-          <a:lnRef idx="1">
-            <a:schemeClr val="accent1"/>
-          </a:lnRef>
-          <a:fillRef idx="3">
-            <a:schemeClr val="accent1"/>
-          </a:fillRef>
-          <a:effectRef idx="2">
-            <a:schemeClr val="accent1"/>
-          </a:effectRef>
-          <a:fontRef idx="minor">
-            <a:schemeClr val="lt1"/>
-          </a:fontRef>
-        </p:style>
-        <p:txBody>
-          <a:bodyPr rtlCol="0" anchor="ctr" lIns="0" rIns="0" tIns="0" bIns="0"/>
-          <a:lstStyle/>
-          <a:p>
-            <a:pPr algn="ctr"/>
-            <a:r>
-              <a:rPr sz="1800" b="1">
-                <a:solidFill>
-                  <a:srgbClr val="FFFFFF"/>
-                </a:solidFill>
-                <a:latin typeface="Calibri"/>
-              </a:rPr>
-              <a:t>2</a:t>
-            </a:r>
-          </a:p>
-        </p:txBody>
-      </p:sp>
-      <p:sp>
-        <p:nvSpPr>
-          <p:cNvPr id="14" name="TextBox 13"/>
-          <p:cNvSpPr txBox="1"/>
-          <p:nvPr/>
-        </p:nvSpPr>
-        <p:spPr>
-          <a:xfrm>
-            <a:off x="4910328" y="1435608"/>
-            <a:ext cx="2606040" cy="411480"/>
-          </a:xfrm>
-          <a:prstGeom prst="rect">
-            <a:avLst/>
-          </a:prstGeom>
-          <a:noFill/>
-        </p:spPr>
-        <p:txBody>
-          <a:bodyPr wrap="square">
-            <a:spAutoFit/>
-          </a:bodyPr>
-          <a:lstStyle/>
-          <a:p>
-            <a:pPr algn="l"/>
-            <a:r>
-              <a:rPr sz="1500" b="1">
-                <a:solidFill>
-                  <a:srgbClr val="1A1A1A"/>
-                </a:solidFill>
-                <a:latin typeface="Calibri"/>
-              </a:rPr>
-              <a:t>Sharper insight</a:t>
-            </a:r>
-          </a:p>
-        </p:txBody>
-      </p:sp>
-      <p:sp>
-        <p:nvSpPr>
-          <p:cNvPr id="15" name="TextBox 14"/>
-          <p:cNvSpPr txBox="1"/>
-          <p:nvPr/>
-        </p:nvSpPr>
-        <p:spPr>
-          <a:xfrm>
-            <a:off x="4379976" y="2011680"/>
-            <a:ext cx="3063240" cy="1463040"/>
-          </a:xfrm>
-          <a:prstGeom prst="rect">
-            <a:avLst/>
-          </a:prstGeom>
-          <a:noFill/>
-        </p:spPr>
-        <p:txBody>
-          <a:bodyPr wrap="square">
-            <a:spAutoFit/>
-          </a:bodyPr>
-          <a:lstStyle/>
-          <a:p>
-            <a:pPr>
-              <a:lnSpc>
-                <a:spcPct val="115000"/>
-              </a:lnSpc>
-              <a:spcAft>
-                <a:spcPts val="1000"/>
-              </a:spcAft>
-            </a:pPr>
-            <a:r>
-              <a:rPr sz="1250" b="1">
-                <a:solidFill>
-                  <a:srgbClr val="CC0E1E"/>
-                </a:solidFill>
-                <a:latin typeface="Calibri"/>
-              </a:rPr>
-              <a:t>—  </a:t>
-            </a:r>
-            <a:r>
-              <a:rPr sz="1250">
-                <a:solidFill>
-                  <a:srgbClr val="1A1A1A"/>
-                </a:solidFill>
-                <a:latin typeface="Calibri"/>
-              </a:rPr>
-              <a:t>Part-by-part visibility separates a stock movement from a lost job — and tells us where the volume actually went.</a:t>
-            </a:r>
-          </a:p>
-        </p:txBody>
-      </p:sp>
-      <p:sp>
-        <p:nvSpPr>
-          <p:cNvPr id="16" name="Rounded Rectangle 15"/>
-          <p:cNvSpPr/>
-          <p:nvPr/>
-        </p:nvSpPr>
-        <p:spPr>
-          <a:xfrm>
-            <a:off x="7882127" y="1234440"/>
-            <a:ext cx="3611880" cy="2377440"/>
-          </a:xfrm>
-          <a:prstGeom prst="roundRect">
-            <a:avLst>
-              <a:gd name="adj" fmla="val 6000"/>
-            </a:avLst>
-          </a:prstGeom>
-          <a:solidFill>
-            <a:srgbClr val="ECECEC"/>
-          </a:solidFill>
-          <a:ln>
-            <a:noFill/>
-          </a:ln>
-          <a:effectLst/>
-        </p:spPr>
-        <p:style>
-          <a:lnRef idx="1">
-            <a:schemeClr val="accent1"/>
-          </a:lnRef>
-          <a:fillRef idx="3">
-            <a:schemeClr val="accent1"/>
-          </a:fillRef>
-          <a:effectRef idx="2">
-            <a:schemeClr val="accent1"/>
-          </a:effectRef>
-          <a:fontRef idx="minor">
-            <a:schemeClr val="lt1"/>
-          </a:fontRef>
-        </p:style>
-        <p:txBody>
-          <a:bodyPr rtlCol="0" anchor="ctr"/>
-          <a:lstStyle/>
-          <a:p>
-            <a:pPr algn="ctr"/>
-          </a:p>
-        </p:txBody>
-      </p:sp>
-      <p:sp>
-        <p:nvSpPr>
-          <p:cNvPr id="17" name="Oval 16"/>
-          <p:cNvSpPr/>
-          <p:nvPr/>
-        </p:nvSpPr>
-        <p:spPr>
-          <a:xfrm>
-            <a:off x="8083295" y="1435608"/>
-            <a:ext cx="457200" cy="457200"/>
-          </a:xfrm>
-          <a:prstGeom prst="ellipse">
-            <a:avLst/>
-          </a:prstGeom>
-          <a:solidFill>
-            <a:srgbClr val="CC0E1E"/>
-          </a:solidFill>
-          <a:ln>
-            <a:noFill/>
-          </a:ln>
-          <a:effectLst/>
-        </p:spPr>
-        <p:style>
-          <a:lnRef idx="1">
-            <a:schemeClr val="accent1"/>
-          </a:lnRef>
-          <a:fillRef idx="3">
-            <a:schemeClr val="accent1"/>
-          </a:fillRef>
-          <a:effectRef idx="2">
-            <a:schemeClr val="accent1"/>
-          </a:effectRef>
-          <a:fontRef idx="minor">
-            <a:schemeClr val="lt1"/>
-          </a:fontRef>
-        </p:style>
-        <p:txBody>
-          <a:bodyPr rtlCol="0" anchor="ctr" lIns="0" rIns="0" tIns="0" bIns="0"/>
-          <a:lstStyle/>
-          <a:p>
-            <a:pPr algn="ctr"/>
-            <a:r>
-              <a:rPr sz="1800" b="1">
-                <a:solidFill>
-                  <a:srgbClr val="FFFFFF"/>
-                </a:solidFill>
-                <a:latin typeface="Calibri"/>
-              </a:rPr>
-              <a:t>3</a:t>
-            </a:r>
-          </a:p>
-        </p:txBody>
-      </p:sp>
-      <p:sp>
-        <p:nvSpPr>
-          <p:cNvPr id="18" name="TextBox 17"/>
-          <p:cNvSpPr txBox="1"/>
-          <p:nvPr/>
-        </p:nvSpPr>
-        <p:spPr>
-          <a:xfrm>
-            <a:off x="8705087" y="1435608"/>
-            <a:ext cx="2606040" cy="411480"/>
-          </a:xfrm>
-          <a:prstGeom prst="rect">
-            <a:avLst/>
-          </a:prstGeom>
-          <a:noFill/>
-        </p:spPr>
-        <p:txBody>
-          <a:bodyPr wrap="square">
-            <a:spAutoFit/>
-          </a:bodyPr>
-          <a:lstStyle/>
-          <a:p>
-            <a:pPr algn="l"/>
-            <a:r>
-              <a:rPr sz="1500" b="1">
-                <a:solidFill>
-                  <a:srgbClr val="1A1A1A"/>
-                </a:solidFill>
-                <a:latin typeface="Calibri"/>
-              </a:rPr>
-              <a:t>Shared benefit</a:t>
-            </a:r>
-          </a:p>
-        </p:txBody>
-      </p:sp>
-      <p:sp>
-        <p:nvSpPr>
-          <p:cNvPr id="19" name="TextBox 18"/>
-          <p:cNvSpPr txBox="1"/>
-          <p:nvPr/>
-        </p:nvSpPr>
-        <p:spPr>
-          <a:xfrm>
-            <a:off x="8174735" y="2011680"/>
-            <a:ext cx="3063240" cy="1463040"/>
-          </a:xfrm>
-          <a:prstGeom prst="rect">
-            <a:avLst/>
-          </a:prstGeom>
-          <a:noFill/>
-        </p:spPr>
-        <p:txBody>
-          <a:bodyPr wrap="square">
-            <a:spAutoFit/>
-          </a:bodyPr>
-          <a:lstStyle/>
-          <a:p>
-            <a:pPr>
-              <a:lnSpc>
-                <a:spcPct val="115000"/>
-              </a:lnSpc>
-              <a:spcAft>
-                <a:spcPts val="1000"/>
-              </a:spcAft>
-            </a:pPr>
-            <a:r>
-              <a:rPr sz="1250" b="1">
-                <a:solidFill>
-                  <a:srgbClr val="CC0E1E"/>
-                </a:solidFill>
-                <a:latin typeface="Calibri"/>
-              </a:rPr>
-              <a:t>—  </a:t>
-            </a:r>
-            <a:r>
-              <a:rPr sz="1250">
-                <a:solidFill>
-                  <a:srgbClr val="1A1A1A"/>
-                </a:solidFill>
-                <a:latin typeface="Calibri"/>
-              </a:rPr>
-              <a:t>Better availability on your fast movers, a sharper target for us, and a factual basis for the SPA — same data, both sides gain.</a:t>
-            </a:r>
-          </a:p>
-        </p:txBody>
-      </p:sp>
-      <p:sp>
-        <p:nvSpPr>
-          <p:cNvPr id="20" name="TextBox 19"/>
-          <p:cNvSpPr txBox="1"/>
-          <p:nvPr/>
-        </p:nvSpPr>
-        <p:spPr>
-          <a:xfrm>
-            <a:off x="292608" y="3886200"/>
-            <a:ext cx="8595360" cy="365760"/>
-          </a:xfrm>
-          <a:prstGeom prst="rect">
-            <a:avLst/>
-          </a:prstGeom>
-          <a:noFill/>
-        </p:spPr>
-        <p:txBody>
-          <a:bodyPr wrap="square">
-            <a:spAutoFit/>
-          </a:bodyPr>
-          <a:lstStyle/>
-          <a:p>
-            <a:pPr algn="l"/>
-            <a:r>
-              <a:rPr sz="1400" b="1">
-                <a:solidFill>
-                  <a:srgbClr val="CC0E1E"/>
-                </a:solidFill>
-                <a:latin typeface="Calibri"/>
-              </a:rPr>
-              <a:t>Requested from 01/01/2025, part number level, monthly.</a:t>
-            </a:r>
-          </a:p>
-        </p:txBody>
-      </p:sp>
-    </p:spTree>
-  </p:cSld>
-  <p:clrMapOvr>
-    <a:masterClrMapping/>
-  </p:clrMapOvr>
-</p:sld>
-</file>
-
-<file path=ppt/slides/slide18.xml><?xml version="1.0" encoding="utf-8"?>
-<p:sld xmlns:a="http://schemas.openxmlformats.org/drawingml/2006/main" xmlns:p="http://schemas.openxmlformats.org/presentationml/2006/main" xmlns:r="http://schemas.openxmlformats.org/officeDocument/2006/relationships">
-  <p:cSld>
-    <p:bg>
-      <p:bgPr>
-        <a:solidFill>
-          <a:srgbClr val="FFFFFF"/>
-        </a:solidFill>
-        <a:effectLst/>
-      </p:bgPr>
-    </p:bg>
-    <p:spTree>
-      <p:nvGrpSpPr>
-        <p:cNvPr id="1" name=""/>
-        <p:cNvGrpSpPr/>
-        <p:nvPr/>
-      </p:nvGrpSpPr>
-      <p:grpSpPr/>
-      <p:pic>
-        <p:nvPicPr>
-          <p:cNvPr id="2" name="Picture 1" descr="isuzu_logo_red.png"/>
-          <p:cNvPicPr>
-            <a:picLocks noChangeAspect="1"/>
-          </p:cNvPicPr>
-          <p:nvPr/>
-        </p:nvPicPr>
-        <p:blipFill>
-          <a:blip r:embed="rId2"/>
-          <a:stretch>
-            <a:fillRect/>
-          </a:stretch>
-        </p:blipFill>
-        <p:spPr>
-          <a:xfrm>
-            <a:off x="256032" y="6263640"/>
-            <a:ext cx="1679787" cy="292608"/>
-          </a:xfrm>
-          <a:prstGeom prst="rect">
-            <a:avLst/>
-          </a:prstGeom>
-        </p:spPr>
-      </p:pic>
-      <p:sp>
-        <p:nvSpPr>
-          <p:cNvPr id="3" name="Rectangle 2"/>
-          <p:cNvSpPr/>
-          <p:nvPr/>
-        </p:nvSpPr>
-        <p:spPr>
-          <a:xfrm>
-            <a:off x="0" y="6766560"/>
-            <a:ext cx="12188952" cy="91440"/>
-          </a:xfrm>
-          <a:prstGeom prst="rect">
-            <a:avLst/>
-          </a:prstGeom>
-          <a:solidFill>
-            <a:srgbClr val="CC0E1E"/>
-          </a:solidFill>
-          <a:ln>
-            <a:noFill/>
-          </a:ln>
-        </p:spPr>
-        <p:style>
-          <a:lnRef idx="1">
-            <a:schemeClr val="accent1"/>
-          </a:lnRef>
-          <a:fillRef idx="3">
-            <a:schemeClr val="accent1"/>
-          </a:fillRef>
-          <a:effectRef idx="2">
-            <a:schemeClr val="accent1"/>
-          </a:effectRef>
-          <a:fontRef idx="minor">
-            <a:schemeClr val="lt1"/>
-          </a:fontRef>
-        </p:style>
-        <p:txBody>
-          <a:bodyPr rtlCol="0" anchor="ctr"/>
-          <a:lstStyle/>
-          <a:p>
-            <a:pPr algn="ctr"/>
-          </a:p>
-        </p:txBody>
-      </p:sp>
-      <p:sp>
-        <p:nvSpPr>
-          <p:cNvPr id="4" name="TextBox 3"/>
-          <p:cNvSpPr txBox="1"/>
-          <p:nvPr/>
-        </p:nvSpPr>
-        <p:spPr>
-          <a:xfrm>
-            <a:off x="292608" y="201168"/>
-            <a:ext cx="11430000" cy="274320"/>
-          </a:xfrm>
-          <a:prstGeom prst="rect">
-            <a:avLst/>
-          </a:prstGeom>
-          <a:noFill/>
-        </p:spPr>
-        <p:txBody>
-          <a:bodyPr wrap="square">
-            <a:spAutoFit/>
-          </a:bodyPr>
-          <a:lstStyle/>
-          <a:p>
-            <a:pPr algn="l"/>
-            <a:r>
-              <a:rPr sz="1100" b="1">
-                <a:solidFill>
-                  <a:srgbClr val="CC0E1E"/>
-                </a:solidFill>
-                <a:latin typeface="Calibri"/>
-              </a:rPr>
-              <a:t>SUMMARY</a:t>
-            </a:r>
-          </a:p>
-        </p:txBody>
-      </p:sp>
-      <p:sp>
-        <p:nvSpPr>
-          <p:cNvPr id="5" name="TextBox 4"/>
-          <p:cNvSpPr txBox="1"/>
-          <p:nvPr/>
-        </p:nvSpPr>
-        <p:spPr>
-          <a:xfrm>
-            <a:off x="292608" y="475488"/>
-            <a:ext cx="11612880" cy="566928"/>
-          </a:xfrm>
-          <a:prstGeom prst="rect">
-            <a:avLst/>
-          </a:prstGeom>
-          <a:noFill/>
-        </p:spPr>
-        <p:txBody>
-          <a:bodyPr wrap="square">
-            <a:spAutoFit/>
-          </a:bodyPr>
-          <a:lstStyle/>
-          <a:p>
-            <a:pPr algn="l"/>
-            <a:r>
-              <a:rPr sz="2500" b="1">
-                <a:solidFill>
-                  <a:srgbClr val="1A1A1A"/>
-                </a:solidFill>
-                <a:latin typeface="Calibri"/>
-              </a:rPr>
-              <a:t>Next steps</a:t>
-            </a:r>
-          </a:p>
-        </p:txBody>
-      </p:sp>
-      <p:sp>
-        <p:nvSpPr>
-          <p:cNvPr id="6" name="Rectangle 5"/>
-          <p:cNvSpPr/>
-          <p:nvPr/>
-        </p:nvSpPr>
-        <p:spPr>
-          <a:xfrm>
-            <a:off x="292608" y="1005840"/>
-            <a:ext cx="11612880" cy="28000"/>
-          </a:xfrm>
-          <a:prstGeom prst="rect">
-            <a:avLst/>
-          </a:prstGeom>
-          <a:solidFill>
-            <a:srgbClr val="CC0E1E"/>
-          </a:solidFill>
-          <a:ln>
-            <a:noFill/>
-          </a:ln>
-        </p:spPr>
-        <p:style>
-          <a:lnRef idx="1">
-            <a:schemeClr val="accent1"/>
-          </a:lnRef>
-          <a:fillRef idx="3">
-            <a:schemeClr val="accent1"/>
-          </a:fillRef>
-          <a:effectRef idx="2">
-            <a:schemeClr val="accent1"/>
-          </a:effectRef>
-          <a:fontRef idx="minor">
-            <a:schemeClr val="lt1"/>
-          </a:fontRef>
-        </p:style>
-        <p:txBody>
-          <a:bodyPr rtlCol="0" anchor="ctr"/>
-          <a:lstStyle/>
-          <a:p>
-            <a:pPr algn="ctr"/>
-          </a:p>
-        </p:txBody>
-      </p:sp>
-      <p:sp>
-        <p:nvSpPr>
-          <p:cNvPr id="7" name="TextBox 6"/>
-          <p:cNvSpPr txBox="1"/>
-          <p:nvPr/>
-        </p:nvSpPr>
-        <p:spPr>
-          <a:xfrm>
-            <a:off x="11594592" y="6473952"/>
-            <a:ext cx="365760" cy="274320"/>
-          </a:xfrm>
-          <a:prstGeom prst="rect">
-            <a:avLst/>
-          </a:prstGeom>
-          <a:noFill/>
-        </p:spPr>
-        <p:txBody>
-          <a:bodyPr wrap="square">
-            <a:spAutoFit/>
-          </a:bodyPr>
-          <a:lstStyle/>
-          <a:p>
-            <a:pPr algn="r"/>
-            <a:r>
-              <a:rPr sz="1000" b="0">
-                <a:solidFill>
-                  <a:srgbClr val="5A5A5A"/>
-                </a:solidFill>
-                <a:latin typeface="Calibri"/>
-              </a:rPr>
-              <a:t>18</a:t>
-            </a:r>
-          </a:p>
-        </p:txBody>
-      </p:sp>
-      <p:sp>
-        <p:nvSpPr>
-          <p:cNvPr id="8" name="TextBox 7"/>
-          <p:cNvSpPr txBox="1"/>
-          <p:nvPr/>
-        </p:nvSpPr>
-        <p:spPr>
-          <a:xfrm>
-            <a:off x="292608" y="1234440"/>
-            <a:ext cx="11612880" cy="4206240"/>
-          </a:xfrm>
-          <a:prstGeom prst="rect">
-            <a:avLst/>
-          </a:prstGeom>
-          <a:noFill/>
-        </p:spPr>
-        <p:txBody>
-          <a:bodyPr wrap="square">
-            <a:spAutoFit/>
-          </a:bodyPr>
-          <a:lstStyle/>
-          <a:p>
-            <a:pPr>
-              <a:lnSpc>
-                <a:spcPct val="125000"/>
-              </a:lnSpc>
-              <a:spcAft>
-                <a:spcPts val="1000"/>
-              </a:spcAft>
-            </a:pPr>
-            <a:r>
-              <a:rPr sz="1500" b="1">
-                <a:solidFill>
-                  <a:srgbClr val="CC0E1E"/>
-                </a:solidFill>
-                <a:latin typeface="Calibri"/>
-              </a:rPr>
-              <a:t>—  </a:t>
-            </a:r>
-            <a:r>
-              <a:rPr sz="1500">
-                <a:solidFill>
-                  <a:srgbClr val="1A1A1A"/>
-                </a:solidFill>
-                <a:latin typeface="Calibri"/>
-              </a:rPr>
-              <a:t>Align on the FY2027 Sales-to-Dealer bridge (fleet, price, additional growth) — working figure EUR 456,382 (+6.2% vs FY2026 base).</a:t>
-            </a:r>
-          </a:p>
-          <a:p>
-            <a:pPr>
-              <a:lnSpc>
-                <a:spcPct val="125000"/>
-              </a:lnSpc>
-              <a:spcAft>
-                <a:spcPts val="1000"/>
-              </a:spcAft>
-            </a:pPr>
-            <a:r>
-              <a:rPr sz="1500" b="1">
-                <a:solidFill>
-                  <a:srgbClr val="CC0E1E"/>
-                </a:solidFill>
-                <a:latin typeface="Calibri"/>
-              </a:rPr>
-              <a:t>—  </a:t>
-            </a:r>
-            <a:r>
-              <a:rPr sz="1500">
-                <a:solidFill>
-                  <a:srgbClr val="1A1A1A"/>
-                </a:solidFill>
-                <a:latin typeface="Calibri"/>
-              </a:rPr>
-              <a:t>Confirm the incentive alongside the price adjustment; lock the target once that approval is through.</a:t>
-            </a:r>
-          </a:p>
-          <a:p>
-            <a:pPr>
-              <a:lnSpc>
-                <a:spcPct val="125000"/>
-              </a:lnSpc>
-              <a:spcAft>
-                <a:spcPts val="1000"/>
-              </a:spcAft>
-            </a:pPr>
-            <a:r>
-              <a:rPr sz="1500" b="1">
-                <a:solidFill>
-                  <a:srgbClr val="CC0E1E"/>
-                </a:solidFill>
-                <a:latin typeface="Calibri"/>
-              </a:rPr>
-              <a:t>—  </a:t>
-            </a:r>
-            <a:r>
-              <a:rPr sz="1500">
-                <a:solidFill>
-                  <a:srgbClr val="1A1A1A"/>
-                </a:solidFill>
-                <a:latin typeface="Calibri"/>
-              </a:rPr>
-              <a:t>Exhaust / Electrical sensors / Transmission parts: agree which category we tackle first, and what the joint action is.</a:t>
-            </a:r>
-          </a:p>
-          <a:p>
-            <a:pPr>
-              <a:lnSpc>
-                <a:spcPct val="125000"/>
-              </a:lnSpc>
-              <a:spcAft>
-                <a:spcPts val="1000"/>
-              </a:spcAft>
-            </a:pPr>
-            <a:r>
-              <a:rPr sz="1500" b="1">
-                <a:solidFill>
-                  <a:srgbClr val="CC0E1E"/>
-                </a:solidFill>
-                <a:latin typeface="Calibri"/>
-              </a:rPr>
-              <a:t>—  </a:t>
-            </a:r>
-            <a:r>
-              <a:rPr sz="1500">
-                <a:solidFill>
-                  <a:srgbClr val="1A1A1A"/>
-                </a:solidFill>
-                <a:latin typeface="Calibri"/>
-              </a:rPr>
-              <a:t>Agree part-level Sales-to-Dealer data sharing, effective 01/01/2025.</a:t>
-            </a:r>
-          </a:p>
-          <a:p>
-            <a:pPr>
-              <a:lnSpc>
-                <a:spcPct val="125000"/>
-              </a:lnSpc>
-              <a:spcAft>
-                <a:spcPts val="1000"/>
-              </a:spcAft>
-            </a:pPr>
-            <a:r>
-              <a:rPr sz="1500" b="1">
-                <a:solidFill>
-                  <a:srgbClr val="CC0E1E"/>
-                </a:solidFill>
-                <a:latin typeface="Calibri"/>
-              </a:rPr>
-              <a:t>—  </a:t>
-            </a:r>
-            <a:r>
-              <a:rPr sz="1500">
-                <a:solidFill>
-                  <a:srgbClr val="1A1A1A"/>
-                </a:solidFill>
-                <a:latin typeface="Calibri"/>
-              </a:rPr>
-              <a:t>SPA: FINLAND proposal, ISZE review and counter-proposal cycle to follow.</a:t>
-            </a:r>
-          </a:p>
-        </p:txBody>
-      </p:sp>
-    </p:spTree>
-  </p:cSld>
-  <p:clrMapOvr>
-    <a:masterClrMapping/>
-  </p:clrMapOvr>
-</p:sld>
-</file>
-
-<file path=ppt/slides/slide19.xml><?xml version="1.0" encoding="utf-8"?>
 <p:sld xmlns:a="http://schemas.openxmlformats.org/drawingml/2006/main" xmlns:p="http://schemas.openxmlformats.org/presentationml/2006/main" xmlns:r="http://schemas.openxmlformats.org/officeDocument/2006/relationships">
   <p:cSld>
     <p:bg>
@@ -9664,7 +8884,7 @@
               </a:spcAft>
             </a:pPr>
             <a:r>
-              <a:rPr sz="1300" b="1">
+              <a:rPr sz="1450" b="1">
                 <a:solidFill>
                   <a:srgbClr val="CC0E1E"/>
                 </a:solidFill>
@@ -9673,7 +8893,7 @@
               <a:t>—  </a:t>
             </a:r>
             <a:r>
-              <a:rPr sz="1300">
+              <a:rPr sz="1450">
                 <a:solidFill>
                   <a:srgbClr val="1A1A1A"/>
                 </a:solidFill>
@@ -9692,7 +8912,7 @@
               </a:spcAft>
             </a:pPr>
             <a:r>
-              <a:rPr sz="1300" b="1">
+              <a:rPr sz="1450" b="1">
                 <a:solidFill>
                   <a:srgbClr val="CC0E1E"/>
                 </a:solidFill>
@@ -9701,7 +8921,7 @@
               <a:t>—  </a:t>
             </a:r>
             <a:r>
-              <a:rPr sz="1300">
+              <a:rPr sz="1450">
                 <a:solidFill>
                   <a:srgbClr val="1A1A1A"/>
                 </a:solidFill>
@@ -9720,7 +8940,7 @@
               </a:spcAft>
             </a:pPr>
             <a:r>
-              <a:rPr sz="1300" b="1">
+              <a:rPr sz="1450" b="1">
                 <a:solidFill>
                   <a:srgbClr val="CC0E1E"/>
                 </a:solidFill>
@@ -9729,13 +8949,13 @@
               <a:t>—  </a:t>
             </a:r>
             <a:r>
-              <a:rPr sz="1300">
+              <a:rPr sz="1450">
                 <a:solidFill>
                   <a:srgbClr val="1A1A1A"/>
                 </a:solidFill>
                 <a:latin typeface="Calibri"/>
               </a:rPr>
-              <a:t>Parts Performance — Electrical sensors</a:t>
+              <a:t>Parts Performance — Transmission parts</a:t>
             </a:r>
           </a:p>
           <a:p>
@@ -9748,7 +8968,7 @@
               </a:spcAft>
             </a:pPr>
             <a:r>
-              <a:rPr sz="1300" b="1">
+              <a:rPr sz="1450" b="1">
                 <a:solidFill>
                   <a:srgbClr val="CC0E1E"/>
                 </a:solidFill>
@@ -9757,13 +8977,13 @@
               <a:t>—  </a:t>
             </a:r>
             <a:r>
-              <a:rPr sz="1300">
+              <a:rPr sz="1450">
                 <a:solidFill>
                   <a:srgbClr val="1A1A1A"/>
                 </a:solidFill>
                 <a:latin typeface="Calibri"/>
               </a:rPr>
-              <a:t>Parts Performance — Transmission parts</a:t>
+              <a:t>Parts Performance — Brake parts</a:t>
             </a:r>
           </a:p>
           <a:p>
@@ -9776,7 +8996,7 @@
               </a:spcAft>
             </a:pPr>
             <a:r>
-              <a:rPr sz="1300" b="1">
+              <a:rPr sz="1450" b="1">
                 <a:solidFill>
                   <a:srgbClr val="CC0E1E"/>
                 </a:solidFill>
@@ -9785,7 +9005,7 @@
               <a:t>—  </a:t>
             </a:r>
             <a:r>
-              <a:rPr sz="1300">
+              <a:rPr sz="1450">
                 <a:solidFill>
                   <a:srgbClr val="1A1A1A"/>
                 </a:solidFill>
@@ -9804,7 +9024,7 @@
               </a:spcAft>
             </a:pPr>
             <a:r>
-              <a:rPr sz="1300" b="1">
+              <a:rPr sz="1450" b="1">
                 <a:solidFill>
                   <a:srgbClr val="CC0E1E"/>
                 </a:solidFill>
@@ -9813,7 +9033,7 @@
               <a:t>—  </a:t>
             </a:r>
             <a:r>
-              <a:rPr sz="1300">
+              <a:rPr sz="1450">
                 <a:solidFill>
                   <a:srgbClr val="1A1A1A"/>
                 </a:solidFill>
@@ -9832,7 +9052,7 @@
               </a:spcAft>
             </a:pPr>
             <a:r>
-              <a:rPr sz="1300" b="1">
+              <a:rPr sz="1450" b="1">
                 <a:solidFill>
                   <a:srgbClr val="CC0E1E"/>
                 </a:solidFill>
@@ -9841,13 +9061,13 @@
               <a:t>—  </a:t>
             </a:r>
             <a:r>
-              <a:rPr sz="1300">
+              <a:rPr sz="1450">
                 <a:solidFill>
                   <a:srgbClr val="1A1A1A"/>
                 </a:solidFill>
                 <a:latin typeface="Calibri"/>
               </a:rPr>
-              <a:t>Sales-to-Dealer Outlook</a:t>
+              <a:t>Service-Parts Coverage</a:t>
             </a:r>
           </a:p>
           <a:p>
@@ -9860,7 +9080,7 @@
               </a:spcAft>
             </a:pPr>
             <a:r>
-              <a:rPr sz="1300" b="1">
+              <a:rPr sz="1450" b="1">
                 <a:solidFill>
                   <a:srgbClr val="CC0E1E"/>
                 </a:solidFill>
@@ -9869,13 +9089,13 @@
               <a:t>—  </a:t>
             </a:r>
             <a:r>
-              <a:rPr sz="1300">
+              <a:rPr sz="1450">
                 <a:solidFill>
                   <a:srgbClr val="1A1A1A"/>
                 </a:solidFill>
                 <a:latin typeface="Calibri"/>
               </a:rPr>
-              <a:t>GPS Capture</a:t>
+              <a:t>Fleet &amp; FY2027 Target</a:t>
             </a:r>
           </a:p>
           <a:p>
@@ -9888,7 +9108,7 @@
               </a:spcAft>
             </a:pPr>
             <a:r>
-              <a:rPr sz="1300" b="1">
+              <a:rPr sz="1450" b="1">
                 <a:solidFill>
                   <a:srgbClr val="CC0E1E"/>
                 </a:solidFill>
@@ -9897,13 +9117,13 @@
               <a:t>—  </a:t>
             </a:r>
             <a:r>
-              <a:rPr sz="1300">
+              <a:rPr sz="1450">
                 <a:solidFill>
                   <a:srgbClr val="1A1A1A"/>
                 </a:solidFill>
                 <a:latin typeface="Calibri"/>
               </a:rPr>
-              <a:t>Service-Parts Coverage</a:t>
+              <a:t>SPA — status</a:t>
             </a:r>
           </a:p>
           <a:p>
@@ -9916,7 +9136,7 @@
               </a:spcAft>
             </a:pPr>
             <a:r>
-              <a:rPr sz="1300" b="1">
+              <a:rPr sz="1450" b="1">
                 <a:solidFill>
                   <a:srgbClr val="CC0E1E"/>
                 </a:solidFill>
@@ -9925,13 +9145,13 @@
               <a:t>—  </a:t>
             </a:r>
             <a:r>
-              <a:rPr sz="1300">
+              <a:rPr sz="1450">
                 <a:solidFill>
                   <a:srgbClr val="1A1A1A"/>
                 </a:solidFill>
                 <a:latin typeface="Calibri"/>
               </a:rPr>
-              <a:t>Fleet &amp; FY2027 Target</a:t>
+              <a:t>R&amp;M — market discussion</a:t>
             </a:r>
           </a:p>
           <a:p>
@@ -9944,7 +9164,7 @@
               </a:spcAft>
             </a:pPr>
             <a:r>
-              <a:rPr sz="1300" b="1">
+              <a:rPr sz="1450" b="1">
                 <a:solidFill>
                   <a:srgbClr val="CC0E1E"/>
                 </a:solidFill>
@@ -9953,13 +9173,13 @@
               <a:t>—  </a:t>
             </a:r>
             <a:r>
-              <a:rPr sz="1300">
+              <a:rPr sz="1450">
                 <a:solidFill>
                   <a:srgbClr val="1A1A1A"/>
                 </a:solidFill>
                 <a:latin typeface="Calibri"/>
               </a:rPr>
-              <a:t>SPA — status</a:t>
+              <a:t>Data request: part-level Sales-to-Dealer</a:t>
             </a:r>
           </a:p>
           <a:p>
@@ -9972,7 +9192,7 @@
               </a:spcAft>
             </a:pPr>
             <a:r>
-              <a:rPr sz="1300" b="1">
+              <a:rPr sz="1450" b="1">
                 <a:solidFill>
                   <a:srgbClr val="CC0E1E"/>
                 </a:solidFill>
@@ -9981,63 +9201,7 @@
               <a:t>—  </a:t>
             </a:r>
             <a:r>
-              <a:rPr sz="1300">
-                <a:solidFill>
-                  <a:srgbClr val="1A1A1A"/>
-                </a:solidFill>
-                <a:latin typeface="Calibri"/>
-              </a:rPr>
-              <a:t>R&amp;M — market discussion</a:t>
-            </a:r>
-          </a:p>
-          <a:p>
-            <a:pPr>
-              <a:lnSpc>
-                <a:spcPct val="110000"/>
-              </a:lnSpc>
-              <a:spcAft>
-                <a:spcPts val="1000"/>
-              </a:spcAft>
-            </a:pPr>
-            <a:r>
-              <a:rPr sz="1300" b="1">
-                <a:solidFill>
-                  <a:srgbClr val="CC0E1E"/>
-                </a:solidFill>
-                <a:latin typeface="Calibri"/>
-              </a:rPr>
-              <a:t>—  </a:t>
-            </a:r>
-            <a:r>
-              <a:rPr sz="1300">
-                <a:solidFill>
-                  <a:srgbClr val="1A1A1A"/>
-                </a:solidFill>
-                <a:latin typeface="Calibri"/>
-              </a:rPr>
-              <a:t>Data request: part-level Sales-to-Dealer</a:t>
-            </a:r>
-          </a:p>
-          <a:p>
-            <a:pPr>
-              <a:lnSpc>
-                <a:spcPct val="110000"/>
-              </a:lnSpc>
-              <a:spcAft>
-                <a:spcPts val="1000"/>
-              </a:spcAft>
-            </a:pPr>
-            <a:r>
-              <a:rPr sz="1300" b="1">
-                <a:solidFill>
-                  <a:srgbClr val="CC0E1E"/>
-                </a:solidFill>
-                <a:latin typeface="Calibri"/>
-              </a:rPr>
-              <a:t>—  </a:t>
-            </a:r>
-            <a:r>
-              <a:rPr sz="1300">
+              <a:rPr sz="1450">
                 <a:solidFill>
                   <a:srgbClr val="1A1A1A"/>
                 </a:solidFill>
@@ -10437,7 +9601,7 @@
                 </a:solidFill>
                 <a:latin typeface="Calibri"/>
               </a:rPr>
-              <a:t>Commercial parts billing (warranty/campaign excluded) EUR 100K against EUR 91K a year earlier — +9.5% (CY H1 2026 vs CY H1 2025, Jan–Jun).</a:t>
+              <a:t>Commercial parts billing (warranty/campaign excluded) EUR 79K against EUR 91K a year earlier — -13.4% (CY H1 2026 vs CY H1 2025, Jan–Jun).</a:t>
             </a:r>
           </a:p>
           <a:p>
@@ -10465,7 +9629,7 @@
                 </a:solidFill>
                 <a:latin typeface="Calibri"/>
               </a:rPr>
-              <a:t>Largest PN drops: 8980139111 (VALVE; EGR) EUR -4K, 25 fewer pcs; 8983682091 (PIPE; EXH) EUR -3K, 2 fewer pcs; 8981901180 (DRIVE ASM; FINAL,RR) EUR -3K, 2 fewer pcs.</a:t>
+              <a:t>Largest PN drops (all categories): 8980139111 (VALVE; EGR) EUR -4K, 25 fewer pcs; 8983682091 (PIPE; EXH) EUR -3K, 2 fewer pcs; 8981901180 (DRIVE ASM; FINAL,RR) EUR -3K, 2 fewer pcs.</a:t>
             </a:r>
           </a:p>
           <a:p>
@@ -10493,7 +9657,7 @@
                 </a:solidFill>
                 <a:latin typeface="Calibri"/>
               </a:rPr>
-              <a:t>Largest PN gains: 8982602580 (SENSOR; PRESSURE,DPD) EUR 1K, 9 more pcs; 8981596930 (ELEMENT KIT; FUEL FI) [N*R,NPS,QKR,TF*,UC*] EUR 1K, 36 more pcs; 8981045589 (PANEL; SIDE GATE) EUR 0K, 2 more pcs.</a:t>
+              <a:t>Largest PN gains (all categories): 8982602580 (SENSOR; PRESSURE,DPD) EUR 1K, 9 more pcs; 8981596930 (ELEMENT KIT; FUEL FI) [N*R,NPS,QKR,TF*,UC*] EUR 1K, 36 more pcs; 8981045589 (PANEL; SIDE GATE) EUR 0K, 2 more pcs.</a:t>
             </a:r>
           </a:p>
           <a:p>
@@ -10521,7 +9685,7 @@
                 </a:solidFill>
                 <a:latin typeface="Calibri"/>
               </a:rPr>
-              <a:t>About EUR 37K of claim-matched PN billing was stripped so this chart is aftermarket demand, not warranty.</a:t>
+              <a:t>Within Starter / alternator (EUR 1K, +5059%): 8983092631 (STARTER ASM) EUR 1K, 2 more pcs; 8982476891 (GENERATOR ASM) EUR 0K, 1 more pcs; 8981836550 (STARTER ASM) EUR 0K, 1 more pcs.</a:t>
             </a:r>
           </a:p>
         </p:txBody>
@@ -10813,7 +9977,7 @@
                 </a:solidFill>
                 <a:latin typeface="Calibri"/>
               </a:rPr>
-              <a:t>EUR 10,706 (CY H1 2025) to EUR 3,872 (CY H1 2026), down EUR 6,835 (-64%).</a:t>
+              <a:t>EUR 10,706 (CY H1 2025) to EUR 4,188 (CY H1 2026), down EUR 6,518 (-61%).</a:t>
             </a:r>
           </a:p>
           <a:p>
@@ -11223,7 +10387,7 @@
                 </a:solidFill>
                 <a:latin typeface="Calibri"/>
               </a:rPr>
-              <a:t>PARTS PERFORMANCE — ELECTRICAL SENSORS</a:t>
+              <a:t>PARTS PERFORMANCE — TRANSMISSION PARTS</a:t>
             </a:r>
           </a:p>
         </p:txBody>
@@ -11258,7 +10422,7 @@
                 </a:solidFill>
                 <a:latin typeface="Calibri"/>
               </a:rPr>
-              <a:t>Electrical sensors — CY H1 2026 vs CY H1 2025 (commercial, ex-warranty)</a:t>
+              <a:t>Transmission parts — CY H1 2026 vs CY H1 2025 (commercial, ex-warranty)</a:t>
             </a:r>
           </a:p>
         </p:txBody>
@@ -11387,7 +10551,7 @@
                 </a:solidFill>
                 <a:latin typeface="Calibri"/>
               </a:rPr>
-              <a:t>EUR 9,985 (CY H1 2025) to EUR 6,057 (CY H1 2026), down EUR 3,927 (-39%).</a:t>
+              <a:t>EUR 7,152 (CY H1 2025) to EUR 3,553 (CY H1 2026), down EUR 3,599 (-50%).</a:t>
             </a:r>
           </a:p>
           <a:p>
@@ -11443,7 +10607,7 @@
                 </a:solidFill>
                 <a:latin typeface="Calibri"/>
               </a:rPr>
-              <a:t>8980094180 (SENSOR; MAP): EUR 3,089 to EUR 1,851, 12 fewer pieces.</a:t>
+              <a:t>8981901180 (DRIVE ASM; FINAL,RR): EUR 2,577 to EUR 0, 2 fewer pieces.</a:t>
             </a:r>
           </a:p>
           <a:p>
@@ -11471,7 +10635,7 @@
                 </a:solidFill>
                 <a:latin typeface="Calibri"/>
               </a:rPr>
-              <a:t>7552277600 (HARNESS KIT;MPU USB LOWER): EUR 843 to EUR 0, 45 fewer pieces.</a:t>
+              <a:t>8980842808 (CASE; FRT AXLE): EUR 615 to EUR 0, 2 fewer pieces.</a:t>
             </a:r>
           </a:p>
           <a:p>
@@ -11499,7 +10663,7 @@
                 </a:solidFill>
                 <a:latin typeface="Calibri"/>
               </a:rPr>
-              <a:t>8978417170 (METER COMPL; CLUSTER): EUR 542 to EUR 0, 2 fewer pieces.</a:t>
+              <a:t>1884057500 (T/AXLEOIL): EUR 508 to EUR 0, 16 fewer pieces.</a:t>
             </a:r>
           </a:p>
           <a:p>
@@ -11527,7 +10691,7 @@
                 </a:solidFill>
                 <a:latin typeface="Calibri"/>
               </a:rPr>
-              <a:t>8980205140 (SENSOR; PRESS): EUR 579 to EUR 97, 5 fewer pieces.</a:t>
+              <a:t>8979487611 (SHAFT ASM; PROP,FRT): EUR 498 to EUR 0, 2 fewer pieces.</a:t>
             </a:r>
           </a:p>
         </p:txBody>
@@ -11613,7 +10777,7 @@
                 </a:solidFill>
                 <a:latin typeface="Calibri"/>
               </a:rPr>
-              <a:t>Is this pricing against what the dealers can buy locally?</a:t>
+              <a:t>Is this a mix shift towards assemblies, or fewer component-level repairs?</a:t>
             </a:r>
           </a:p>
           <a:p>
@@ -11641,35 +10805,7 @@
                 </a:solidFill>
                 <a:latin typeface="Calibri"/>
               </a:rPr>
-              <a:t>Is any of this stock timing on your side rather than end demand?</a:t>
-            </a:r>
-          </a:p>
-          <a:p>
-            <a:pPr>
-              <a:lnSpc>
-                <a:spcPct val="125000"/>
-              </a:lnSpc>
-              <a:spcAft>
-                <a:spcPts val="1000"/>
-              </a:spcAft>
-            </a:pPr>
-            <a:r>
-              <a:rPr sz="1400" b="1">
-                <a:solidFill>
-                  <a:srgbClr val="CC0E1E"/>
-                </a:solidFill>
-                <a:latin typeface="Calibri"/>
-              </a:rPr>
-              <a:t>—  </a:t>
-            </a:r>
-            <a:r>
-              <a:rPr sz="1400">
-                <a:solidFill>
-                  <a:srgbClr val="1A1A1A"/>
-                </a:solidFill>
-                <a:latin typeface="Calibri"/>
-              </a:rPr>
-              <a:t>What would make the biggest difference to keep this business with us?</a:t>
+              <a:t>Any availability problems on the fast-moving lines?</a:t>
             </a:r>
           </a:p>
         </p:txBody>
@@ -11797,7 +10933,7 @@
                 </a:solidFill>
                 <a:latin typeface="Calibri"/>
               </a:rPr>
-              <a:t>PARTS PERFORMANCE — TRANSMISSION PARTS</a:t>
+              <a:t>PARTS PERFORMANCE — BRAKE PARTS</a:t>
             </a:r>
           </a:p>
         </p:txBody>
@@ -11832,7 +10968,7 @@
                 </a:solidFill>
                 <a:latin typeface="Calibri"/>
               </a:rPr>
-              <a:t>Transmission parts — CY H1 2026 vs CY H1 2025 (commercial, ex-warranty)</a:t>
+              <a:t>Brake parts — CY H1 2026 vs CY H1 2025 (commercial, ex-warranty)</a:t>
             </a:r>
           </a:p>
         </p:txBody>
@@ -11961,7 +11097,7 @@
                 </a:solidFill>
                 <a:latin typeface="Calibri"/>
               </a:rPr>
-              <a:t>EUR 7,152 (CY H1 2025) to EUR 3,523 (CY H1 2026), down EUR 3,629 (-51%).</a:t>
+              <a:t>EUR 4,789 (CY H1 2025) to EUR 1,763 (CY H1 2026), down EUR 3,026 (-63%).</a:t>
             </a:r>
           </a:p>
           <a:p>
@@ -12017,7 +11153,7 @@
                 </a:solidFill>
                 <a:latin typeface="Calibri"/>
               </a:rPr>
-              <a:t>8981901180 (DRIVE ASM; FINAL,RR): EUR 2,577 to EUR 0, 2 fewer pieces.</a:t>
+              <a:t>8976526220 (PAD KIT; CALIPER,DISC BRK,FRT): EUR 773 to EUR 0, 12 fewer pieces.</a:t>
             </a:r>
           </a:p>
           <a:p>
@@ -12045,7 +11181,7 @@
                 </a:solidFill>
                 <a:latin typeface="Calibri"/>
               </a:rPr>
-              <a:t>8980842808 (CASE; FRT AXLE): EUR 615 to EUR 0, 2 fewer pieces.</a:t>
+              <a:t>8983767530 (ROTOR; DISC BRK,FRT): EUR 635 to EUR 0, 8 fewer pieces.</a:t>
             </a:r>
           </a:p>
           <a:p>
@@ -12073,7 +11209,7 @@
                 </a:solidFill>
                 <a:latin typeface="Calibri"/>
               </a:rPr>
-              <a:t>1884057500 (T/AXLEOIL): EUR 508 to EUR 0, 16 fewer pieces.</a:t>
+              <a:t>8978279610 (PAD KIT; DISC BRK,W/O SHIM &amp; CLIP): EUR 903 to EUR 411, 7 fewer pieces.</a:t>
             </a:r>
           </a:p>
           <a:p>
@@ -12101,7 +11237,7 @@
                 </a:solidFill>
                 <a:latin typeface="Calibri"/>
               </a:rPr>
-              <a:t>8979487611 (SHAFT ASM; PROP,FRT): EUR 498 to EUR 0, 2 fewer pieces.</a:t>
+              <a:t>8979488071 (ROTOR; DISC BRK,FRT): EUR 326 to EUR 0, 6 fewer pieces.</a:t>
             </a:r>
           </a:p>
         </p:txBody>
@@ -12187,7 +11323,7 @@
                 </a:solidFill>
                 <a:latin typeface="Calibri"/>
               </a:rPr>
-              <a:t>Is this a mix shift towards assemblies, or fewer component-level repairs?</a:t>
+              <a:t>Is pad and rotor pricing competitive against what the dealers can buy locally?</a:t>
             </a:r>
           </a:p>
           <a:p>
@@ -12215,7 +11351,35 @@
                 </a:solidFill>
                 <a:latin typeface="Calibri"/>
               </a:rPr>
-              <a:t>Any availability problems on the fast-moving lines?</a:t>
+              <a:t>Is any of this stock timing on your side rather than end demand?</a:t>
+            </a:r>
+          </a:p>
+          <a:p>
+            <a:pPr>
+              <a:lnSpc>
+                <a:spcPct val="125000"/>
+              </a:lnSpc>
+              <a:spcAft>
+                <a:spcPts val="1000"/>
+              </a:spcAft>
+            </a:pPr>
+            <a:r>
+              <a:rPr sz="1400" b="1">
+                <a:solidFill>
+                  <a:srgbClr val="CC0E1E"/>
+                </a:solidFill>
+                <a:latin typeface="Calibri"/>
+              </a:rPr>
+              <a:t>—  </a:t>
+            </a:r>
+            <a:r>
+              <a:rPr sz="1400">
+                <a:solidFill>
+                  <a:srgbClr val="1A1A1A"/>
+                </a:solidFill>
+                <a:latin typeface="Calibri"/>
+              </a:rPr>
+              <a:t>Are dealers still quoting these part numbers, or have they dropped off the workshop menu?</a:t>
             </a:r>
           </a:p>
         </p:txBody>
@@ -13517,7 +12681,7 @@
                 </a:solidFill>
                 <a:latin typeface="Calibri"/>
               </a:rPr>
-              <a:t>Starter / alternator +5059%, Steering +112% — where the commercial volume went.</a:t>
+              <a:t>Starter / alternator +5059%, Lighting +20%, Steering +112% — where the commercial volume went.</a:t>
             </a:r>
           </a:p>
           <a:p>
@@ -14045,7 +13209,7 @@
                           </a:solidFill>
                           <a:latin typeface="Calibri"/>
                         </a:rPr>
-                        <a:t>8977993743</a:t>
+                        <a:t>8975536750</a:t>
                       </a:r>
                     </a:p>
                   </a:txBody>
@@ -14068,7 +13232,7 @@
                           </a:solidFill>
                           <a:latin typeface="Calibri"/>
                         </a:rPr>
-                        <a:t>LAMP ASM; HEAD</a:t>
+                        <a:t>BODY ASM; REAR</a:t>
                       </a:r>
                     </a:p>
                   </a:txBody>
@@ -14091,195 +13255,7 @@
                           </a:solidFill>
                           <a:latin typeface="Calibri"/>
                         </a:rPr>
-                        <a:t>EUR 1,000</a:t>
-                      </a:r>
-                    </a:p>
-                  </a:txBody>
-                  <a:tcPr anchor="ctr" marL="73152" marR="73152">
-                    <a:solidFill>
-                      <a:srgbClr val="ECECEC"/>
-                    </a:solidFill>
-                  </a:tcPr>
-                </a:tc>
-                <a:tc>
-                  <a:txBody>
-                    <a:bodyPr/>
-                    <a:lstStyle/>
-                    <a:p>
-                      <a:pPr algn="l"/>
-                      <a:r>
-                        <a:rPr sz="1150" b="0">
-                          <a:solidFill>
-                            <a:srgbClr val="1A1A1A"/>
-                          </a:solidFill>
-                          <a:latin typeface="Calibri"/>
-                        </a:rPr>
-                        <a:t>Validate</a:t>
-                      </a:r>
-                    </a:p>
-                  </a:txBody>
-                  <a:tcPr anchor="ctr" marL="73152" marR="73152">
-                    <a:solidFill>
-                      <a:srgbClr val="ECECEC"/>
-                    </a:solidFill>
-                  </a:tcPr>
-                </a:tc>
-              </a:tr>
-              <a:tr h="365760">
-                <a:tc>
-                  <a:txBody>
-                    <a:bodyPr/>
-                    <a:lstStyle/>
-                    <a:p>
-                      <a:pPr algn="l"/>
-                      <a:r>
-                        <a:rPr sz="1150" b="0">
-                          <a:solidFill>
-                            <a:srgbClr val="1A1A1A"/>
-                          </a:solidFill>
-                          <a:latin typeface="Calibri"/>
-                        </a:rPr>
-                        <a:t>8983320621</a:t>
-                      </a:r>
-                    </a:p>
-                  </a:txBody>
-                  <a:tcPr anchor="ctr" marL="73152" marR="73152">
-                    <a:solidFill>
-                      <a:srgbClr val="FFFFFF"/>
-                    </a:solidFill>
-                  </a:tcPr>
-                </a:tc>
-                <a:tc>
-                  <a:txBody>
-                    <a:bodyPr/>
-                    <a:lstStyle/>
-                    <a:p>
-                      <a:pPr algn="l"/>
-                      <a:r>
-                        <a:rPr sz="1150" b="0">
-                          <a:solidFill>
-                            <a:srgbClr val="1A1A1A"/>
-                          </a:solidFill>
-                          <a:latin typeface="Calibri"/>
-                        </a:rPr>
-                        <a:t>PUMP ASM; FUEL,SUPPLY</a:t>
-                      </a:r>
-                    </a:p>
-                  </a:txBody>
-                  <a:tcPr anchor="ctr" marL="73152" marR="73152">
-                    <a:solidFill>
-                      <a:srgbClr val="FFFFFF"/>
-                    </a:solidFill>
-                  </a:tcPr>
-                </a:tc>
-                <a:tc>
-                  <a:txBody>
-                    <a:bodyPr/>
-                    <a:lstStyle/>
-                    <a:p>
-                      <a:pPr algn="r"/>
-                      <a:r>
-                        <a:rPr sz="1150" b="0">
-                          <a:solidFill>
-                            <a:srgbClr val="1A1A1A"/>
-                          </a:solidFill>
-                          <a:latin typeface="Calibri"/>
-                        </a:rPr>
-                        <a:t>EUR 992</a:t>
-                      </a:r>
-                    </a:p>
-                  </a:txBody>
-                  <a:tcPr anchor="ctr" marL="73152" marR="73152">
-                    <a:solidFill>
-                      <a:srgbClr val="FFFFFF"/>
-                    </a:solidFill>
-                  </a:tcPr>
-                </a:tc>
-                <a:tc>
-                  <a:txBody>
-                    <a:bodyPr/>
-                    <a:lstStyle/>
-                    <a:p>
-                      <a:pPr algn="l"/>
-                      <a:r>
-                        <a:rPr sz="1150" b="0">
-                          <a:solidFill>
-                            <a:srgbClr val="1A1A1A"/>
-                          </a:solidFill>
-                          <a:latin typeface="Calibri"/>
-                        </a:rPr>
-                        <a:t>Validate</a:t>
-                      </a:r>
-                    </a:p>
-                  </a:txBody>
-                  <a:tcPr anchor="ctr" marL="73152" marR="73152">
-                    <a:solidFill>
-                      <a:srgbClr val="FFFFFF"/>
-                    </a:solidFill>
-                  </a:tcPr>
-                </a:tc>
-              </a:tr>
-              <a:tr h="365760">
-                <a:tc>
-                  <a:txBody>
-                    <a:bodyPr/>
-                    <a:lstStyle/>
-                    <a:p>
-                      <a:pPr algn="l"/>
-                      <a:r>
-                        <a:rPr sz="1150" b="0">
-                          <a:solidFill>
-                            <a:srgbClr val="1A1A1A"/>
-                          </a:solidFill>
-                          <a:latin typeface="Calibri"/>
-                        </a:rPr>
-                        <a:t>8980432420</a:t>
-                      </a:r>
-                    </a:p>
-                  </a:txBody>
-                  <a:tcPr anchor="ctr" marL="73152" marR="73152">
-                    <a:solidFill>
-                      <a:srgbClr val="ECECEC"/>
-                    </a:solidFill>
-                  </a:tcPr>
-                </a:tc>
-                <a:tc>
-                  <a:txBody>
-                    <a:bodyPr/>
-                    <a:lstStyle/>
-                    <a:p>
-                      <a:pPr algn="l"/>
-                      <a:r>
-                        <a:rPr sz="1150" b="0">
-                          <a:solidFill>
-                            <a:srgbClr val="1A1A1A"/>
-                          </a:solidFill>
-                          <a:latin typeface="Calibri"/>
-                        </a:rPr>
-                        <a:t>DOOR ASM; FRT,WO/TRIM</a:t>
-                      </a:r>
-                    </a:p>
-                  </a:txBody>
-                  <a:tcPr anchor="ctr" marL="73152" marR="73152">
-                    <a:solidFill>
-                      <a:srgbClr val="ECECEC"/>
-                    </a:solidFill>
-                  </a:tcPr>
-                </a:tc>
-                <a:tc>
-                  <a:txBody>
-                    <a:bodyPr/>
-                    <a:lstStyle/>
-                    <a:p>
-                      <a:pPr algn="r"/>
-                      <a:r>
-                        <a:rPr sz="1150" b="0">
-                          <a:solidFill>
-                            <a:srgbClr val="1A1A1A"/>
-                          </a:solidFill>
-                          <a:latin typeface="Calibri"/>
-                        </a:rPr>
-                        <a:t>EUR 912</a:t>
+                        <a:t>EUR 1,552</a:t>
                       </a:r>
                     </a:p>
                   </a:txBody>
@@ -14373,7 +13349,7 @@
                           </a:solidFill>
                           <a:latin typeface="Calibri"/>
                         </a:rPr>
-                        <a:t>EUR 858</a:t>
+                        <a:t>EUR 1,169</a:t>
                       </a:r>
                     </a:p>
                   </a:txBody>
@@ -14467,7 +13443,7 @@
                           </a:solidFill>
                           <a:latin typeface="Calibri"/>
                         </a:rPr>
-                        <a:t>EUR 839</a:t>
+                        <a:t>EUR 1,132</a:t>
                       </a:r>
                     </a:p>
                   </a:txBody>
@@ -14501,6 +13477,194 @@
                   </a:tcPr>
                 </a:tc>
               </a:tr>
+              <a:tr h="365760">
+                <a:tc>
+                  <a:txBody>
+                    <a:bodyPr/>
+                    <a:lstStyle/>
+                    <a:p>
+                      <a:pPr algn="l"/>
+                      <a:r>
+                        <a:rPr sz="1150" b="0">
+                          <a:solidFill>
+                            <a:srgbClr val="1A1A1A"/>
+                          </a:solidFill>
+                          <a:latin typeface="Calibri"/>
+                        </a:rPr>
+                        <a:t>8977993743</a:t>
+                      </a:r>
+                    </a:p>
+                  </a:txBody>
+                  <a:tcPr anchor="ctr" marL="73152" marR="73152">
+                    <a:solidFill>
+                      <a:srgbClr val="FFFFFF"/>
+                    </a:solidFill>
+                  </a:tcPr>
+                </a:tc>
+                <a:tc>
+                  <a:txBody>
+                    <a:bodyPr/>
+                    <a:lstStyle/>
+                    <a:p>
+                      <a:pPr algn="l"/>
+                      <a:r>
+                        <a:rPr sz="1150" b="0">
+                          <a:solidFill>
+                            <a:srgbClr val="1A1A1A"/>
+                          </a:solidFill>
+                          <a:latin typeface="Calibri"/>
+                        </a:rPr>
+                        <a:t>LAMP ASM; HEAD</a:t>
+                      </a:r>
+                    </a:p>
+                  </a:txBody>
+                  <a:tcPr anchor="ctr" marL="73152" marR="73152">
+                    <a:solidFill>
+                      <a:srgbClr val="FFFFFF"/>
+                    </a:solidFill>
+                  </a:tcPr>
+                </a:tc>
+                <a:tc>
+                  <a:txBody>
+                    <a:bodyPr/>
+                    <a:lstStyle/>
+                    <a:p>
+                      <a:pPr algn="r"/>
+                      <a:r>
+                        <a:rPr sz="1150" b="0">
+                          <a:solidFill>
+                            <a:srgbClr val="1A1A1A"/>
+                          </a:solidFill>
+                          <a:latin typeface="Calibri"/>
+                        </a:rPr>
+                        <a:t>EUR 1,000</a:t>
+                      </a:r>
+                    </a:p>
+                  </a:txBody>
+                  <a:tcPr anchor="ctr" marL="73152" marR="73152">
+                    <a:solidFill>
+                      <a:srgbClr val="FFFFFF"/>
+                    </a:solidFill>
+                  </a:tcPr>
+                </a:tc>
+                <a:tc>
+                  <a:txBody>
+                    <a:bodyPr/>
+                    <a:lstStyle/>
+                    <a:p>
+                      <a:pPr algn="l"/>
+                      <a:r>
+                        <a:rPr sz="1150" b="0">
+                          <a:solidFill>
+                            <a:srgbClr val="1A1A1A"/>
+                          </a:solidFill>
+                          <a:latin typeface="Calibri"/>
+                        </a:rPr>
+                        <a:t>Validate</a:t>
+                      </a:r>
+                    </a:p>
+                  </a:txBody>
+                  <a:tcPr anchor="ctr" marL="73152" marR="73152">
+                    <a:solidFill>
+                      <a:srgbClr val="FFFFFF"/>
+                    </a:solidFill>
+                  </a:tcPr>
+                </a:tc>
+              </a:tr>
+              <a:tr h="365760">
+                <a:tc>
+                  <a:txBody>
+                    <a:bodyPr/>
+                    <a:lstStyle/>
+                    <a:p>
+                      <a:pPr algn="l"/>
+                      <a:r>
+                        <a:rPr sz="1150" b="0">
+                          <a:solidFill>
+                            <a:srgbClr val="1A1A1A"/>
+                          </a:solidFill>
+                          <a:latin typeface="Calibri"/>
+                        </a:rPr>
+                        <a:t>8983320621</a:t>
+                      </a:r>
+                    </a:p>
+                  </a:txBody>
+                  <a:tcPr anchor="ctr" marL="73152" marR="73152">
+                    <a:solidFill>
+                      <a:srgbClr val="ECECEC"/>
+                    </a:solidFill>
+                  </a:tcPr>
+                </a:tc>
+                <a:tc>
+                  <a:txBody>
+                    <a:bodyPr/>
+                    <a:lstStyle/>
+                    <a:p>
+                      <a:pPr algn="l"/>
+                      <a:r>
+                        <a:rPr sz="1150" b="0">
+                          <a:solidFill>
+                            <a:srgbClr val="1A1A1A"/>
+                          </a:solidFill>
+                          <a:latin typeface="Calibri"/>
+                        </a:rPr>
+                        <a:t>PUMP ASM; FUEL,SUPPLY</a:t>
+                      </a:r>
+                    </a:p>
+                  </a:txBody>
+                  <a:tcPr anchor="ctr" marL="73152" marR="73152">
+                    <a:solidFill>
+                      <a:srgbClr val="ECECEC"/>
+                    </a:solidFill>
+                  </a:tcPr>
+                </a:tc>
+                <a:tc>
+                  <a:txBody>
+                    <a:bodyPr/>
+                    <a:lstStyle/>
+                    <a:p>
+                      <a:pPr algn="r"/>
+                      <a:r>
+                        <a:rPr sz="1150" b="0">
+                          <a:solidFill>
+                            <a:srgbClr val="1A1A1A"/>
+                          </a:solidFill>
+                          <a:latin typeface="Calibri"/>
+                        </a:rPr>
+                        <a:t>EUR 992</a:t>
+                      </a:r>
+                    </a:p>
+                  </a:txBody>
+                  <a:tcPr anchor="ctr" marL="73152" marR="73152">
+                    <a:solidFill>
+                      <a:srgbClr val="ECECEC"/>
+                    </a:solidFill>
+                  </a:tcPr>
+                </a:tc>
+                <a:tc>
+                  <a:txBody>
+                    <a:bodyPr/>
+                    <a:lstStyle/>
+                    <a:p>
+                      <a:pPr algn="l"/>
+                      <a:r>
+                        <a:rPr sz="1150" b="0">
+                          <a:solidFill>
+                            <a:srgbClr val="1A1A1A"/>
+                          </a:solidFill>
+                          <a:latin typeface="Calibri"/>
+                        </a:rPr>
+                        <a:t>Validate</a:t>
+                      </a:r>
+                    </a:p>
+                  </a:txBody>
+                  <a:tcPr anchor="ctr" marL="73152" marR="73152">
+                    <a:solidFill>
+                      <a:srgbClr val="ECECEC"/>
+                    </a:solidFill>
+                  </a:tcPr>
+                </a:tc>
+              </a:tr>
             </a:tbl>
           </a:graphicData>
         </a:graphic>
@@ -14707,7 +13871,7 @@
                 </a:solidFill>
                 <a:latin typeface="Calibri"/>
               </a:rPr>
-              <a:t>SALES-TO-DEALER</a:t>
+              <a:t>SERVICE-PARTS COVERAGE</a:t>
             </a:r>
           </a:p>
         </p:txBody>
@@ -14742,7 +13906,7 @@
                 </a:solidFill>
                 <a:latin typeface="Calibri"/>
               </a:rPr>
-              <a:t>Sales-to-Dealer outlook — FY2027</a:t>
+              <a:t>Service-parts coverage: fuel filter is the clear gap</a:t>
             </a:r>
           </a:p>
         </p:txBody>
@@ -14825,16 +13989,118 @@
           </a:p>
         </p:txBody>
       </p:sp>
-      <p:sp>
-        <p:nvSpPr>
-          <p:cNvPr id="8" name="TextBox 7"/>
+      <p:pic>
+        <p:nvPicPr>
+          <p:cNvPr id="8" name="Picture 7" descr="pms.png"/>
+          <p:cNvPicPr>
+            <a:picLocks noChangeAspect="1"/>
+          </p:cNvPicPr>
+          <p:nvPr/>
+        </p:nvPicPr>
+        <p:blipFill>
+          <a:blip r:embed="rId3"/>
+          <a:stretch>
+            <a:fillRect/>
+          </a:stretch>
+        </p:blipFill>
+        <p:spPr>
+          <a:xfrm>
+            <a:off x="292608" y="2050572"/>
+            <a:ext cx="7178040" cy="3168335"/>
+          </a:xfrm>
+          <a:prstGeom prst="rect">
+            <a:avLst/>
+          </a:prstGeom>
+        </p:spPr>
+      </p:pic>
+      <p:sp>
+        <p:nvSpPr>
+          <p:cNvPr id="9" name="Rectangle 8"/>
+          <p:cNvSpPr/>
+          <p:nvPr/>
+        </p:nvSpPr>
+        <p:spPr>
+          <a:xfrm>
+            <a:off x="7726679" y="1188720"/>
+            <a:ext cx="22000" cy="4892040"/>
+          </a:xfrm>
+          <a:prstGeom prst="rect">
+            <a:avLst/>
+          </a:prstGeom>
+          <a:solidFill>
+            <a:srgbClr val="ECECEC"/>
+          </a:solidFill>
+          <a:ln>
+            <a:noFill/>
+          </a:ln>
+        </p:spPr>
+        <p:style>
+          <a:lnRef idx="1">
+            <a:schemeClr val="accent1"/>
+          </a:lnRef>
+          <a:fillRef idx="3">
+            <a:schemeClr val="accent1"/>
+          </a:fillRef>
+          <a:effectRef idx="2">
+            <a:schemeClr val="accent1"/>
+          </a:effectRef>
+          <a:fontRef idx="minor">
+            <a:schemeClr val="lt1"/>
+          </a:fontRef>
+        </p:style>
+        <p:txBody>
+          <a:bodyPr rtlCol="0" anchor="ctr"/>
+          <a:lstStyle/>
+          <a:p>
+            <a:pPr algn="ctr"/>
+          </a:p>
+        </p:txBody>
+      </p:sp>
+      <p:sp>
+        <p:nvSpPr>
+          <p:cNvPr id="10" name="TextBox 9"/>
           <p:cNvSpPr txBox="1"/>
           <p:nvPr/>
         </p:nvSpPr>
         <p:spPr>
           <a:xfrm>
-            <a:off x="292608" y="1234440"/>
-            <a:ext cx="10881360" cy="3840480"/>
+            <a:off x="7927847" y="1234440"/>
+            <a:ext cx="3886200" cy="320040"/>
+          </a:xfrm>
+          <a:prstGeom prst="rect">
+            <a:avLst/>
+          </a:prstGeom>
+          <a:noFill/>
+        </p:spPr>
+        <p:txBody>
+          <a:bodyPr wrap="square">
+            <a:spAutoFit/>
+          </a:bodyPr>
+          <a:lstStyle/>
+          <a:p>
+            <a:pPr algn="l"/>
+            <a:r>
+              <a:rPr sz="1200" b="1">
+                <a:solidFill>
+                  <a:srgbClr val="CC0E1E"/>
+                </a:solidFill>
+                <a:latin typeface="Calibri"/>
+              </a:rPr>
+              <a:t>TAKEAWAYS</a:t>
+            </a:r>
+          </a:p>
+        </p:txBody>
+      </p:sp>
+      <p:sp>
+        <p:nvSpPr>
+          <p:cNvPr id="11" name="TextBox 10"/>
+          <p:cNvSpPr txBox="1"/>
+          <p:nvPr/>
+        </p:nvSpPr>
+        <p:spPr>
+          <a:xfrm>
+            <a:off x="7927847" y="1691640"/>
+            <a:ext cx="3794760" cy="4343400"/>
           </a:xfrm>
           <a:prstGeom prst="rect">
             <a:avLst/>
@@ -14856,7 +14122,7 @@
               </a:spcAft>
             </a:pPr>
             <a:r>
-              <a:rPr sz="1500" b="1">
+              <a:rPr sz="1250" b="1">
                 <a:solidFill>
                   <a:srgbClr val="CC0E1E"/>
                 </a:solidFill>
@@ -14865,13 +14131,13 @@
               <a:t>—  </a:t>
             </a:r>
             <a:r>
-              <a:rPr sz="1500">
+              <a:rPr sz="1250">
                 <a:solidFill>
                   <a:srgbClr val="1A1A1A"/>
                 </a:solidFill>
                 <a:latin typeface="Calibri"/>
               </a:rPr>
-              <a:t>FY2026 Sales-to-Dealer is EUR 429,820 (working estimate).</a:t>
+              <a:t>Fuel filter 18.2% against 46.8% for the rest of the network.</a:t>
             </a:r>
           </a:p>
           <a:p>
@@ -14884,7 +14150,7 @@
               </a:spcAft>
             </a:pPr>
             <a:r>
-              <a:rPr sz="1500" b="1">
+              <a:rPr sz="1250" b="1">
                 <a:solidFill>
                   <a:srgbClr val="CC0E1E"/>
                 </a:solidFill>
@@ -14893,13 +14159,13 @@
               <a:t>—  </a:t>
             </a:r>
             <a:r>
-              <a:rPr sz="1500">
+              <a:rPr sz="1250">
                 <a:solidFill>
                   <a:srgbClr val="1A1A1A"/>
                 </a:solidFill>
                 <a:latin typeface="Calibri"/>
               </a:rPr>
-              <a:t>The working fleet movement into FY2027 is -0.7%.</a:t>
+              <a:t>Brake rotor 42.5% against 54.6% for the rest of the network.</a:t>
             </a:r>
           </a:p>
           <a:p>
@@ -14912,7 +14178,7 @@
               </a:spcAft>
             </a:pPr>
             <a:r>
-              <a:rPr sz="1500" b="1">
+              <a:rPr sz="1250" b="1">
                 <a:solidFill>
                   <a:srgbClr val="CC0E1E"/>
                 </a:solidFill>
@@ -14921,13 +14187,13 @@
               <a:t>—  </a:t>
             </a:r>
             <a:r>
-              <a:rPr sz="1500">
+              <a:rPr sz="1250">
                 <a:solidFill>
                   <a:srgbClr val="1A1A1A"/>
                 </a:solidFill>
                 <a:latin typeface="Calibri"/>
               </a:rPr>
-              <a:t>Applying fleet movement, the 5% price adjustment and 1.8% additional growth gives a FY2027 Sales-to-Dealer target of EUR 456,382.</a:t>
+              <a:t>Every market here is measured on the same fleet-and-interval model, so the comparison is like-for-like even where the underlying interval assumption is debatable.</a:t>
             </a:r>
           </a:p>
           <a:p>
@@ -14940,7 +14206,7 @@
               </a:spcAft>
             </a:pPr>
             <a:r>
-              <a:rPr sz="1500" b="1">
+              <a:rPr sz="1250" b="1">
                 <a:solidFill>
                   <a:srgbClr val="CC0E1E"/>
                 </a:solidFill>
@@ -14949,13 +14215,13 @@
               <a:t>—  </a:t>
             </a:r>
             <a:r>
-              <a:rPr sz="1500">
+              <a:rPr sz="1250">
                 <a:solidFill>
                   <a:srgbClr val="1A1A1A"/>
                 </a:solidFill>
                 <a:latin typeface="Calibri"/>
               </a:rPr>
-              <a:t>The discussion is held in Sales-to-Dealer amounts; ISZE billing remains an internal reconciliation measure.</a:t>
+              <a:t>Worth agreeing which category we tackle first, and what the joint action is.</a:t>
             </a:r>
           </a:p>
         </p:txBody>
